--- a/AutomaTivio/saida/2026-08/pptx/Tivio Banks - Relatório de Gestão - Agosto 2026.pptx
+++ b/AutomaTivio/saida/2026-08/pptx/Tivio Banks - Relatório de Gestão - Agosto 2026.pptx
@@ -4248,122 +4248,122 @@
                           </a:solidFill>
                           <a:latin typeface="Versos"/>
                         </a:rPr>
-                        <a:t>101%</a:t>
-                      </a:r>
-                    </a:p>
-                  </a:txBody>
-                  <a:tcPr marL="43200" marR="43200" marT="0" marB="0">
-                    <a:solidFill>
-                      <a:srgbClr val="F4F7F9"/>
-                    </a:solidFill>
-                  </a:tcPr>
-                </a:tc>
-                <a:tc>
-                  <a:txBody>
-                    <a:bodyPr/>
-                    <a:lstStyle/>
-                    <a:p>
-                      <a:pPr algn="r"/>
-                      <a:r>
-                        <a:rPr sz="850" b="0">
-                          <a:solidFill>
-                            <a:srgbClr val="1A1A1A"/>
-                          </a:solidFill>
-                          <a:latin typeface="Versos"/>
-                        </a:rPr>
-                        <a:t>100%</a:t>
-                      </a:r>
-                    </a:p>
-                  </a:txBody>
-                  <a:tcPr marL="43200" marR="43200" marT="0" marB="0">
-                    <a:solidFill>
-                      <a:srgbClr val="F4F7F9"/>
-                    </a:solidFill>
-                  </a:tcPr>
-                </a:tc>
-                <a:tc>
-                  <a:txBody>
-                    <a:bodyPr/>
-                    <a:lstStyle/>
-                    <a:p>
-                      <a:pPr algn="r"/>
-                      <a:r>
-                        <a:rPr sz="850" b="0">
-                          <a:solidFill>
-                            <a:srgbClr val="1A1A1A"/>
-                          </a:solidFill>
-                          <a:latin typeface="Versos"/>
-                        </a:rPr>
-                        <a:t>100%</a:t>
-                      </a:r>
-                    </a:p>
-                  </a:txBody>
-                  <a:tcPr marL="43200" marR="43200" marT="0" marB="0">
-                    <a:solidFill>
-                      <a:srgbClr val="F4F7F9"/>
-                    </a:solidFill>
-                  </a:tcPr>
-                </a:tc>
-                <a:tc>
-                  <a:txBody>
-                    <a:bodyPr/>
-                    <a:lstStyle/>
-                    <a:p>
-                      <a:pPr algn="r"/>
-                      <a:r>
-                        <a:rPr sz="850" b="0">
-                          <a:solidFill>
-                            <a:srgbClr val="1A1A1A"/>
-                          </a:solidFill>
-                          <a:latin typeface="Versos"/>
-                        </a:rPr>
-                        <a:t>101%</a:t>
-                      </a:r>
-                    </a:p>
-                  </a:txBody>
-                  <a:tcPr marL="43200" marR="43200" marT="0" marB="0">
-                    <a:solidFill>
-                      <a:srgbClr val="F4F7F9"/>
-                    </a:solidFill>
-                  </a:tcPr>
-                </a:tc>
-                <a:tc>
-                  <a:txBody>
-                    <a:bodyPr/>
-                    <a:lstStyle/>
-                    <a:p>
-                      <a:pPr algn="r"/>
-                      <a:r>
-                        <a:rPr sz="850" b="0">
-                          <a:solidFill>
-                            <a:srgbClr val="1A1A1A"/>
-                          </a:solidFill>
-                          <a:latin typeface="Versos"/>
-                        </a:rPr>
-                        <a:t>103%</a:t>
-                      </a:r>
-                    </a:p>
-                  </a:txBody>
-                  <a:tcPr marL="43200" marR="43200" marT="0" marB="0">
-                    <a:solidFill>
-                      <a:srgbClr val="F4F7F9"/>
-                    </a:solidFill>
-                  </a:tcPr>
-                </a:tc>
-                <a:tc>
-                  <a:txBody>
-                    <a:bodyPr/>
-                    <a:lstStyle/>
-                    <a:p>
-                      <a:pPr algn="r"/>
-                      <a:r>
-                        <a:rPr sz="850" b="0">
-                          <a:solidFill>
-                            <a:srgbClr val="1A1A1A"/>
-                          </a:solidFill>
-                          <a:latin typeface="Versos"/>
-                        </a:rPr>
-                        <a:t>109%</a:t>
+                        <a:t>100,59%</a:t>
+                      </a:r>
+                    </a:p>
+                  </a:txBody>
+                  <a:tcPr marL="43200" marR="43200" marT="0" marB="0">
+                    <a:solidFill>
+                      <a:srgbClr val="F4F7F9"/>
+                    </a:solidFill>
+                  </a:tcPr>
+                </a:tc>
+                <a:tc>
+                  <a:txBody>
+                    <a:bodyPr/>
+                    <a:lstStyle/>
+                    <a:p>
+                      <a:pPr algn="r"/>
+                      <a:r>
+                        <a:rPr sz="850" b="0">
+                          <a:solidFill>
+                            <a:srgbClr val="1A1A1A"/>
+                          </a:solidFill>
+                          <a:latin typeface="Versos"/>
+                        </a:rPr>
+                        <a:t>100,31%</a:t>
+                      </a:r>
+                    </a:p>
+                  </a:txBody>
+                  <a:tcPr marL="43200" marR="43200" marT="0" marB="0">
+                    <a:solidFill>
+                      <a:srgbClr val="F4F7F9"/>
+                    </a:solidFill>
+                  </a:tcPr>
+                </a:tc>
+                <a:tc>
+                  <a:txBody>
+                    <a:bodyPr/>
+                    <a:lstStyle/>
+                    <a:p>
+                      <a:pPr algn="r"/>
+                      <a:r>
+                        <a:rPr sz="850" b="0">
+                          <a:solidFill>
+                            <a:srgbClr val="1A1A1A"/>
+                          </a:solidFill>
+                          <a:latin typeface="Versos"/>
+                        </a:rPr>
+                        <a:t>100,43%</a:t>
+                      </a:r>
+                    </a:p>
+                  </a:txBody>
+                  <a:tcPr marL="43200" marR="43200" marT="0" marB="0">
+                    <a:solidFill>
+                      <a:srgbClr val="F4F7F9"/>
+                    </a:solidFill>
+                  </a:tcPr>
+                </a:tc>
+                <a:tc>
+                  <a:txBody>
+                    <a:bodyPr/>
+                    <a:lstStyle/>
+                    <a:p>
+                      <a:pPr algn="r"/>
+                      <a:r>
+                        <a:rPr sz="850" b="0">
+                          <a:solidFill>
+                            <a:srgbClr val="1A1A1A"/>
+                          </a:solidFill>
+                          <a:latin typeface="Versos"/>
+                        </a:rPr>
+                        <a:t>101,12%</a:t>
+                      </a:r>
+                    </a:p>
+                  </a:txBody>
+                  <a:tcPr marL="43200" marR="43200" marT="0" marB="0">
+                    <a:solidFill>
+                      <a:srgbClr val="F4F7F9"/>
+                    </a:solidFill>
+                  </a:tcPr>
+                </a:tc>
+                <a:tc>
+                  <a:txBody>
+                    <a:bodyPr/>
+                    <a:lstStyle/>
+                    <a:p>
+                      <a:pPr algn="r"/>
+                      <a:r>
+                        <a:rPr sz="850" b="0">
+                          <a:solidFill>
+                            <a:srgbClr val="1A1A1A"/>
+                          </a:solidFill>
+                          <a:latin typeface="Versos"/>
+                        </a:rPr>
+                        <a:t>102,80%</a:t>
+                      </a:r>
+                    </a:p>
+                  </a:txBody>
+                  <a:tcPr marL="43200" marR="43200" marT="0" marB="0">
+                    <a:solidFill>
+                      <a:srgbClr val="F4F7F9"/>
+                    </a:solidFill>
+                  </a:tcPr>
+                </a:tc>
+                <a:tc>
+                  <a:txBody>
+                    <a:bodyPr/>
+                    <a:lstStyle/>
+                    <a:p>
+                      <a:pPr algn="r"/>
+                      <a:r>
+                        <a:rPr sz="850" b="0">
+                          <a:solidFill>
+                            <a:srgbClr val="1A1A1A"/>
+                          </a:solidFill>
+                          <a:latin typeface="Versos"/>
+                        </a:rPr>
+                        <a:t>108,74%</a:t>
                       </a:r>
                     </a:p>
                   </a:txBody>

--- a/AutomaTivio/saida/2026-08/pptx/Tivio Banks - Relatório de Gestão - Agosto 2026.pptx
+++ b/AutomaTivio/saida/2026-08/pptx/Tivio Banks - Relatório de Gestão - Agosto 2026.pptx
@@ -6945,7 +6945,7 @@
             <a:r>
               <a:rPr sz="1012" b="0" i="0">
                 <a:solidFill>
-                  <a:srgbClr val="C1F4D4"/>
+                  <a:srgbClr val="BFDAEA"/>
                 </a:solidFill>
                 <a:latin typeface="Versos"/>
               </a:rPr>
@@ -7204,7 +7204,7 @@
             <a:r>
               <a:rPr sz="1012" b="0" i="0">
                 <a:solidFill>
-                  <a:srgbClr val="C1F4D4"/>
+                  <a:srgbClr val="BFDAEA"/>
                 </a:solidFill>
                 <a:latin typeface="Versos"/>
               </a:rPr>
@@ -7463,7 +7463,7 @@
             <a:r>
               <a:rPr sz="1012" b="0" i="0">
                 <a:solidFill>
-                  <a:srgbClr val="C1F4D4"/>
+                  <a:srgbClr val="BFDAEA"/>
                 </a:solidFill>
                 <a:latin typeface="Versos"/>
               </a:rPr>
@@ -7722,7 +7722,7 @@
             <a:r>
               <a:rPr sz="1012" b="0" i="0">
                 <a:solidFill>
-                  <a:srgbClr val="C1F4D4"/>
+                  <a:srgbClr val="BFDAEA"/>
                 </a:solidFill>
                 <a:latin typeface="Versos"/>
               </a:rPr>
@@ -7981,7 +7981,7 @@
             <a:r>
               <a:rPr sz="1012" b="0" i="0">
                 <a:solidFill>
-                  <a:srgbClr val="C1F4D4"/>
+                  <a:srgbClr val="BFDAEA"/>
                 </a:solidFill>
                 <a:latin typeface="Versos"/>
               </a:rPr>
@@ -8240,7 +8240,7 @@
             <a:r>
               <a:rPr sz="1012" b="0" i="0">
                 <a:solidFill>
-                  <a:srgbClr val="C1F4D4"/>
+                  <a:srgbClr val="BFDAEA"/>
                 </a:solidFill>
                 <a:latin typeface="Versos"/>
               </a:rPr>
@@ -8499,7 +8499,7 @@
             <a:r>
               <a:rPr sz="1012" b="0" i="0">
                 <a:solidFill>
-                  <a:srgbClr val="C1F4D4"/>
+                  <a:srgbClr val="BFDAEA"/>
                 </a:solidFill>
                 <a:latin typeface="Versos"/>
               </a:rPr>
@@ -8758,7 +8758,7 @@
             <a:r>
               <a:rPr sz="1012" b="0" i="0">
                 <a:solidFill>
-                  <a:srgbClr val="C1F4D4"/>
+                  <a:srgbClr val="BFDAEA"/>
                 </a:solidFill>
                 <a:latin typeface="Versos"/>
               </a:rPr>
@@ -9017,7 +9017,7 @@
             <a:r>
               <a:rPr sz="1012" b="0" i="0">
                 <a:solidFill>
-                  <a:srgbClr val="C1F4D4"/>
+                  <a:srgbClr val="BFDAEA"/>
                 </a:solidFill>
                 <a:latin typeface="Versos"/>
               </a:rPr>
@@ -9276,7 +9276,7 @@
             <a:r>
               <a:rPr sz="1012" b="0" i="0">
                 <a:solidFill>
-                  <a:srgbClr val="C1F4D4"/>
+                  <a:srgbClr val="BFDAEA"/>
                 </a:solidFill>
                 <a:latin typeface="Versos"/>
               </a:rPr>
@@ -9535,7 +9535,7 @@
             <a:r>
               <a:rPr sz="1012" b="0" i="0">
                 <a:solidFill>
-                  <a:srgbClr val="C1F4D4"/>
+                  <a:srgbClr val="BFDAEA"/>
                 </a:solidFill>
                 <a:latin typeface="Versos"/>
               </a:rPr>
@@ -9794,7 +9794,7 @@
             <a:r>
               <a:rPr sz="1012" b="0" i="0">
                 <a:solidFill>
-                  <a:srgbClr val="C1F4D4"/>
+                  <a:srgbClr val="BFDAEA"/>
                 </a:solidFill>
                 <a:latin typeface="Versos"/>
               </a:rPr>
@@ -10053,7 +10053,7 @@
             <a:r>
               <a:rPr sz="1012" b="0" i="0">
                 <a:solidFill>
-                  <a:srgbClr val="C1F4D4"/>
+                  <a:srgbClr val="BFDAEA"/>
                 </a:solidFill>
                 <a:latin typeface="Versos"/>
               </a:rPr>
@@ -10312,7 +10312,7 @@
             <a:r>
               <a:rPr sz="1012" b="0" i="0">
                 <a:solidFill>
-                  <a:srgbClr val="C1F4D4"/>
+                  <a:srgbClr val="BFDAEA"/>
                 </a:solidFill>
                 <a:latin typeface="Versos"/>
               </a:rPr>
@@ -10571,7 +10571,7 @@
             <a:r>
               <a:rPr sz="1012" b="0" i="0">
                 <a:solidFill>
-                  <a:srgbClr val="C1F4D4"/>
+                  <a:srgbClr val="BFDAEA"/>
                 </a:solidFill>
                 <a:latin typeface="Versos"/>
               </a:rPr>
@@ -10830,7 +10830,7 @@
             <a:r>
               <a:rPr sz="1012" b="0" i="0">
                 <a:solidFill>
-                  <a:srgbClr val="C1F4D4"/>
+                  <a:srgbClr val="BFDAEA"/>
                 </a:solidFill>
                 <a:latin typeface="Versos"/>
               </a:rPr>
@@ -11089,7 +11089,7 @@
             <a:r>
               <a:rPr sz="1012" b="0" i="0">
                 <a:solidFill>
-                  <a:srgbClr val="C1F4D4"/>
+                  <a:srgbClr val="BFDAEA"/>
                 </a:solidFill>
                 <a:latin typeface="Versos"/>
               </a:rPr>
@@ -11348,7 +11348,7 @@
             <a:r>
               <a:rPr sz="1012" b="0" i="0">
                 <a:solidFill>
-                  <a:srgbClr val="C1F4D4"/>
+                  <a:srgbClr val="BFDAEA"/>
                 </a:solidFill>
                 <a:latin typeface="Versos"/>
               </a:rPr>
@@ -11607,7 +11607,7 @@
             <a:r>
               <a:rPr sz="1012" b="0" i="0">
                 <a:solidFill>
-                  <a:srgbClr val="C1F4D4"/>
+                  <a:srgbClr val="BFDAEA"/>
                 </a:solidFill>
                 <a:latin typeface="Versos"/>
               </a:rPr>
@@ -11866,7 +11866,7 @@
             <a:r>
               <a:rPr sz="1012" b="0" i="0">
                 <a:solidFill>
-                  <a:srgbClr val="C1F4D4"/>
+                  <a:srgbClr val="BFDAEA"/>
                 </a:solidFill>
                 <a:latin typeface="Versos"/>
               </a:rPr>
@@ -12125,7 +12125,7 @@
             <a:r>
               <a:rPr sz="1012" b="0" i="0">
                 <a:solidFill>
-                  <a:srgbClr val="C1F4D4"/>
+                  <a:srgbClr val="BFDAEA"/>
                 </a:solidFill>
                 <a:latin typeface="Versos"/>
               </a:rPr>
@@ -12384,7 +12384,7 @@
             <a:r>
               <a:rPr sz="1012" b="0" i="0">
                 <a:solidFill>
-                  <a:srgbClr val="C1F4D4"/>
+                  <a:srgbClr val="BFDAEA"/>
                 </a:solidFill>
                 <a:latin typeface="Versos"/>
               </a:rPr>
@@ -12643,7 +12643,7 @@
             <a:r>
               <a:rPr sz="1012" b="0" i="0">
                 <a:solidFill>
-                  <a:srgbClr val="C1F4D4"/>
+                  <a:srgbClr val="BFDAEA"/>
                 </a:solidFill>
                 <a:latin typeface="Versos"/>
               </a:rPr>
@@ -13786,7 +13786,7 @@
         <p:spPr>
           <a:xfrm>
             <a:off x="400680" y="6463800"/>
-            <a:ext cx="6758640" cy="285626"/>
+            <a:ext cx="6758640" cy="282555"/>
           </a:xfrm>
           <a:prstGeom prst="rect">
             <a:avLst/>
@@ -13799,11 +13799,11 @@
           <a:p>
             <a:pPr algn="just">
               <a:lnSpc>
-                <a:spcPts val="737"/>
-              </a:lnSpc>
-            </a:pPr>
-            <a:r>
-              <a:rPr sz="604" b="0" i="0">
+                <a:spcPts val="726"/>
+              </a:lnSpc>
+            </a:pPr>
+            <a:r>
+              <a:rPr sz="595" b="0" i="0">
                 <a:solidFill>
                   <a:srgbClr val="E9E9E9"/>
                 </a:solidFill>
@@ -13822,8 +13822,8 @@
         </p:nvSpPr>
         <p:spPr>
           <a:xfrm>
-            <a:off x="400680" y="6771633"/>
-            <a:ext cx="6758640" cy="472972"/>
+            <a:off x="400680" y="6766672"/>
+            <a:ext cx="6758640" cy="466830"/>
           </a:xfrm>
           <a:prstGeom prst="rect">
             <a:avLst/>
@@ -13836,11 +13836,11 @@
           <a:p>
             <a:pPr algn="just">
               <a:lnSpc>
-                <a:spcPts val="737"/>
-              </a:lnSpc>
-            </a:pPr>
-            <a:r>
-              <a:rPr sz="604" b="0" i="0">
+                <a:spcPts val="726"/>
+              </a:lnSpc>
+            </a:pPr>
+            <a:r>
+              <a:rPr sz="595" b="0" i="0">
                 <a:solidFill>
                   <a:srgbClr val="E9E9E9"/>
                 </a:solidFill>
@@ -13859,8 +13859,8 @@
         </p:nvSpPr>
         <p:spPr>
           <a:xfrm>
-            <a:off x="400680" y="7266813"/>
-            <a:ext cx="6758640" cy="847665"/>
+            <a:off x="400680" y="7253820"/>
+            <a:ext cx="6758640" cy="835380"/>
           </a:xfrm>
           <a:prstGeom prst="rect">
             <a:avLst/>
@@ -13873,11 +13873,11 @@
           <a:p>
             <a:pPr algn="just">
               <a:lnSpc>
-                <a:spcPts val="737"/>
-              </a:lnSpc>
-            </a:pPr>
-            <a:r>
-              <a:rPr sz="604" b="0" i="0">
+                <a:spcPts val="726"/>
+              </a:lnSpc>
+            </a:pPr>
+            <a:r>
+              <a:rPr sz="595" b="0" i="0">
                 <a:solidFill>
                   <a:srgbClr val="E9E9E9"/>
                 </a:solidFill>
@@ -13896,8 +13896,8 @@
         </p:nvSpPr>
         <p:spPr>
           <a:xfrm>
-            <a:off x="400680" y="8136686"/>
-            <a:ext cx="6758640" cy="379299"/>
+            <a:off x="400680" y="8109517"/>
+            <a:ext cx="6758640" cy="374692"/>
           </a:xfrm>
           <a:prstGeom prst="rect">
             <a:avLst/>
@@ -13910,11 +13910,11 @@
           <a:p>
             <a:pPr algn="just">
               <a:lnSpc>
-                <a:spcPts val="737"/>
-              </a:lnSpc>
-            </a:pPr>
-            <a:r>
-              <a:rPr sz="604" b="0" i="0">
+                <a:spcPts val="726"/>
+              </a:lnSpc>
+            </a:pPr>
+            <a:r>
+              <a:rPr sz="595" b="0" i="0">
                 <a:solidFill>
                   <a:srgbClr val="E9E9E9"/>
                 </a:solidFill>
@@ -13933,8 +13933,8 @@
         </p:nvSpPr>
         <p:spPr>
           <a:xfrm>
-            <a:off x="400680" y="8538193"/>
-            <a:ext cx="6758640" cy="379299"/>
+            <a:off x="400680" y="8504527"/>
+            <a:ext cx="6758640" cy="374692"/>
           </a:xfrm>
           <a:prstGeom prst="rect">
             <a:avLst/>
@@ -13947,11 +13947,11 @@
           <a:p>
             <a:pPr algn="just">
               <a:lnSpc>
-                <a:spcPts val="737"/>
-              </a:lnSpc>
-            </a:pPr>
-            <a:r>
-              <a:rPr sz="604" b="0" i="0">
+                <a:spcPts val="726"/>
+              </a:lnSpc>
+            </a:pPr>
+            <a:r>
+              <a:rPr sz="595" b="0" i="0">
                 <a:solidFill>
                   <a:srgbClr val="E9E9E9"/>
                 </a:solidFill>

--- a/AutomaTivio/saida/2026-08/pptx/Tivio Banks - Relatório de Gestão - Agosto 2026.pptx
+++ b/AutomaTivio/saida/2026-08/pptx/Tivio Banks - Relatório de Gestão - Agosto 2026.pptx
@@ -3147,7 +3147,7 @@
                 </a:solidFill>
                 <a:latin typeface="Versos"/>
               </a:rPr>
-              <a:t>TIVIO BANKS RF CP RL </a:t>
+              <a:t>TIVIO BANKS RENDA FIXA CRÉDITO PRIVADO FIF – RL </a:t>
             </a:r>
             <a:r>
               <a:rPr sz="833" b="0" i="0">
@@ -4612,7 +4612,7 @@
         </p:nvSpPr>
         <p:spPr>
           <a:xfrm>
-            <a:off x="400680" y="5608693"/>
+            <a:off x="400680" y="5648028"/>
             <a:ext cx="676166" cy="136080"/>
           </a:xfrm>
           <a:prstGeom prst="rect">
@@ -4649,7 +4649,7 @@
         </p:nvSpPr>
         <p:spPr>
           <a:xfrm>
-            <a:off x="2831928" y="5606803"/>
+            <a:off x="2831928" y="5646138"/>
             <a:ext cx="384029" cy="143640"/>
           </a:xfrm>
           <a:prstGeom prst="rect">
@@ -4686,7 +4686,7 @@
         </p:nvSpPr>
         <p:spPr>
           <a:xfrm>
-            <a:off x="400680" y="6013861"/>
+            <a:off x="400680" y="6131868"/>
             <a:ext cx="676166" cy="136080"/>
           </a:xfrm>
           <a:prstGeom prst="rect">
@@ -4723,7 +4723,7 @@
         </p:nvSpPr>
         <p:spPr>
           <a:xfrm>
-            <a:off x="2748650" y="6011971"/>
+            <a:off x="2748650" y="6129978"/>
             <a:ext cx="379852" cy="143640"/>
           </a:xfrm>
           <a:prstGeom prst="rect">
@@ -4760,7 +4760,7 @@
         </p:nvSpPr>
         <p:spPr>
           <a:xfrm>
-            <a:off x="400680" y="6419148"/>
+            <a:off x="400680" y="6615708"/>
             <a:ext cx="676166" cy="136080"/>
           </a:xfrm>
           <a:prstGeom prst="rect">
@@ -4797,7 +4797,7 @@
         </p:nvSpPr>
         <p:spPr>
           <a:xfrm>
-            <a:off x="2730695" y="6417258"/>
+            <a:off x="2730695" y="6613818"/>
             <a:ext cx="368550" cy="143640"/>
           </a:xfrm>
           <a:prstGeom prst="rect">
@@ -4834,7 +4834,7 @@
         </p:nvSpPr>
         <p:spPr>
           <a:xfrm>
-            <a:off x="400680" y="6824317"/>
+            <a:off x="400680" y="7099548"/>
             <a:ext cx="676166" cy="136080"/>
           </a:xfrm>
           <a:prstGeom prst="rect">
@@ -4871,7 +4871,7 @@
         </p:nvSpPr>
         <p:spPr>
           <a:xfrm>
-            <a:off x="2718765" y="6822427"/>
+            <a:off x="2718765" y="7097658"/>
             <a:ext cx="375921" cy="143640"/>
           </a:xfrm>
           <a:prstGeom prst="rect">
@@ -4908,7 +4908,7 @@
         </p:nvSpPr>
         <p:spPr>
           <a:xfrm>
-            <a:off x="400680" y="7229604"/>
+            <a:off x="400680" y="7583388"/>
             <a:ext cx="676166" cy="136080"/>
           </a:xfrm>
           <a:prstGeom prst="rect">
@@ -4945,7 +4945,7 @@
         </p:nvSpPr>
         <p:spPr>
           <a:xfrm>
-            <a:off x="2626745" y="7227714"/>
+            <a:off x="2626745" y="7581498"/>
             <a:ext cx="367321" cy="143640"/>
           </a:xfrm>
           <a:prstGeom prst="rect">
@@ -4982,7 +4982,7 @@
         </p:nvSpPr>
         <p:spPr>
           <a:xfrm>
-            <a:off x="400680" y="7713798"/>
+            <a:off x="400680" y="8234493"/>
             <a:ext cx="3412281" cy="143640"/>
           </a:xfrm>
           <a:prstGeom prst="rect">
@@ -5019,7 +5019,7 @@
         </p:nvSpPr>
         <p:spPr>
           <a:xfrm>
-            <a:off x="400680" y="8114006"/>
+            <a:off x="400680" y="8652538"/>
             <a:ext cx="518918" cy="136080"/>
           </a:xfrm>
           <a:prstGeom prst="rect">
@@ -5056,7 +5056,7 @@
         </p:nvSpPr>
         <p:spPr>
           <a:xfrm>
-            <a:off x="2960448" y="8112116"/>
+            <a:off x="2960448" y="8650648"/>
             <a:ext cx="481694" cy="143640"/>
           </a:xfrm>
           <a:prstGeom prst="rect">
@@ -5093,7 +5093,7 @@
         </p:nvSpPr>
         <p:spPr>
           <a:xfrm>
-            <a:off x="400680" y="8371046"/>
+            <a:off x="400680" y="8945251"/>
             <a:ext cx="518918" cy="136080"/>
           </a:xfrm>
           <a:prstGeom prst="rect">
@@ -5130,7 +5130,7 @@
         </p:nvSpPr>
         <p:spPr>
           <a:xfrm>
-            <a:off x="1657884" y="8369156"/>
+            <a:off x="1657884" y="8943361"/>
             <a:ext cx="439803" cy="143640"/>
           </a:xfrm>
           <a:prstGeom prst="rect">
@@ -5167,7 +5167,7 @@
         </p:nvSpPr>
         <p:spPr>
           <a:xfrm>
-            <a:off x="400680" y="8628086"/>
+            <a:off x="400680" y="9237965"/>
             <a:ext cx="518918" cy="136080"/>
           </a:xfrm>
           <a:prstGeom prst="rect">
@@ -5204,7 +5204,7 @@
         </p:nvSpPr>
         <p:spPr>
           <a:xfrm>
-            <a:off x="1157743" y="8626196"/>
+            <a:off x="1157743" y="9236075"/>
             <a:ext cx="395577" cy="143640"/>
           </a:xfrm>
           <a:prstGeom prst="rect">
@@ -5241,7 +5241,7 @@
         </p:nvSpPr>
         <p:spPr>
           <a:xfrm>
-            <a:off x="400680" y="8885126"/>
+            <a:off x="400680" y="9530679"/>
             <a:ext cx="518918" cy="136080"/>
           </a:xfrm>
           <a:prstGeom prst="rect">
@@ -5278,7 +5278,7 @@
         </p:nvSpPr>
         <p:spPr>
           <a:xfrm>
-            <a:off x="1120415" y="8883236"/>
+            <a:off x="1120415" y="9528789"/>
             <a:ext cx="390908" cy="143640"/>
           </a:xfrm>
           <a:prstGeom prst="rect">
@@ -5315,7 +5315,7 @@
         </p:nvSpPr>
         <p:spPr>
           <a:xfrm>
-            <a:off x="400680" y="9142166"/>
+            <a:off x="400680" y="9823393"/>
             <a:ext cx="518918" cy="136080"/>
           </a:xfrm>
           <a:prstGeom prst="rect">
@@ -5352,7 +5352,7 @@
         </p:nvSpPr>
         <p:spPr>
           <a:xfrm>
-            <a:off x="1115808" y="9140276"/>
+            <a:off x="1115808" y="9821503"/>
             <a:ext cx="357370" cy="143640"/>
           </a:xfrm>
           <a:prstGeom prst="rect">
@@ -5426,7 +5426,7 @@
         </p:nvSpPr>
         <p:spPr>
           <a:xfrm>
-            <a:off x="3802680" y="5525296"/>
+            <a:off x="3802680" y="5646256"/>
             <a:ext cx="1603929" cy="120960"/>
           </a:xfrm>
           <a:prstGeom prst="rect">
@@ -5463,7 +5463,7 @@
         </p:nvSpPr>
         <p:spPr>
           <a:xfrm>
-            <a:off x="6752497" y="5517618"/>
+            <a:off x="6752497" y="5638578"/>
             <a:ext cx="466215" cy="143640"/>
           </a:xfrm>
           <a:prstGeom prst="rect">
@@ -5500,7 +5500,7 @@
         </p:nvSpPr>
         <p:spPr>
           <a:xfrm>
-            <a:off x="3802680" y="5752096"/>
+            <a:off x="3802680" y="6114976"/>
             <a:ext cx="1603929" cy="120960"/>
           </a:xfrm>
           <a:prstGeom prst="rect">
@@ -5537,7 +5537,7 @@
         </p:nvSpPr>
         <p:spPr>
           <a:xfrm>
-            <a:off x="5892075" y="5744418"/>
+            <a:off x="5892075" y="6107298"/>
             <a:ext cx="422849" cy="143640"/>
           </a:xfrm>
           <a:prstGeom prst="rect">
@@ -6185,21 +6185,21 @@
         </p:nvSpPr>
         <p:spPr>
           <a:xfrm>
-            <a:off x="2580322" y="1807076"/>
-            <a:ext cx="1133536" cy="113400"/>
-          </a:xfrm>
-          <a:prstGeom prst="rect">
-            <a:avLst/>
-          </a:prstGeom>
-          <a:noFill/>
-        </p:spPr>
-        <p:txBody>
-          <a:bodyPr wrap="none" lIns="0" rIns="0" tIns="0" bIns="0" anchor="t"/>
-          <a:lstStyle/>
-          <a:p>
-            <a:pPr algn="ctr">
-              <a:lnSpc>
-                <a:spcPts val="851"/>
+            <a:off x="2404080" y="1811801"/>
+            <a:ext cx="833414" cy="113400"/>
+          </a:xfrm>
+          <a:prstGeom prst="rect">
+            <a:avLst/>
+          </a:prstGeom>
+          <a:noFill/>
+        </p:spPr>
+        <p:txBody>
+          <a:bodyPr wrap="none" lIns="0" rIns="0" tIns="0" bIns="0" anchor="t"/>
+          <a:lstStyle/>
+          <a:p>
+            <a:pPr algn="ctr">
+              <a:lnSpc>
+                <a:spcPts val="889"/>
               </a:lnSpc>
             </a:pPr>
             <a:r>
@@ -6222,21 +6222,21 @@
         </p:nvSpPr>
         <p:spPr>
           <a:xfrm>
-            <a:off x="3715621" y="1807076"/>
-            <a:ext cx="425061" cy="113400"/>
-          </a:xfrm>
-          <a:prstGeom prst="rect">
-            <a:avLst/>
-          </a:prstGeom>
-          <a:noFill/>
-        </p:spPr>
-        <p:txBody>
-          <a:bodyPr wrap="none" lIns="0" rIns="0" tIns="0" bIns="0" anchor="t"/>
-          <a:lstStyle/>
-          <a:p>
-            <a:pPr algn="ctr">
-              <a:lnSpc>
-                <a:spcPts val="851"/>
+            <a:off x="3296160" y="1811801"/>
+            <a:ext cx="503193" cy="113400"/>
+          </a:xfrm>
+          <a:prstGeom prst="rect">
+            <a:avLst/>
+          </a:prstGeom>
+          <a:noFill/>
+        </p:spPr>
+        <p:txBody>
+          <a:bodyPr wrap="none" lIns="0" rIns="0" tIns="0" bIns="0" anchor="t"/>
+          <a:lstStyle/>
+          <a:p>
+            <a:pPr algn="ctr">
+              <a:lnSpc>
+                <a:spcPts val="889"/>
               </a:lnSpc>
             </a:pPr>
             <a:r>
@@ -6259,21 +6259,21 @@
         </p:nvSpPr>
         <p:spPr>
           <a:xfrm>
-            <a:off x="4169694" y="1807076"/>
-            <a:ext cx="676903" cy="113400"/>
-          </a:xfrm>
-          <a:prstGeom prst="rect">
-            <a:avLst/>
-          </a:prstGeom>
-          <a:noFill/>
-        </p:spPr>
-        <p:txBody>
-          <a:bodyPr wrap="none" lIns="0" rIns="0" tIns="0" bIns="0" anchor="t"/>
-          <a:lstStyle/>
-          <a:p>
-            <a:pPr algn="ctr">
-              <a:lnSpc>
-                <a:spcPts val="851"/>
+            <a:off x="3870720" y="1811801"/>
+            <a:ext cx="723340" cy="113400"/>
+          </a:xfrm>
+          <a:prstGeom prst="rect">
+            <a:avLst/>
+          </a:prstGeom>
+          <a:noFill/>
+        </p:spPr>
+        <p:txBody>
+          <a:bodyPr wrap="none" lIns="0" rIns="0" tIns="0" bIns="0" anchor="t"/>
+          <a:lstStyle/>
+          <a:p>
+            <a:pPr algn="ctr">
+              <a:lnSpc>
+                <a:spcPts val="889"/>
               </a:lnSpc>
             </a:pPr>
             <a:r>
@@ -6296,21 +6296,21 @@
         </p:nvSpPr>
         <p:spPr>
           <a:xfrm>
-            <a:off x="4865923" y="1807076"/>
-            <a:ext cx="1172848" cy="113400"/>
-          </a:xfrm>
-          <a:prstGeom prst="rect">
-            <a:avLst/>
-          </a:prstGeom>
-          <a:noFill/>
-        </p:spPr>
-        <p:txBody>
-          <a:bodyPr wrap="none" lIns="0" rIns="0" tIns="0" bIns="0" anchor="t"/>
-          <a:lstStyle/>
-          <a:p>
-            <a:pPr algn="ctr">
-              <a:lnSpc>
-                <a:spcPts val="851"/>
+            <a:off x="4656960" y="1755337"/>
+            <a:ext cx="922320" cy="226327"/>
+          </a:xfrm>
+          <a:prstGeom prst="rect">
+            <a:avLst/>
+          </a:prstGeom>
+          <a:noFill/>
+        </p:spPr>
+        <p:txBody>
+          <a:bodyPr wrap="square" lIns="0" rIns="0" tIns="0" bIns="0" anchor="t"/>
+          <a:lstStyle/>
+          <a:p>
+            <a:pPr algn="ctr">
+              <a:lnSpc>
+                <a:spcPts val="889"/>
               </a:lnSpc>
             </a:pPr>
             <a:r>
@@ -6333,21 +6333,21 @@
         </p:nvSpPr>
         <p:spPr>
           <a:xfrm>
-            <a:off x="6039022" y="1807076"/>
-            <a:ext cx="488083" cy="113400"/>
-          </a:xfrm>
-          <a:prstGeom prst="rect">
-            <a:avLst/>
-          </a:prstGeom>
-          <a:noFill/>
-        </p:spPr>
-        <p:txBody>
-          <a:bodyPr wrap="none" lIns="0" rIns="0" tIns="0" bIns="0" anchor="t"/>
-          <a:lstStyle/>
-          <a:p>
-            <a:pPr algn="ctr">
-              <a:lnSpc>
-                <a:spcPts val="851"/>
+            <a:off x="5670000" y="1811801"/>
+            <a:ext cx="644716" cy="113400"/>
+          </a:xfrm>
+          <a:prstGeom prst="rect">
+            <a:avLst/>
+          </a:prstGeom>
+          <a:noFill/>
+        </p:spPr>
+        <p:txBody>
+          <a:bodyPr wrap="none" lIns="0" rIns="0" tIns="0" bIns="0" anchor="t"/>
+          <a:lstStyle/>
+          <a:p>
+            <a:pPr algn="ctr">
+              <a:lnSpc>
+                <a:spcPts val="889"/>
               </a:lnSpc>
             </a:pPr>
             <a:r>
@@ -6370,21 +6370,21 @@
         </p:nvSpPr>
         <p:spPr>
           <a:xfrm>
-            <a:off x="6553693" y="1807076"/>
-            <a:ext cx="488328" cy="113400"/>
-          </a:xfrm>
-          <a:prstGeom prst="rect">
-            <a:avLst/>
-          </a:prstGeom>
-          <a:noFill/>
-        </p:spPr>
-        <p:txBody>
-          <a:bodyPr wrap="none" lIns="0" rIns="0" tIns="0" bIns="0" anchor="t"/>
-          <a:lstStyle/>
-          <a:p>
-            <a:pPr algn="ctr">
-              <a:lnSpc>
-                <a:spcPts val="851"/>
+            <a:off x="6380640" y="1811801"/>
+            <a:ext cx="644716" cy="113400"/>
+          </a:xfrm>
+          <a:prstGeom prst="rect">
+            <a:avLst/>
+          </a:prstGeom>
+          <a:noFill/>
+        </p:spPr>
+        <p:txBody>
+          <a:bodyPr wrap="none" lIns="0" rIns="0" tIns="0" bIns="0" anchor="t"/>
+          <a:lstStyle/>
+          <a:p>
+            <a:pPr algn="ctr">
+              <a:lnSpc>
+                <a:spcPts val="889"/>
               </a:lnSpc>
             </a:pPr>
             <a:r>
@@ -6407,25 +6407,25 @@
         </p:nvSpPr>
         <p:spPr>
           <a:xfrm>
-            <a:off x="2580322" y="2087977"/>
-            <a:ext cx="1133536" cy="173880"/>
-          </a:xfrm>
-          <a:prstGeom prst="rect">
-            <a:avLst/>
-          </a:prstGeom>
-          <a:noFill/>
-        </p:spPr>
-        <p:txBody>
-          <a:bodyPr wrap="none" lIns="0" rIns="0" tIns="0" bIns="0" anchor="t"/>
-          <a:lstStyle/>
-          <a:p>
-            <a:pPr algn="ctr">
-              <a:lnSpc>
-                <a:spcPts val="1357"/>
-              </a:lnSpc>
-            </a:pPr>
-            <a:r>
-              <a:rPr sz="1131" b="1" i="0">
+            <a:off x="2404080" y="2107586"/>
+            <a:ext cx="833414" cy="151200"/>
+          </a:xfrm>
+          <a:prstGeom prst="rect">
+            <a:avLst/>
+          </a:prstGeom>
+          <a:noFill/>
+        </p:spPr>
+        <p:txBody>
+          <a:bodyPr wrap="none" lIns="0" rIns="0" tIns="0" bIns="0" anchor="t"/>
+          <a:lstStyle/>
+          <a:p>
+            <a:pPr algn="ctr">
+              <a:lnSpc>
+                <a:spcPts val="1163"/>
+              </a:lnSpc>
+            </a:pPr>
+            <a:r>
+              <a:rPr sz="1012" b="1" i="0">
                 <a:solidFill>
                   <a:srgbClr val="FFFFFF"/>
                 </a:solidFill>
@@ -6444,25 +6444,25 @@
         </p:nvSpPr>
         <p:spPr>
           <a:xfrm>
-            <a:off x="3715621" y="2087977"/>
-            <a:ext cx="425061" cy="173880"/>
-          </a:xfrm>
-          <a:prstGeom prst="rect">
-            <a:avLst/>
-          </a:prstGeom>
-          <a:noFill/>
-        </p:spPr>
-        <p:txBody>
-          <a:bodyPr wrap="none" lIns="0" rIns="0" tIns="0" bIns="0" anchor="t"/>
-          <a:lstStyle/>
-          <a:p>
-            <a:pPr algn="ctr">
-              <a:lnSpc>
-                <a:spcPts val="1357"/>
-              </a:lnSpc>
-            </a:pPr>
-            <a:r>
-              <a:rPr sz="1131" b="1" i="0">
+            <a:off x="3296160" y="2107586"/>
+            <a:ext cx="503193" cy="151200"/>
+          </a:xfrm>
+          <a:prstGeom prst="rect">
+            <a:avLst/>
+          </a:prstGeom>
+          <a:noFill/>
+        </p:spPr>
+        <p:txBody>
+          <a:bodyPr wrap="none" lIns="0" rIns="0" tIns="0" bIns="0" anchor="t"/>
+          <a:lstStyle/>
+          <a:p>
+            <a:pPr algn="ctr">
+              <a:lnSpc>
+                <a:spcPts val="1163"/>
+              </a:lnSpc>
+            </a:pPr>
+            <a:r>
+              <a:rPr sz="1012" b="1" i="0">
                 <a:solidFill>
                   <a:srgbClr val="FFFFFF"/>
                 </a:solidFill>
@@ -6481,25 +6481,25 @@
         </p:nvSpPr>
         <p:spPr>
           <a:xfrm>
-            <a:off x="4169694" y="2087977"/>
-            <a:ext cx="676903" cy="173880"/>
-          </a:xfrm>
-          <a:prstGeom prst="rect">
-            <a:avLst/>
-          </a:prstGeom>
-          <a:noFill/>
-        </p:spPr>
-        <p:txBody>
-          <a:bodyPr wrap="none" lIns="0" rIns="0" tIns="0" bIns="0" anchor="t"/>
-          <a:lstStyle/>
-          <a:p>
-            <a:pPr algn="ctr">
-              <a:lnSpc>
-                <a:spcPts val="1357"/>
-              </a:lnSpc>
-            </a:pPr>
-            <a:r>
-              <a:rPr sz="1131" b="1" i="0">
+            <a:off x="3870720" y="2107586"/>
+            <a:ext cx="723340" cy="151200"/>
+          </a:xfrm>
+          <a:prstGeom prst="rect">
+            <a:avLst/>
+          </a:prstGeom>
+          <a:noFill/>
+        </p:spPr>
+        <p:txBody>
+          <a:bodyPr wrap="none" lIns="0" rIns="0" tIns="0" bIns="0" anchor="t"/>
+          <a:lstStyle/>
+          <a:p>
+            <a:pPr algn="ctr">
+              <a:lnSpc>
+                <a:spcPts val="1163"/>
+              </a:lnSpc>
+            </a:pPr>
+            <a:r>
+              <a:rPr sz="1012" b="1" i="0">
                 <a:solidFill>
                   <a:srgbClr val="FFFFFF"/>
                 </a:solidFill>
@@ -6518,25 +6518,25 @@
         </p:nvSpPr>
         <p:spPr>
           <a:xfrm>
-            <a:off x="4865923" y="2087977"/>
-            <a:ext cx="1172848" cy="173880"/>
-          </a:xfrm>
-          <a:prstGeom prst="rect">
-            <a:avLst/>
-          </a:prstGeom>
-          <a:noFill/>
-        </p:spPr>
-        <p:txBody>
-          <a:bodyPr wrap="none" lIns="0" rIns="0" tIns="0" bIns="0" anchor="t"/>
-          <a:lstStyle/>
-          <a:p>
-            <a:pPr algn="ctr">
-              <a:lnSpc>
-                <a:spcPts val="1357"/>
-              </a:lnSpc>
-            </a:pPr>
-            <a:r>
-              <a:rPr sz="1131" b="1" i="0">
+            <a:off x="4656960" y="2107586"/>
+            <a:ext cx="959212" cy="151200"/>
+          </a:xfrm>
+          <a:prstGeom prst="rect">
+            <a:avLst/>
+          </a:prstGeom>
+          <a:noFill/>
+        </p:spPr>
+        <p:txBody>
+          <a:bodyPr wrap="none" lIns="0" rIns="0" tIns="0" bIns="0" anchor="t"/>
+          <a:lstStyle/>
+          <a:p>
+            <a:pPr algn="ctr">
+              <a:lnSpc>
+                <a:spcPts val="1163"/>
+              </a:lnSpc>
+            </a:pPr>
+            <a:r>
+              <a:rPr sz="1012" b="1" i="0">
                 <a:solidFill>
                   <a:srgbClr val="FFFFFF"/>
                 </a:solidFill>
@@ -6555,25 +6555,25 @@
         </p:nvSpPr>
         <p:spPr>
           <a:xfrm>
-            <a:off x="6039022" y="2087977"/>
-            <a:ext cx="488083" cy="173880"/>
-          </a:xfrm>
-          <a:prstGeom prst="rect">
-            <a:avLst/>
-          </a:prstGeom>
-          <a:noFill/>
-        </p:spPr>
-        <p:txBody>
-          <a:bodyPr wrap="none" lIns="0" rIns="0" tIns="0" bIns="0" anchor="t"/>
-          <a:lstStyle/>
-          <a:p>
-            <a:pPr algn="ctr">
-              <a:lnSpc>
-                <a:spcPts val="1357"/>
-              </a:lnSpc>
-            </a:pPr>
-            <a:r>
-              <a:rPr sz="1131" b="1" i="0">
+            <a:off x="5670000" y="2107586"/>
+            <a:ext cx="644716" cy="151200"/>
+          </a:xfrm>
+          <a:prstGeom prst="rect">
+            <a:avLst/>
+          </a:prstGeom>
+          <a:noFill/>
+        </p:spPr>
+        <p:txBody>
+          <a:bodyPr wrap="none" lIns="0" rIns="0" tIns="0" bIns="0" anchor="t"/>
+          <a:lstStyle/>
+          <a:p>
+            <a:pPr algn="ctr">
+              <a:lnSpc>
+                <a:spcPts val="1163"/>
+              </a:lnSpc>
+            </a:pPr>
+            <a:r>
+              <a:rPr sz="1012" b="1" i="0">
                 <a:solidFill>
                   <a:srgbClr val="FFFFFF"/>
                 </a:solidFill>
@@ -6592,25 +6592,25 @@
         </p:nvSpPr>
         <p:spPr>
           <a:xfrm>
-            <a:off x="6553693" y="2087977"/>
-            <a:ext cx="488328" cy="173880"/>
-          </a:xfrm>
-          <a:prstGeom prst="rect">
-            <a:avLst/>
-          </a:prstGeom>
-          <a:noFill/>
-        </p:spPr>
-        <p:txBody>
-          <a:bodyPr wrap="none" lIns="0" rIns="0" tIns="0" bIns="0" anchor="t"/>
-          <a:lstStyle/>
-          <a:p>
-            <a:pPr algn="ctr">
-              <a:lnSpc>
-                <a:spcPts val="1357"/>
-              </a:lnSpc>
-            </a:pPr>
-            <a:r>
-              <a:rPr sz="1131" b="1" i="0">
+            <a:off x="6380640" y="2107586"/>
+            <a:ext cx="644716" cy="151200"/>
+          </a:xfrm>
+          <a:prstGeom prst="rect">
+            <a:avLst/>
+          </a:prstGeom>
+          <a:noFill/>
+        </p:spPr>
+        <p:txBody>
+          <a:bodyPr wrap="none" lIns="0" rIns="0" tIns="0" bIns="0" anchor="t"/>
+          <a:lstStyle/>
+          <a:p>
+            <a:pPr algn="ctr">
+              <a:lnSpc>
+                <a:spcPts val="1163"/>
+              </a:lnSpc>
+            </a:pPr>
+            <a:r>
+              <a:rPr sz="1012" b="1" i="0">
                 <a:solidFill>
                   <a:srgbClr val="FFFFFF"/>
                 </a:solidFill>
@@ -6629,21 +6629,21 @@
         </p:nvSpPr>
         <p:spPr>
           <a:xfrm>
-            <a:off x="536760" y="2585756"/>
-            <a:ext cx="2078130" cy="113400"/>
-          </a:xfrm>
-          <a:prstGeom prst="rect">
-            <a:avLst/>
-          </a:prstGeom>
-          <a:noFill/>
-        </p:spPr>
-        <p:txBody>
-          <a:bodyPr wrap="none" lIns="0" rIns="0" tIns="0" bIns="0" anchor="t"/>
-          <a:lstStyle/>
-          <a:p>
-            <a:pPr algn="ctr">
-              <a:lnSpc>
-                <a:spcPts val="851"/>
+            <a:off x="559440" y="2604656"/>
+            <a:ext cx="1824076" cy="113400"/>
+          </a:xfrm>
+          <a:prstGeom prst="rect">
+            <a:avLst/>
+          </a:prstGeom>
+          <a:noFill/>
+        </p:spPr>
+        <p:txBody>
+          <a:bodyPr wrap="none" lIns="0" rIns="0" tIns="0" bIns="0" anchor="t"/>
+          <a:lstStyle/>
+          <a:p>
+            <a:pPr algn="ctr">
+              <a:lnSpc>
+                <a:spcPts val="889"/>
               </a:lnSpc>
             </a:pPr>
             <a:r>
@@ -6666,21 +6666,21 @@
         </p:nvSpPr>
         <p:spPr>
           <a:xfrm>
-            <a:off x="2580322" y="2585756"/>
-            <a:ext cx="1133536" cy="113400"/>
-          </a:xfrm>
-          <a:prstGeom prst="rect">
-            <a:avLst/>
-          </a:prstGeom>
-          <a:noFill/>
-        </p:spPr>
-        <p:txBody>
-          <a:bodyPr wrap="none" lIns="0" rIns="0" tIns="0" bIns="0" anchor="t"/>
-          <a:lstStyle/>
-          <a:p>
-            <a:pPr algn="ctr">
-              <a:lnSpc>
-                <a:spcPts val="851"/>
+            <a:off x="2404080" y="2604656"/>
+            <a:ext cx="833414" cy="113400"/>
+          </a:xfrm>
+          <a:prstGeom prst="rect">
+            <a:avLst/>
+          </a:prstGeom>
+          <a:noFill/>
+        </p:spPr>
+        <p:txBody>
+          <a:bodyPr wrap="none" lIns="0" rIns="0" tIns="0" bIns="0" anchor="t"/>
+          <a:lstStyle/>
+          <a:p>
+            <a:pPr algn="ctr">
+              <a:lnSpc>
+                <a:spcPts val="889"/>
               </a:lnSpc>
             </a:pPr>
             <a:r>
@@ -6703,21 +6703,21 @@
         </p:nvSpPr>
         <p:spPr>
           <a:xfrm>
-            <a:off x="3715621" y="2585756"/>
-            <a:ext cx="425061" cy="113400"/>
-          </a:xfrm>
-          <a:prstGeom prst="rect">
-            <a:avLst/>
-          </a:prstGeom>
-          <a:noFill/>
-        </p:spPr>
-        <p:txBody>
-          <a:bodyPr wrap="none" lIns="0" rIns="0" tIns="0" bIns="0" anchor="t"/>
-          <a:lstStyle/>
-          <a:p>
-            <a:pPr algn="ctr">
-              <a:lnSpc>
-                <a:spcPts val="851"/>
+            <a:off x="3296160" y="2604656"/>
+            <a:ext cx="503193" cy="113400"/>
+          </a:xfrm>
+          <a:prstGeom prst="rect">
+            <a:avLst/>
+          </a:prstGeom>
+          <a:noFill/>
+        </p:spPr>
+        <p:txBody>
+          <a:bodyPr wrap="none" lIns="0" rIns="0" tIns="0" bIns="0" anchor="t"/>
+          <a:lstStyle/>
+          <a:p>
+            <a:pPr algn="ctr">
+              <a:lnSpc>
+                <a:spcPts val="889"/>
               </a:lnSpc>
             </a:pPr>
             <a:r>
@@ -6740,21 +6740,21 @@
         </p:nvSpPr>
         <p:spPr>
           <a:xfrm>
-            <a:off x="4169694" y="2585756"/>
-            <a:ext cx="676903" cy="113400"/>
-          </a:xfrm>
-          <a:prstGeom prst="rect">
-            <a:avLst/>
-          </a:prstGeom>
-          <a:noFill/>
-        </p:spPr>
-        <p:txBody>
-          <a:bodyPr wrap="none" lIns="0" rIns="0" tIns="0" bIns="0" anchor="t"/>
-          <a:lstStyle/>
-          <a:p>
-            <a:pPr algn="ctr">
-              <a:lnSpc>
-                <a:spcPts val="851"/>
+            <a:off x="3870720" y="2604656"/>
+            <a:ext cx="723340" cy="113400"/>
+          </a:xfrm>
+          <a:prstGeom prst="rect">
+            <a:avLst/>
+          </a:prstGeom>
+          <a:noFill/>
+        </p:spPr>
+        <p:txBody>
+          <a:bodyPr wrap="none" lIns="0" rIns="0" tIns="0" bIns="0" anchor="t"/>
+          <a:lstStyle/>
+          <a:p>
+            <a:pPr algn="ctr">
+              <a:lnSpc>
+                <a:spcPts val="889"/>
               </a:lnSpc>
             </a:pPr>
             <a:r>
@@ -6777,21 +6777,21 @@
         </p:nvSpPr>
         <p:spPr>
           <a:xfrm>
-            <a:off x="4865923" y="2585756"/>
-            <a:ext cx="1172848" cy="113400"/>
-          </a:xfrm>
-          <a:prstGeom prst="rect">
-            <a:avLst/>
-          </a:prstGeom>
-          <a:noFill/>
-        </p:spPr>
-        <p:txBody>
-          <a:bodyPr wrap="none" lIns="0" rIns="0" tIns="0" bIns="0" anchor="t"/>
-          <a:lstStyle/>
-          <a:p>
-            <a:pPr algn="ctr">
-              <a:lnSpc>
-                <a:spcPts val="851"/>
+            <a:off x="4656960" y="2548192"/>
+            <a:ext cx="922320" cy="226327"/>
+          </a:xfrm>
+          <a:prstGeom prst="rect">
+            <a:avLst/>
+          </a:prstGeom>
+          <a:noFill/>
+        </p:spPr>
+        <p:txBody>
+          <a:bodyPr wrap="square" lIns="0" rIns="0" tIns="0" bIns="0" anchor="t"/>
+          <a:lstStyle/>
+          <a:p>
+            <a:pPr algn="ctr">
+              <a:lnSpc>
+                <a:spcPts val="889"/>
               </a:lnSpc>
             </a:pPr>
             <a:r>
@@ -6814,21 +6814,21 @@
         </p:nvSpPr>
         <p:spPr>
           <a:xfrm>
-            <a:off x="6039022" y="2585756"/>
-            <a:ext cx="488083" cy="113400"/>
-          </a:xfrm>
-          <a:prstGeom prst="rect">
-            <a:avLst/>
-          </a:prstGeom>
-          <a:noFill/>
-        </p:spPr>
-        <p:txBody>
-          <a:bodyPr wrap="none" lIns="0" rIns="0" tIns="0" bIns="0" anchor="t"/>
-          <a:lstStyle/>
-          <a:p>
-            <a:pPr algn="ctr">
-              <a:lnSpc>
-                <a:spcPts val="851"/>
+            <a:off x="5670000" y="2604656"/>
+            <a:ext cx="644716" cy="113400"/>
+          </a:xfrm>
+          <a:prstGeom prst="rect">
+            <a:avLst/>
+          </a:prstGeom>
+          <a:noFill/>
+        </p:spPr>
+        <p:txBody>
+          <a:bodyPr wrap="none" lIns="0" rIns="0" tIns="0" bIns="0" anchor="t"/>
+          <a:lstStyle/>
+          <a:p>
+            <a:pPr algn="ctr">
+              <a:lnSpc>
+                <a:spcPts val="889"/>
               </a:lnSpc>
             </a:pPr>
             <a:r>
@@ -6851,21 +6851,21 @@
         </p:nvSpPr>
         <p:spPr>
           <a:xfrm>
-            <a:off x="6553693" y="2585756"/>
-            <a:ext cx="488328" cy="113400"/>
-          </a:xfrm>
-          <a:prstGeom prst="rect">
-            <a:avLst/>
-          </a:prstGeom>
-          <a:noFill/>
-        </p:spPr>
-        <p:txBody>
-          <a:bodyPr wrap="none" lIns="0" rIns="0" tIns="0" bIns="0" anchor="t"/>
-          <a:lstStyle/>
-          <a:p>
-            <a:pPr algn="ctr">
-              <a:lnSpc>
-                <a:spcPts val="851"/>
+            <a:off x="6380640" y="2604656"/>
+            <a:ext cx="644716" cy="113400"/>
+          </a:xfrm>
+          <a:prstGeom prst="rect">
+            <a:avLst/>
+          </a:prstGeom>
+          <a:noFill/>
+        </p:spPr>
+        <p:txBody>
+          <a:bodyPr wrap="none" lIns="0" rIns="0" tIns="0" bIns="0" anchor="t"/>
+          <a:lstStyle/>
+          <a:p>
+            <a:pPr algn="ctr">
+              <a:lnSpc>
+                <a:spcPts val="889"/>
               </a:lnSpc>
             </a:pPr>
             <a:r>
@@ -6888,8 +6888,8 @@
         </p:nvSpPr>
         <p:spPr>
           <a:xfrm>
-            <a:off x="604800" y="2863468"/>
-            <a:ext cx="2007369" cy="151200"/>
+            <a:off x="604800" y="2892881"/>
+            <a:ext cx="1776902" cy="151200"/>
           </a:xfrm>
           <a:prstGeom prst="rect">
             <a:avLst/>
@@ -6902,7 +6902,7 @@
           <a:p>
             <a:pPr algn="l">
               <a:lnSpc>
-                <a:spcPts val="1062"/>
+                <a:spcPts val="1163"/>
               </a:lnSpc>
             </a:pPr>
             <a:r>
@@ -6925,21 +6925,21 @@
         </p:nvSpPr>
         <p:spPr>
           <a:xfrm>
-            <a:off x="2580322" y="2870437"/>
-            <a:ext cx="1133536" cy="151200"/>
-          </a:xfrm>
-          <a:prstGeom prst="rect">
-            <a:avLst/>
-          </a:prstGeom>
-          <a:noFill/>
-        </p:spPr>
-        <p:txBody>
-          <a:bodyPr wrap="none" lIns="0" rIns="0" tIns="0" bIns="0" anchor="t"/>
-          <a:lstStyle/>
-          <a:p>
-            <a:pPr algn="ctr">
-              <a:lnSpc>
-                <a:spcPts val="1214"/>
+            <a:off x="2404080" y="2892881"/>
+            <a:ext cx="833414" cy="151200"/>
+          </a:xfrm>
+          <a:prstGeom prst="rect">
+            <a:avLst/>
+          </a:prstGeom>
+          <a:noFill/>
+        </p:spPr>
+        <p:txBody>
+          <a:bodyPr wrap="none" lIns="0" rIns="0" tIns="0" bIns="0" anchor="t"/>
+          <a:lstStyle/>
+          <a:p>
+            <a:pPr algn="ctr">
+              <a:lnSpc>
+                <a:spcPts val="1163"/>
               </a:lnSpc>
             </a:pPr>
             <a:r>
@@ -6962,21 +6962,21 @@
         </p:nvSpPr>
         <p:spPr>
           <a:xfrm>
-            <a:off x="3715621" y="2870437"/>
-            <a:ext cx="425061" cy="151200"/>
-          </a:xfrm>
-          <a:prstGeom prst="rect">
-            <a:avLst/>
-          </a:prstGeom>
-          <a:noFill/>
-        </p:spPr>
-        <p:txBody>
-          <a:bodyPr wrap="none" lIns="0" rIns="0" tIns="0" bIns="0" anchor="t"/>
-          <a:lstStyle/>
-          <a:p>
-            <a:pPr algn="ctr">
-              <a:lnSpc>
-                <a:spcPts val="1214"/>
+            <a:off x="3296160" y="2892881"/>
+            <a:ext cx="503193" cy="151200"/>
+          </a:xfrm>
+          <a:prstGeom prst="rect">
+            <a:avLst/>
+          </a:prstGeom>
+          <a:noFill/>
+        </p:spPr>
+        <p:txBody>
+          <a:bodyPr wrap="none" lIns="0" rIns="0" tIns="0" bIns="0" anchor="t"/>
+          <a:lstStyle/>
+          <a:p>
+            <a:pPr algn="ctr">
+              <a:lnSpc>
+                <a:spcPts val="1163"/>
               </a:lnSpc>
             </a:pPr>
             <a:r>
@@ -6999,21 +6999,21 @@
         </p:nvSpPr>
         <p:spPr>
           <a:xfrm>
-            <a:off x="4169694" y="2870437"/>
-            <a:ext cx="676903" cy="151200"/>
-          </a:xfrm>
-          <a:prstGeom prst="rect">
-            <a:avLst/>
-          </a:prstGeom>
-          <a:noFill/>
-        </p:spPr>
-        <p:txBody>
-          <a:bodyPr wrap="none" lIns="0" rIns="0" tIns="0" bIns="0" anchor="t"/>
-          <a:lstStyle/>
-          <a:p>
-            <a:pPr algn="ctr">
-              <a:lnSpc>
-                <a:spcPts val="1214"/>
+            <a:off x="3870720" y="2892881"/>
+            <a:ext cx="723340" cy="151200"/>
+          </a:xfrm>
+          <a:prstGeom prst="rect">
+            <a:avLst/>
+          </a:prstGeom>
+          <a:noFill/>
+        </p:spPr>
+        <p:txBody>
+          <a:bodyPr wrap="none" lIns="0" rIns="0" tIns="0" bIns="0" anchor="t"/>
+          <a:lstStyle/>
+          <a:p>
+            <a:pPr algn="ctr">
+              <a:lnSpc>
+                <a:spcPts val="1163"/>
               </a:lnSpc>
             </a:pPr>
             <a:r>
@@ -7036,21 +7036,21 @@
         </p:nvSpPr>
         <p:spPr>
           <a:xfrm>
-            <a:off x="4865923" y="2870437"/>
-            <a:ext cx="1172848" cy="151200"/>
-          </a:xfrm>
-          <a:prstGeom prst="rect">
-            <a:avLst/>
-          </a:prstGeom>
-          <a:noFill/>
-        </p:spPr>
-        <p:txBody>
-          <a:bodyPr wrap="none" lIns="0" rIns="0" tIns="0" bIns="0" anchor="t"/>
-          <a:lstStyle/>
-          <a:p>
-            <a:pPr algn="ctr">
-              <a:lnSpc>
-                <a:spcPts val="1214"/>
+            <a:off x="4656960" y="2892881"/>
+            <a:ext cx="959212" cy="151200"/>
+          </a:xfrm>
+          <a:prstGeom prst="rect">
+            <a:avLst/>
+          </a:prstGeom>
+          <a:noFill/>
+        </p:spPr>
+        <p:txBody>
+          <a:bodyPr wrap="none" lIns="0" rIns="0" tIns="0" bIns="0" anchor="t"/>
+          <a:lstStyle/>
+          <a:p>
+            <a:pPr algn="ctr">
+              <a:lnSpc>
+                <a:spcPts val="1163"/>
               </a:lnSpc>
             </a:pPr>
             <a:r>
@@ -7073,21 +7073,21 @@
         </p:nvSpPr>
         <p:spPr>
           <a:xfrm>
-            <a:off x="6039022" y="2870437"/>
-            <a:ext cx="488083" cy="151200"/>
-          </a:xfrm>
-          <a:prstGeom prst="rect">
-            <a:avLst/>
-          </a:prstGeom>
-          <a:noFill/>
-        </p:spPr>
-        <p:txBody>
-          <a:bodyPr wrap="none" lIns="0" rIns="0" tIns="0" bIns="0" anchor="t"/>
-          <a:lstStyle/>
-          <a:p>
-            <a:pPr algn="ctr">
-              <a:lnSpc>
-                <a:spcPts val="1214"/>
+            <a:off x="5670000" y="2892881"/>
+            <a:ext cx="644716" cy="151200"/>
+          </a:xfrm>
+          <a:prstGeom prst="rect">
+            <a:avLst/>
+          </a:prstGeom>
+          <a:noFill/>
+        </p:spPr>
+        <p:txBody>
+          <a:bodyPr wrap="none" lIns="0" rIns="0" tIns="0" bIns="0" anchor="t"/>
+          <a:lstStyle/>
+          <a:p>
+            <a:pPr algn="ctr">
+              <a:lnSpc>
+                <a:spcPts val="1163"/>
               </a:lnSpc>
             </a:pPr>
             <a:r>
@@ -7110,21 +7110,21 @@
         </p:nvSpPr>
         <p:spPr>
           <a:xfrm>
-            <a:off x="6553693" y="2870437"/>
-            <a:ext cx="488328" cy="151200"/>
-          </a:xfrm>
-          <a:prstGeom prst="rect">
-            <a:avLst/>
-          </a:prstGeom>
-          <a:noFill/>
-        </p:spPr>
-        <p:txBody>
-          <a:bodyPr wrap="none" lIns="0" rIns="0" tIns="0" bIns="0" anchor="t"/>
-          <a:lstStyle/>
-          <a:p>
-            <a:pPr algn="ctr">
-              <a:lnSpc>
-                <a:spcPts val="1214"/>
+            <a:off x="6380640" y="2892881"/>
+            <a:ext cx="644716" cy="151200"/>
+          </a:xfrm>
+          <a:prstGeom prst="rect">
+            <a:avLst/>
+          </a:prstGeom>
+          <a:noFill/>
+        </p:spPr>
+        <p:txBody>
+          <a:bodyPr wrap="none" lIns="0" rIns="0" tIns="0" bIns="0" anchor="t"/>
+          <a:lstStyle/>
+          <a:p>
+            <a:pPr algn="ctr">
+              <a:lnSpc>
+                <a:spcPts val="1163"/>
               </a:lnSpc>
             </a:pPr>
             <a:r>
@@ -7147,8 +7147,8 @@
         </p:nvSpPr>
         <p:spPr>
           <a:xfrm>
-            <a:off x="604800" y="3158308"/>
-            <a:ext cx="2007369" cy="151200"/>
+            <a:off x="604800" y="3187721"/>
+            <a:ext cx="1776902" cy="151200"/>
           </a:xfrm>
           <a:prstGeom prst="rect">
             <a:avLst/>
@@ -7161,7 +7161,7 @@
           <a:p>
             <a:pPr algn="l">
               <a:lnSpc>
-                <a:spcPts val="1062"/>
+                <a:spcPts val="1163"/>
               </a:lnSpc>
             </a:pPr>
             <a:r>
@@ -7184,21 +7184,21 @@
         </p:nvSpPr>
         <p:spPr>
           <a:xfrm>
-            <a:off x="2580322" y="3165277"/>
-            <a:ext cx="1133536" cy="151200"/>
-          </a:xfrm>
-          <a:prstGeom prst="rect">
-            <a:avLst/>
-          </a:prstGeom>
-          <a:noFill/>
-        </p:spPr>
-        <p:txBody>
-          <a:bodyPr wrap="none" lIns="0" rIns="0" tIns="0" bIns="0" anchor="t"/>
-          <a:lstStyle/>
-          <a:p>
-            <a:pPr algn="ctr">
-              <a:lnSpc>
-                <a:spcPts val="1214"/>
+            <a:off x="2404080" y="3187721"/>
+            <a:ext cx="833414" cy="151200"/>
+          </a:xfrm>
+          <a:prstGeom prst="rect">
+            <a:avLst/>
+          </a:prstGeom>
+          <a:noFill/>
+        </p:spPr>
+        <p:txBody>
+          <a:bodyPr wrap="none" lIns="0" rIns="0" tIns="0" bIns="0" anchor="t"/>
+          <a:lstStyle/>
+          <a:p>
+            <a:pPr algn="ctr">
+              <a:lnSpc>
+                <a:spcPts val="1163"/>
               </a:lnSpc>
             </a:pPr>
             <a:r>
@@ -7221,21 +7221,21 @@
         </p:nvSpPr>
         <p:spPr>
           <a:xfrm>
-            <a:off x="3715621" y="3165277"/>
-            <a:ext cx="425061" cy="151200"/>
-          </a:xfrm>
-          <a:prstGeom prst="rect">
-            <a:avLst/>
-          </a:prstGeom>
-          <a:noFill/>
-        </p:spPr>
-        <p:txBody>
-          <a:bodyPr wrap="none" lIns="0" rIns="0" tIns="0" bIns="0" anchor="t"/>
-          <a:lstStyle/>
-          <a:p>
-            <a:pPr algn="ctr">
-              <a:lnSpc>
-                <a:spcPts val="1214"/>
+            <a:off x="3296160" y="3187721"/>
+            <a:ext cx="503193" cy="151200"/>
+          </a:xfrm>
+          <a:prstGeom prst="rect">
+            <a:avLst/>
+          </a:prstGeom>
+          <a:noFill/>
+        </p:spPr>
+        <p:txBody>
+          <a:bodyPr wrap="none" lIns="0" rIns="0" tIns="0" bIns="0" anchor="t"/>
+          <a:lstStyle/>
+          <a:p>
+            <a:pPr algn="ctr">
+              <a:lnSpc>
+                <a:spcPts val="1163"/>
               </a:lnSpc>
             </a:pPr>
             <a:r>
@@ -7258,21 +7258,21 @@
         </p:nvSpPr>
         <p:spPr>
           <a:xfrm>
-            <a:off x="4169694" y="3165277"/>
-            <a:ext cx="676903" cy="151200"/>
-          </a:xfrm>
-          <a:prstGeom prst="rect">
-            <a:avLst/>
-          </a:prstGeom>
-          <a:noFill/>
-        </p:spPr>
-        <p:txBody>
-          <a:bodyPr wrap="none" lIns="0" rIns="0" tIns="0" bIns="0" anchor="t"/>
-          <a:lstStyle/>
-          <a:p>
-            <a:pPr algn="ctr">
-              <a:lnSpc>
-                <a:spcPts val="1214"/>
+            <a:off x="3870720" y="3187721"/>
+            <a:ext cx="723340" cy="151200"/>
+          </a:xfrm>
+          <a:prstGeom prst="rect">
+            <a:avLst/>
+          </a:prstGeom>
+          <a:noFill/>
+        </p:spPr>
+        <p:txBody>
+          <a:bodyPr wrap="none" lIns="0" rIns="0" tIns="0" bIns="0" anchor="t"/>
+          <a:lstStyle/>
+          <a:p>
+            <a:pPr algn="ctr">
+              <a:lnSpc>
+                <a:spcPts val="1163"/>
               </a:lnSpc>
             </a:pPr>
             <a:r>
@@ -7295,21 +7295,21 @@
         </p:nvSpPr>
         <p:spPr>
           <a:xfrm>
-            <a:off x="4865923" y="3165277"/>
-            <a:ext cx="1172848" cy="151200"/>
-          </a:xfrm>
-          <a:prstGeom prst="rect">
-            <a:avLst/>
-          </a:prstGeom>
-          <a:noFill/>
-        </p:spPr>
-        <p:txBody>
-          <a:bodyPr wrap="none" lIns="0" rIns="0" tIns="0" bIns="0" anchor="t"/>
-          <a:lstStyle/>
-          <a:p>
-            <a:pPr algn="ctr">
-              <a:lnSpc>
-                <a:spcPts val="1214"/>
+            <a:off x="4656960" y="3187721"/>
+            <a:ext cx="959212" cy="151200"/>
+          </a:xfrm>
+          <a:prstGeom prst="rect">
+            <a:avLst/>
+          </a:prstGeom>
+          <a:noFill/>
+        </p:spPr>
+        <p:txBody>
+          <a:bodyPr wrap="none" lIns="0" rIns="0" tIns="0" bIns="0" anchor="t"/>
+          <a:lstStyle/>
+          <a:p>
+            <a:pPr algn="ctr">
+              <a:lnSpc>
+                <a:spcPts val="1163"/>
               </a:lnSpc>
             </a:pPr>
             <a:r>
@@ -7332,21 +7332,21 @@
         </p:nvSpPr>
         <p:spPr>
           <a:xfrm>
-            <a:off x="6039022" y="3165277"/>
-            <a:ext cx="488083" cy="151200"/>
-          </a:xfrm>
-          <a:prstGeom prst="rect">
-            <a:avLst/>
-          </a:prstGeom>
-          <a:noFill/>
-        </p:spPr>
-        <p:txBody>
-          <a:bodyPr wrap="none" lIns="0" rIns="0" tIns="0" bIns="0" anchor="t"/>
-          <a:lstStyle/>
-          <a:p>
-            <a:pPr algn="ctr">
-              <a:lnSpc>
-                <a:spcPts val="1214"/>
+            <a:off x="5670000" y="3187721"/>
+            <a:ext cx="644716" cy="151200"/>
+          </a:xfrm>
+          <a:prstGeom prst="rect">
+            <a:avLst/>
+          </a:prstGeom>
+          <a:noFill/>
+        </p:spPr>
+        <p:txBody>
+          <a:bodyPr wrap="none" lIns="0" rIns="0" tIns="0" bIns="0" anchor="t"/>
+          <a:lstStyle/>
+          <a:p>
+            <a:pPr algn="ctr">
+              <a:lnSpc>
+                <a:spcPts val="1163"/>
               </a:lnSpc>
             </a:pPr>
             <a:r>
@@ -7369,21 +7369,21 @@
         </p:nvSpPr>
         <p:spPr>
           <a:xfrm>
-            <a:off x="6553693" y="3165277"/>
-            <a:ext cx="488328" cy="151200"/>
-          </a:xfrm>
-          <a:prstGeom prst="rect">
-            <a:avLst/>
-          </a:prstGeom>
-          <a:noFill/>
-        </p:spPr>
-        <p:txBody>
-          <a:bodyPr wrap="none" lIns="0" rIns="0" tIns="0" bIns="0" anchor="t"/>
-          <a:lstStyle/>
-          <a:p>
-            <a:pPr algn="ctr">
-              <a:lnSpc>
-                <a:spcPts val="1214"/>
+            <a:off x="6380640" y="3187721"/>
+            <a:ext cx="644716" cy="151200"/>
+          </a:xfrm>
+          <a:prstGeom prst="rect">
+            <a:avLst/>
+          </a:prstGeom>
+          <a:noFill/>
+        </p:spPr>
+        <p:txBody>
+          <a:bodyPr wrap="none" lIns="0" rIns="0" tIns="0" bIns="0" anchor="t"/>
+          <a:lstStyle/>
+          <a:p>
+            <a:pPr algn="ctr">
+              <a:lnSpc>
+                <a:spcPts val="1163"/>
               </a:lnSpc>
             </a:pPr>
             <a:r>
@@ -7406,8 +7406,8 @@
         </p:nvSpPr>
         <p:spPr>
           <a:xfrm>
-            <a:off x="604800" y="3453148"/>
-            <a:ext cx="2007369" cy="151200"/>
+            <a:off x="604800" y="3482561"/>
+            <a:ext cx="1776902" cy="151200"/>
           </a:xfrm>
           <a:prstGeom prst="rect">
             <a:avLst/>
@@ -7420,7 +7420,7 @@
           <a:p>
             <a:pPr algn="l">
               <a:lnSpc>
-                <a:spcPts val="1062"/>
+                <a:spcPts val="1163"/>
               </a:lnSpc>
             </a:pPr>
             <a:r>
@@ -7443,21 +7443,21 @@
         </p:nvSpPr>
         <p:spPr>
           <a:xfrm>
-            <a:off x="2580322" y="3460117"/>
-            <a:ext cx="1133536" cy="151200"/>
-          </a:xfrm>
-          <a:prstGeom prst="rect">
-            <a:avLst/>
-          </a:prstGeom>
-          <a:noFill/>
-        </p:spPr>
-        <p:txBody>
-          <a:bodyPr wrap="none" lIns="0" rIns="0" tIns="0" bIns="0" anchor="t"/>
-          <a:lstStyle/>
-          <a:p>
-            <a:pPr algn="ctr">
-              <a:lnSpc>
-                <a:spcPts val="1214"/>
+            <a:off x="2404080" y="3482561"/>
+            <a:ext cx="833414" cy="151200"/>
+          </a:xfrm>
+          <a:prstGeom prst="rect">
+            <a:avLst/>
+          </a:prstGeom>
+          <a:noFill/>
+        </p:spPr>
+        <p:txBody>
+          <a:bodyPr wrap="none" lIns="0" rIns="0" tIns="0" bIns="0" anchor="t"/>
+          <a:lstStyle/>
+          <a:p>
+            <a:pPr algn="ctr">
+              <a:lnSpc>
+                <a:spcPts val="1163"/>
               </a:lnSpc>
             </a:pPr>
             <a:r>
@@ -7480,21 +7480,21 @@
         </p:nvSpPr>
         <p:spPr>
           <a:xfrm>
-            <a:off x="3715621" y="3460117"/>
-            <a:ext cx="425061" cy="151200"/>
-          </a:xfrm>
-          <a:prstGeom prst="rect">
-            <a:avLst/>
-          </a:prstGeom>
-          <a:noFill/>
-        </p:spPr>
-        <p:txBody>
-          <a:bodyPr wrap="none" lIns="0" rIns="0" tIns="0" bIns="0" anchor="t"/>
-          <a:lstStyle/>
-          <a:p>
-            <a:pPr algn="ctr">
-              <a:lnSpc>
-                <a:spcPts val="1214"/>
+            <a:off x="3296160" y="3482561"/>
+            <a:ext cx="503193" cy="151200"/>
+          </a:xfrm>
+          <a:prstGeom prst="rect">
+            <a:avLst/>
+          </a:prstGeom>
+          <a:noFill/>
+        </p:spPr>
+        <p:txBody>
+          <a:bodyPr wrap="none" lIns="0" rIns="0" tIns="0" bIns="0" anchor="t"/>
+          <a:lstStyle/>
+          <a:p>
+            <a:pPr algn="ctr">
+              <a:lnSpc>
+                <a:spcPts val="1163"/>
               </a:lnSpc>
             </a:pPr>
             <a:r>
@@ -7517,21 +7517,21 @@
         </p:nvSpPr>
         <p:spPr>
           <a:xfrm>
-            <a:off x="4169694" y="3460117"/>
-            <a:ext cx="676903" cy="151200"/>
-          </a:xfrm>
-          <a:prstGeom prst="rect">
-            <a:avLst/>
-          </a:prstGeom>
-          <a:noFill/>
-        </p:spPr>
-        <p:txBody>
-          <a:bodyPr wrap="none" lIns="0" rIns="0" tIns="0" bIns="0" anchor="t"/>
-          <a:lstStyle/>
-          <a:p>
-            <a:pPr algn="ctr">
-              <a:lnSpc>
-                <a:spcPts val="1214"/>
+            <a:off x="3870720" y="3482561"/>
+            <a:ext cx="723340" cy="151200"/>
+          </a:xfrm>
+          <a:prstGeom prst="rect">
+            <a:avLst/>
+          </a:prstGeom>
+          <a:noFill/>
+        </p:spPr>
+        <p:txBody>
+          <a:bodyPr wrap="none" lIns="0" rIns="0" tIns="0" bIns="0" anchor="t"/>
+          <a:lstStyle/>
+          <a:p>
+            <a:pPr algn="ctr">
+              <a:lnSpc>
+                <a:spcPts val="1163"/>
               </a:lnSpc>
             </a:pPr>
             <a:r>
@@ -7554,21 +7554,21 @@
         </p:nvSpPr>
         <p:spPr>
           <a:xfrm>
-            <a:off x="4865923" y="3460117"/>
-            <a:ext cx="1172848" cy="151200"/>
-          </a:xfrm>
-          <a:prstGeom prst="rect">
-            <a:avLst/>
-          </a:prstGeom>
-          <a:noFill/>
-        </p:spPr>
-        <p:txBody>
-          <a:bodyPr wrap="none" lIns="0" rIns="0" tIns="0" bIns="0" anchor="t"/>
-          <a:lstStyle/>
-          <a:p>
-            <a:pPr algn="ctr">
-              <a:lnSpc>
-                <a:spcPts val="1214"/>
+            <a:off x="4656960" y="3482561"/>
+            <a:ext cx="959212" cy="151200"/>
+          </a:xfrm>
+          <a:prstGeom prst="rect">
+            <a:avLst/>
+          </a:prstGeom>
+          <a:noFill/>
+        </p:spPr>
+        <p:txBody>
+          <a:bodyPr wrap="none" lIns="0" rIns="0" tIns="0" bIns="0" anchor="t"/>
+          <a:lstStyle/>
+          <a:p>
+            <a:pPr algn="ctr">
+              <a:lnSpc>
+                <a:spcPts val="1163"/>
               </a:lnSpc>
             </a:pPr>
             <a:r>
@@ -7591,21 +7591,21 @@
         </p:nvSpPr>
         <p:spPr>
           <a:xfrm>
-            <a:off x="6039022" y="3460117"/>
-            <a:ext cx="488083" cy="151200"/>
-          </a:xfrm>
-          <a:prstGeom prst="rect">
-            <a:avLst/>
-          </a:prstGeom>
-          <a:noFill/>
-        </p:spPr>
-        <p:txBody>
-          <a:bodyPr wrap="none" lIns="0" rIns="0" tIns="0" bIns="0" anchor="t"/>
-          <a:lstStyle/>
-          <a:p>
-            <a:pPr algn="ctr">
-              <a:lnSpc>
-                <a:spcPts val="1214"/>
+            <a:off x="5670000" y="3482561"/>
+            <a:ext cx="644716" cy="151200"/>
+          </a:xfrm>
+          <a:prstGeom prst="rect">
+            <a:avLst/>
+          </a:prstGeom>
+          <a:noFill/>
+        </p:spPr>
+        <p:txBody>
+          <a:bodyPr wrap="none" lIns="0" rIns="0" tIns="0" bIns="0" anchor="t"/>
+          <a:lstStyle/>
+          <a:p>
+            <a:pPr algn="ctr">
+              <a:lnSpc>
+                <a:spcPts val="1163"/>
               </a:lnSpc>
             </a:pPr>
             <a:r>
@@ -7628,21 +7628,21 @@
         </p:nvSpPr>
         <p:spPr>
           <a:xfrm>
-            <a:off x="6553693" y="3460117"/>
-            <a:ext cx="488328" cy="151200"/>
-          </a:xfrm>
-          <a:prstGeom prst="rect">
-            <a:avLst/>
-          </a:prstGeom>
-          <a:noFill/>
-        </p:spPr>
-        <p:txBody>
-          <a:bodyPr wrap="none" lIns="0" rIns="0" tIns="0" bIns="0" anchor="t"/>
-          <a:lstStyle/>
-          <a:p>
-            <a:pPr algn="ctr">
-              <a:lnSpc>
-                <a:spcPts val="1214"/>
+            <a:off x="6380640" y="3482561"/>
+            <a:ext cx="644716" cy="151200"/>
+          </a:xfrm>
+          <a:prstGeom prst="rect">
+            <a:avLst/>
+          </a:prstGeom>
+          <a:noFill/>
+        </p:spPr>
+        <p:txBody>
+          <a:bodyPr wrap="none" lIns="0" rIns="0" tIns="0" bIns="0" anchor="t"/>
+          <a:lstStyle/>
+          <a:p>
+            <a:pPr algn="ctr">
+              <a:lnSpc>
+                <a:spcPts val="1163"/>
               </a:lnSpc>
             </a:pPr>
             <a:r>
@@ -7665,8 +7665,8 @@
         </p:nvSpPr>
         <p:spPr>
           <a:xfrm>
-            <a:off x="604800" y="3747988"/>
-            <a:ext cx="2007369" cy="151200"/>
+            <a:off x="604800" y="3777401"/>
+            <a:ext cx="1776902" cy="151200"/>
           </a:xfrm>
           <a:prstGeom prst="rect">
             <a:avLst/>
@@ -7679,7 +7679,7 @@
           <a:p>
             <a:pPr algn="l">
               <a:lnSpc>
-                <a:spcPts val="1062"/>
+                <a:spcPts val="1163"/>
               </a:lnSpc>
             </a:pPr>
             <a:r>
@@ -7702,21 +7702,21 @@
         </p:nvSpPr>
         <p:spPr>
           <a:xfrm>
-            <a:off x="2580322" y="3754957"/>
-            <a:ext cx="1133536" cy="151200"/>
-          </a:xfrm>
-          <a:prstGeom prst="rect">
-            <a:avLst/>
-          </a:prstGeom>
-          <a:noFill/>
-        </p:spPr>
-        <p:txBody>
-          <a:bodyPr wrap="none" lIns="0" rIns="0" tIns="0" bIns="0" anchor="t"/>
-          <a:lstStyle/>
-          <a:p>
-            <a:pPr algn="ctr">
-              <a:lnSpc>
-                <a:spcPts val="1214"/>
+            <a:off x="2404080" y="3777401"/>
+            <a:ext cx="833414" cy="151200"/>
+          </a:xfrm>
+          <a:prstGeom prst="rect">
+            <a:avLst/>
+          </a:prstGeom>
+          <a:noFill/>
+        </p:spPr>
+        <p:txBody>
+          <a:bodyPr wrap="none" lIns="0" rIns="0" tIns="0" bIns="0" anchor="t"/>
+          <a:lstStyle/>
+          <a:p>
+            <a:pPr algn="ctr">
+              <a:lnSpc>
+                <a:spcPts val="1163"/>
               </a:lnSpc>
             </a:pPr>
             <a:r>
@@ -7739,21 +7739,21 @@
         </p:nvSpPr>
         <p:spPr>
           <a:xfrm>
-            <a:off x="3715621" y="3754957"/>
-            <a:ext cx="425061" cy="151200"/>
-          </a:xfrm>
-          <a:prstGeom prst="rect">
-            <a:avLst/>
-          </a:prstGeom>
-          <a:noFill/>
-        </p:spPr>
-        <p:txBody>
-          <a:bodyPr wrap="none" lIns="0" rIns="0" tIns="0" bIns="0" anchor="t"/>
-          <a:lstStyle/>
-          <a:p>
-            <a:pPr algn="ctr">
-              <a:lnSpc>
-                <a:spcPts val="1214"/>
+            <a:off x="3296160" y="3777401"/>
+            <a:ext cx="503193" cy="151200"/>
+          </a:xfrm>
+          <a:prstGeom prst="rect">
+            <a:avLst/>
+          </a:prstGeom>
+          <a:noFill/>
+        </p:spPr>
+        <p:txBody>
+          <a:bodyPr wrap="none" lIns="0" rIns="0" tIns="0" bIns="0" anchor="t"/>
+          <a:lstStyle/>
+          <a:p>
+            <a:pPr algn="ctr">
+              <a:lnSpc>
+                <a:spcPts val="1163"/>
               </a:lnSpc>
             </a:pPr>
             <a:r>
@@ -7776,21 +7776,21 @@
         </p:nvSpPr>
         <p:spPr>
           <a:xfrm>
-            <a:off x="4169694" y="3754957"/>
-            <a:ext cx="676903" cy="151200"/>
-          </a:xfrm>
-          <a:prstGeom prst="rect">
-            <a:avLst/>
-          </a:prstGeom>
-          <a:noFill/>
-        </p:spPr>
-        <p:txBody>
-          <a:bodyPr wrap="none" lIns="0" rIns="0" tIns="0" bIns="0" anchor="t"/>
-          <a:lstStyle/>
-          <a:p>
-            <a:pPr algn="ctr">
-              <a:lnSpc>
-                <a:spcPts val="1214"/>
+            <a:off x="3870720" y="3777401"/>
+            <a:ext cx="723340" cy="151200"/>
+          </a:xfrm>
+          <a:prstGeom prst="rect">
+            <a:avLst/>
+          </a:prstGeom>
+          <a:noFill/>
+        </p:spPr>
+        <p:txBody>
+          <a:bodyPr wrap="none" lIns="0" rIns="0" tIns="0" bIns="0" anchor="t"/>
+          <a:lstStyle/>
+          <a:p>
+            <a:pPr algn="ctr">
+              <a:lnSpc>
+                <a:spcPts val="1163"/>
               </a:lnSpc>
             </a:pPr>
             <a:r>
@@ -7813,21 +7813,21 @@
         </p:nvSpPr>
         <p:spPr>
           <a:xfrm>
-            <a:off x="4865923" y="3754957"/>
-            <a:ext cx="1172848" cy="151200"/>
-          </a:xfrm>
-          <a:prstGeom prst="rect">
-            <a:avLst/>
-          </a:prstGeom>
-          <a:noFill/>
-        </p:spPr>
-        <p:txBody>
-          <a:bodyPr wrap="none" lIns="0" rIns="0" tIns="0" bIns="0" anchor="t"/>
-          <a:lstStyle/>
-          <a:p>
-            <a:pPr algn="ctr">
-              <a:lnSpc>
-                <a:spcPts val="1214"/>
+            <a:off x="4656960" y="3777401"/>
+            <a:ext cx="959212" cy="151200"/>
+          </a:xfrm>
+          <a:prstGeom prst="rect">
+            <a:avLst/>
+          </a:prstGeom>
+          <a:noFill/>
+        </p:spPr>
+        <p:txBody>
+          <a:bodyPr wrap="none" lIns="0" rIns="0" tIns="0" bIns="0" anchor="t"/>
+          <a:lstStyle/>
+          <a:p>
+            <a:pPr algn="ctr">
+              <a:lnSpc>
+                <a:spcPts val="1163"/>
               </a:lnSpc>
             </a:pPr>
             <a:r>
@@ -7850,21 +7850,21 @@
         </p:nvSpPr>
         <p:spPr>
           <a:xfrm>
-            <a:off x="6039022" y="3754957"/>
-            <a:ext cx="488083" cy="151200"/>
-          </a:xfrm>
-          <a:prstGeom prst="rect">
-            <a:avLst/>
-          </a:prstGeom>
-          <a:noFill/>
-        </p:spPr>
-        <p:txBody>
-          <a:bodyPr wrap="none" lIns="0" rIns="0" tIns="0" bIns="0" anchor="t"/>
-          <a:lstStyle/>
-          <a:p>
-            <a:pPr algn="ctr">
-              <a:lnSpc>
-                <a:spcPts val="1214"/>
+            <a:off x="5670000" y="3777401"/>
+            <a:ext cx="644716" cy="151200"/>
+          </a:xfrm>
+          <a:prstGeom prst="rect">
+            <a:avLst/>
+          </a:prstGeom>
+          <a:noFill/>
+        </p:spPr>
+        <p:txBody>
+          <a:bodyPr wrap="none" lIns="0" rIns="0" tIns="0" bIns="0" anchor="t"/>
+          <a:lstStyle/>
+          <a:p>
+            <a:pPr algn="ctr">
+              <a:lnSpc>
+                <a:spcPts val="1163"/>
               </a:lnSpc>
             </a:pPr>
             <a:r>
@@ -7887,21 +7887,21 @@
         </p:nvSpPr>
         <p:spPr>
           <a:xfrm>
-            <a:off x="6553693" y="3754957"/>
-            <a:ext cx="488328" cy="151200"/>
-          </a:xfrm>
-          <a:prstGeom prst="rect">
-            <a:avLst/>
-          </a:prstGeom>
-          <a:noFill/>
-        </p:spPr>
-        <p:txBody>
-          <a:bodyPr wrap="none" lIns="0" rIns="0" tIns="0" bIns="0" anchor="t"/>
-          <a:lstStyle/>
-          <a:p>
-            <a:pPr algn="ctr">
-              <a:lnSpc>
-                <a:spcPts val="1214"/>
+            <a:off x="6380640" y="3777401"/>
+            <a:ext cx="644716" cy="151200"/>
+          </a:xfrm>
+          <a:prstGeom prst="rect">
+            <a:avLst/>
+          </a:prstGeom>
+          <a:noFill/>
+        </p:spPr>
+        <p:txBody>
+          <a:bodyPr wrap="none" lIns="0" rIns="0" tIns="0" bIns="0" anchor="t"/>
+          <a:lstStyle/>
+          <a:p>
+            <a:pPr algn="ctr">
+              <a:lnSpc>
+                <a:spcPts val="1163"/>
               </a:lnSpc>
             </a:pPr>
             <a:r>
@@ -7924,8 +7924,8 @@
         </p:nvSpPr>
         <p:spPr>
           <a:xfrm>
-            <a:off x="604800" y="4042828"/>
-            <a:ext cx="2007369" cy="151200"/>
+            <a:off x="604800" y="4072241"/>
+            <a:ext cx="1776902" cy="151200"/>
           </a:xfrm>
           <a:prstGeom prst="rect">
             <a:avLst/>
@@ -7938,7 +7938,7 @@
           <a:p>
             <a:pPr algn="l">
               <a:lnSpc>
-                <a:spcPts val="1062"/>
+                <a:spcPts val="1163"/>
               </a:lnSpc>
             </a:pPr>
             <a:r>
@@ -7961,21 +7961,21 @@
         </p:nvSpPr>
         <p:spPr>
           <a:xfrm>
-            <a:off x="2580322" y="4049797"/>
-            <a:ext cx="1133536" cy="151200"/>
-          </a:xfrm>
-          <a:prstGeom prst="rect">
-            <a:avLst/>
-          </a:prstGeom>
-          <a:noFill/>
-        </p:spPr>
-        <p:txBody>
-          <a:bodyPr wrap="none" lIns="0" rIns="0" tIns="0" bIns="0" anchor="t"/>
-          <a:lstStyle/>
-          <a:p>
-            <a:pPr algn="ctr">
-              <a:lnSpc>
-                <a:spcPts val="1214"/>
+            <a:off x="2404080" y="4072241"/>
+            <a:ext cx="833414" cy="151200"/>
+          </a:xfrm>
+          <a:prstGeom prst="rect">
+            <a:avLst/>
+          </a:prstGeom>
+          <a:noFill/>
+        </p:spPr>
+        <p:txBody>
+          <a:bodyPr wrap="none" lIns="0" rIns="0" tIns="0" bIns="0" anchor="t"/>
+          <a:lstStyle/>
+          <a:p>
+            <a:pPr algn="ctr">
+              <a:lnSpc>
+                <a:spcPts val="1163"/>
               </a:lnSpc>
             </a:pPr>
             <a:r>
@@ -7998,21 +7998,21 @@
         </p:nvSpPr>
         <p:spPr>
           <a:xfrm>
-            <a:off x="3715621" y="4049797"/>
-            <a:ext cx="425061" cy="151200"/>
-          </a:xfrm>
-          <a:prstGeom prst="rect">
-            <a:avLst/>
-          </a:prstGeom>
-          <a:noFill/>
-        </p:spPr>
-        <p:txBody>
-          <a:bodyPr wrap="none" lIns="0" rIns="0" tIns="0" bIns="0" anchor="t"/>
-          <a:lstStyle/>
-          <a:p>
-            <a:pPr algn="ctr">
-              <a:lnSpc>
-                <a:spcPts val="1214"/>
+            <a:off x="3296160" y="4072241"/>
+            <a:ext cx="503193" cy="151200"/>
+          </a:xfrm>
+          <a:prstGeom prst="rect">
+            <a:avLst/>
+          </a:prstGeom>
+          <a:noFill/>
+        </p:spPr>
+        <p:txBody>
+          <a:bodyPr wrap="none" lIns="0" rIns="0" tIns="0" bIns="0" anchor="t"/>
+          <a:lstStyle/>
+          <a:p>
+            <a:pPr algn="ctr">
+              <a:lnSpc>
+                <a:spcPts val="1163"/>
               </a:lnSpc>
             </a:pPr>
             <a:r>
@@ -8035,21 +8035,21 @@
         </p:nvSpPr>
         <p:spPr>
           <a:xfrm>
-            <a:off x="4169694" y="4049797"/>
-            <a:ext cx="676903" cy="151200"/>
-          </a:xfrm>
-          <a:prstGeom prst="rect">
-            <a:avLst/>
-          </a:prstGeom>
-          <a:noFill/>
-        </p:spPr>
-        <p:txBody>
-          <a:bodyPr wrap="none" lIns="0" rIns="0" tIns="0" bIns="0" anchor="t"/>
-          <a:lstStyle/>
-          <a:p>
-            <a:pPr algn="ctr">
-              <a:lnSpc>
-                <a:spcPts val="1214"/>
+            <a:off x="3870720" y="4072241"/>
+            <a:ext cx="723340" cy="151200"/>
+          </a:xfrm>
+          <a:prstGeom prst="rect">
+            <a:avLst/>
+          </a:prstGeom>
+          <a:noFill/>
+        </p:spPr>
+        <p:txBody>
+          <a:bodyPr wrap="none" lIns="0" rIns="0" tIns="0" bIns="0" anchor="t"/>
+          <a:lstStyle/>
+          <a:p>
+            <a:pPr algn="ctr">
+              <a:lnSpc>
+                <a:spcPts val="1163"/>
               </a:lnSpc>
             </a:pPr>
             <a:r>
@@ -8072,21 +8072,21 @@
         </p:nvSpPr>
         <p:spPr>
           <a:xfrm>
-            <a:off x="4865923" y="4049797"/>
-            <a:ext cx="1172848" cy="151200"/>
-          </a:xfrm>
-          <a:prstGeom prst="rect">
-            <a:avLst/>
-          </a:prstGeom>
-          <a:noFill/>
-        </p:spPr>
-        <p:txBody>
-          <a:bodyPr wrap="none" lIns="0" rIns="0" tIns="0" bIns="0" anchor="t"/>
-          <a:lstStyle/>
-          <a:p>
-            <a:pPr algn="ctr">
-              <a:lnSpc>
-                <a:spcPts val="1214"/>
+            <a:off x="4656960" y="4072241"/>
+            <a:ext cx="959212" cy="151200"/>
+          </a:xfrm>
+          <a:prstGeom prst="rect">
+            <a:avLst/>
+          </a:prstGeom>
+          <a:noFill/>
+        </p:spPr>
+        <p:txBody>
+          <a:bodyPr wrap="none" lIns="0" rIns="0" tIns="0" bIns="0" anchor="t"/>
+          <a:lstStyle/>
+          <a:p>
+            <a:pPr algn="ctr">
+              <a:lnSpc>
+                <a:spcPts val="1163"/>
               </a:lnSpc>
             </a:pPr>
             <a:r>
@@ -8109,21 +8109,21 @@
         </p:nvSpPr>
         <p:spPr>
           <a:xfrm>
-            <a:off x="6039022" y="4049797"/>
-            <a:ext cx="488083" cy="151200"/>
-          </a:xfrm>
-          <a:prstGeom prst="rect">
-            <a:avLst/>
-          </a:prstGeom>
-          <a:noFill/>
-        </p:spPr>
-        <p:txBody>
-          <a:bodyPr wrap="none" lIns="0" rIns="0" tIns="0" bIns="0" anchor="t"/>
-          <a:lstStyle/>
-          <a:p>
-            <a:pPr algn="ctr">
-              <a:lnSpc>
-                <a:spcPts val="1214"/>
+            <a:off x="5670000" y="4072241"/>
+            <a:ext cx="644716" cy="151200"/>
+          </a:xfrm>
+          <a:prstGeom prst="rect">
+            <a:avLst/>
+          </a:prstGeom>
+          <a:noFill/>
+        </p:spPr>
+        <p:txBody>
+          <a:bodyPr wrap="none" lIns="0" rIns="0" tIns="0" bIns="0" anchor="t"/>
+          <a:lstStyle/>
+          <a:p>
+            <a:pPr algn="ctr">
+              <a:lnSpc>
+                <a:spcPts val="1163"/>
               </a:lnSpc>
             </a:pPr>
             <a:r>
@@ -8146,21 +8146,21 @@
         </p:nvSpPr>
         <p:spPr>
           <a:xfrm>
-            <a:off x="6553693" y="4049797"/>
-            <a:ext cx="488328" cy="151200"/>
-          </a:xfrm>
-          <a:prstGeom prst="rect">
-            <a:avLst/>
-          </a:prstGeom>
-          <a:noFill/>
-        </p:spPr>
-        <p:txBody>
-          <a:bodyPr wrap="none" lIns="0" rIns="0" tIns="0" bIns="0" anchor="t"/>
-          <a:lstStyle/>
-          <a:p>
-            <a:pPr algn="ctr">
-              <a:lnSpc>
-                <a:spcPts val="1214"/>
+            <a:off x="6380640" y="4072241"/>
+            <a:ext cx="644716" cy="151200"/>
+          </a:xfrm>
+          <a:prstGeom prst="rect">
+            <a:avLst/>
+          </a:prstGeom>
+          <a:noFill/>
+        </p:spPr>
+        <p:txBody>
+          <a:bodyPr wrap="none" lIns="0" rIns="0" tIns="0" bIns="0" anchor="t"/>
+          <a:lstStyle/>
+          <a:p>
+            <a:pPr algn="ctr">
+              <a:lnSpc>
+                <a:spcPts val="1163"/>
               </a:lnSpc>
             </a:pPr>
             <a:r>
@@ -8183,8 +8183,8 @@
         </p:nvSpPr>
         <p:spPr>
           <a:xfrm>
-            <a:off x="604800" y="4337668"/>
-            <a:ext cx="2007369" cy="151200"/>
+            <a:off x="604800" y="4367081"/>
+            <a:ext cx="1776902" cy="151200"/>
           </a:xfrm>
           <a:prstGeom prst="rect">
             <a:avLst/>
@@ -8197,7 +8197,7 @@
           <a:p>
             <a:pPr algn="l">
               <a:lnSpc>
-                <a:spcPts val="1062"/>
+                <a:spcPts val="1163"/>
               </a:lnSpc>
             </a:pPr>
             <a:r>
@@ -8220,21 +8220,21 @@
         </p:nvSpPr>
         <p:spPr>
           <a:xfrm>
-            <a:off x="2580322" y="4344637"/>
-            <a:ext cx="1133536" cy="151200"/>
-          </a:xfrm>
-          <a:prstGeom prst="rect">
-            <a:avLst/>
-          </a:prstGeom>
-          <a:noFill/>
-        </p:spPr>
-        <p:txBody>
-          <a:bodyPr wrap="none" lIns="0" rIns="0" tIns="0" bIns="0" anchor="t"/>
-          <a:lstStyle/>
-          <a:p>
-            <a:pPr algn="ctr">
-              <a:lnSpc>
-                <a:spcPts val="1214"/>
+            <a:off x="2404080" y="4367081"/>
+            <a:ext cx="833414" cy="151200"/>
+          </a:xfrm>
+          <a:prstGeom prst="rect">
+            <a:avLst/>
+          </a:prstGeom>
+          <a:noFill/>
+        </p:spPr>
+        <p:txBody>
+          <a:bodyPr wrap="none" lIns="0" rIns="0" tIns="0" bIns="0" anchor="t"/>
+          <a:lstStyle/>
+          <a:p>
+            <a:pPr algn="ctr">
+              <a:lnSpc>
+                <a:spcPts val="1163"/>
               </a:lnSpc>
             </a:pPr>
             <a:r>
@@ -8257,21 +8257,21 @@
         </p:nvSpPr>
         <p:spPr>
           <a:xfrm>
-            <a:off x="3715621" y="4344637"/>
-            <a:ext cx="425061" cy="151200"/>
-          </a:xfrm>
-          <a:prstGeom prst="rect">
-            <a:avLst/>
-          </a:prstGeom>
-          <a:noFill/>
-        </p:spPr>
-        <p:txBody>
-          <a:bodyPr wrap="none" lIns="0" rIns="0" tIns="0" bIns="0" anchor="t"/>
-          <a:lstStyle/>
-          <a:p>
-            <a:pPr algn="ctr">
-              <a:lnSpc>
-                <a:spcPts val="1214"/>
+            <a:off x="3296160" y="4367081"/>
+            <a:ext cx="503193" cy="151200"/>
+          </a:xfrm>
+          <a:prstGeom prst="rect">
+            <a:avLst/>
+          </a:prstGeom>
+          <a:noFill/>
+        </p:spPr>
+        <p:txBody>
+          <a:bodyPr wrap="none" lIns="0" rIns="0" tIns="0" bIns="0" anchor="t"/>
+          <a:lstStyle/>
+          <a:p>
+            <a:pPr algn="ctr">
+              <a:lnSpc>
+                <a:spcPts val="1163"/>
               </a:lnSpc>
             </a:pPr>
             <a:r>
@@ -8294,21 +8294,21 @@
         </p:nvSpPr>
         <p:spPr>
           <a:xfrm>
-            <a:off x="4169694" y="4344637"/>
-            <a:ext cx="676903" cy="151200"/>
-          </a:xfrm>
-          <a:prstGeom prst="rect">
-            <a:avLst/>
-          </a:prstGeom>
-          <a:noFill/>
-        </p:spPr>
-        <p:txBody>
-          <a:bodyPr wrap="none" lIns="0" rIns="0" tIns="0" bIns="0" anchor="t"/>
-          <a:lstStyle/>
-          <a:p>
-            <a:pPr algn="ctr">
-              <a:lnSpc>
-                <a:spcPts val="1214"/>
+            <a:off x="3870720" y="4367081"/>
+            <a:ext cx="723340" cy="151200"/>
+          </a:xfrm>
+          <a:prstGeom prst="rect">
+            <a:avLst/>
+          </a:prstGeom>
+          <a:noFill/>
+        </p:spPr>
+        <p:txBody>
+          <a:bodyPr wrap="none" lIns="0" rIns="0" tIns="0" bIns="0" anchor="t"/>
+          <a:lstStyle/>
+          <a:p>
+            <a:pPr algn="ctr">
+              <a:lnSpc>
+                <a:spcPts val="1163"/>
               </a:lnSpc>
             </a:pPr>
             <a:r>
@@ -8331,21 +8331,21 @@
         </p:nvSpPr>
         <p:spPr>
           <a:xfrm>
-            <a:off x="4865923" y="4344637"/>
-            <a:ext cx="1172848" cy="151200"/>
-          </a:xfrm>
-          <a:prstGeom prst="rect">
-            <a:avLst/>
-          </a:prstGeom>
-          <a:noFill/>
-        </p:spPr>
-        <p:txBody>
-          <a:bodyPr wrap="none" lIns="0" rIns="0" tIns="0" bIns="0" anchor="t"/>
-          <a:lstStyle/>
-          <a:p>
-            <a:pPr algn="ctr">
-              <a:lnSpc>
-                <a:spcPts val="1214"/>
+            <a:off x="4656960" y="4367081"/>
+            <a:ext cx="959212" cy="151200"/>
+          </a:xfrm>
+          <a:prstGeom prst="rect">
+            <a:avLst/>
+          </a:prstGeom>
+          <a:noFill/>
+        </p:spPr>
+        <p:txBody>
+          <a:bodyPr wrap="none" lIns="0" rIns="0" tIns="0" bIns="0" anchor="t"/>
+          <a:lstStyle/>
+          <a:p>
+            <a:pPr algn="ctr">
+              <a:lnSpc>
+                <a:spcPts val="1163"/>
               </a:lnSpc>
             </a:pPr>
             <a:r>
@@ -8368,21 +8368,21 @@
         </p:nvSpPr>
         <p:spPr>
           <a:xfrm>
-            <a:off x="6039022" y="4344637"/>
-            <a:ext cx="488083" cy="151200"/>
-          </a:xfrm>
-          <a:prstGeom prst="rect">
-            <a:avLst/>
-          </a:prstGeom>
-          <a:noFill/>
-        </p:spPr>
-        <p:txBody>
-          <a:bodyPr wrap="none" lIns="0" rIns="0" tIns="0" bIns="0" anchor="t"/>
-          <a:lstStyle/>
-          <a:p>
-            <a:pPr algn="ctr">
-              <a:lnSpc>
-                <a:spcPts val="1214"/>
+            <a:off x="5670000" y="4367081"/>
+            <a:ext cx="644716" cy="151200"/>
+          </a:xfrm>
+          <a:prstGeom prst="rect">
+            <a:avLst/>
+          </a:prstGeom>
+          <a:noFill/>
+        </p:spPr>
+        <p:txBody>
+          <a:bodyPr wrap="none" lIns="0" rIns="0" tIns="0" bIns="0" anchor="t"/>
+          <a:lstStyle/>
+          <a:p>
+            <a:pPr algn="ctr">
+              <a:lnSpc>
+                <a:spcPts val="1163"/>
               </a:lnSpc>
             </a:pPr>
             <a:r>
@@ -8405,21 +8405,21 @@
         </p:nvSpPr>
         <p:spPr>
           <a:xfrm>
-            <a:off x="6553693" y="4344637"/>
-            <a:ext cx="488328" cy="151200"/>
-          </a:xfrm>
-          <a:prstGeom prst="rect">
-            <a:avLst/>
-          </a:prstGeom>
-          <a:noFill/>
-        </p:spPr>
-        <p:txBody>
-          <a:bodyPr wrap="none" lIns="0" rIns="0" tIns="0" bIns="0" anchor="t"/>
-          <a:lstStyle/>
-          <a:p>
-            <a:pPr algn="ctr">
-              <a:lnSpc>
-                <a:spcPts val="1214"/>
+            <a:off x="6380640" y="4367081"/>
+            <a:ext cx="644716" cy="151200"/>
+          </a:xfrm>
+          <a:prstGeom prst="rect">
+            <a:avLst/>
+          </a:prstGeom>
+          <a:noFill/>
+        </p:spPr>
+        <p:txBody>
+          <a:bodyPr wrap="none" lIns="0" rIns="0" tIns="0" bIns="0" anchor="t"/>
+          <a:lstStyle/>
+          <a:p>
+            <a:pPr algn="ctr">
+              <a:lnSpc>
+                <a:spcPts val="1163"/>
               </a:lnSpc>
             </a:pPr>
             <a:r>
@@ -8442,21 +8442,21 @@
         </p:nvSpPr>
         <p:spPr>
           <a:xfrm>
-            <a:off x="604800" y="4632508"/>
-            <a:ext cx="2007369" cy="151200"/>
-          </a:xfrm>
-          <a:prstGeom prst="rect">
-            <a:avLst/>
-          </a:prstGeom>
-          <a:noFill/>
-        </p:spPr>
-        <p:txBody>
-          <a:bodyPr wrap="none" lIns="0" rIns="0" tIns="0" bIns="0" anchor="t"/>
+            <a:off x="604800" y="4603567"/>
+            <a:ext cx="1708560" cy="298974"/>
+          </a:xfrm>
+          <a:prstGeom prst="rect">
+            <a:avLst/>
+          </a:prstGeom>
+          <a:noFill/>
+        </p:spPr>
+        <p:txBody>
+          <a:bodyPr wrap="square" lIns="0" rIns="0" tIns="0" bIns="0" anchor="t"/>
           <a:lstStyle/>
           <a:p>
             <a:pPr algn="l">
               <a:lnSpc>
-                <a:spcPts val="1062"/>
+                <a:spcPts val="1163"/>
               </a:lnSpc>
             </a:pPr>
             <a:r>
@@ -8479,21 +8479,21 @@
         </p:nvSpPr>
         <p:spPr>
           <a:xfrm>
-            <a:off x="2580322" y="4639477"/>
-            <a:ext cx="1133536" cy="151200"/>
-          </a:xfrm>
-          <a:prstGeom prst="rect">
-            <a:avLst/>
-          </a:prstGeom>
-          <a:noFill/>
-        </p:spPr>
-        <p:txBody>
-          <a:bodyPr wrap="none" lIns="0" rIns="0" tIns="0" bIns="0" anchor="t"/>
-          <a:lstStyle/>
-          <a:p>
-            <a:pPr algn="ctr">
-              <a:lnSpc>
-                <a:spcPts val="1214"/>
+            <a:off x="2404080" y="4677395"/>
+            <a:ext cx="833414" cy="151200"/>
+          </a:xfrm>
+          <a:prstGeom prst="rect">
+            <a:avLst/>
+          </a:prstGeom>
+          <a:noFill/>
+        </p:spPr>
+        <p:txBody>
+          <a:bodyPr wrap="none" lIns="0" rIns="0" tIns="0" bIns="0" anchor="t"/>
+          <a:lstStyle/>
+          <a:p>
+            <a:pPr algn="ctr">
+              <a:lnSpc>
+                <a:spcPts val="1163"/>
               </a:lnSpc>
             </a:pPr>
             <a:r>
@@ -8516,21 +8516,21 @@
         </p:nvSpPr>
         <p:spPr>
           <a:xfrm>
-            <a:off x="3715621" y="4639477"/>
-            <a:ext cx="425061" cy="151200"/>
-          </a:xfrm>
-          <a:prstGeom prst="rect">
-            <a:avLst/>
-          </a:prstGeom>
-          <a:noFill/>
-        </p:spPr>
-        <p:txBody>
-          <a:bodyPr wrap="none" lIns="0" rIns="0" tIns="0" bIns="0" anchor="t"/>
-          <a:lstStyle/>
-          <a:p>
-            <a:pPr algn="ctr">
-              <a:lnSpc>
-                <a:spcPts val="1214"/>
+            <a:off x="3296160" y="4677395"/>
+            <a:ext cx="503193" cy="151200"/>
+          </a:xfrm>
+          <a:prstGeom prst="rect">
+            <a:avLst/>
+          </a:prstGeom>
+          <a:noFill/>
+        </p:spPr>
+        <p:txBody>
+          <a:bodyPr wrap="none" lIns="0" rIns="0" tIns="0" bIns="0" anchor="t"/>
+          <a:lstStyle/>
+          <a:p>
+            <a:pPr algn="ctr">
+              <a:lnSpc>
+                <a:spcPts val="1163"/>
               </a:lnSpc>
             </a:pPr>
             <a:r>
@@ -8553,21 +8553,21 @@
         </p:nvSpPr>
         <p:spPr>
           <a:xfrm>
-            <a:off x="4169694" y="4639477"/>
-            <a:ext cx="676903" cy="151200"/>
-          </a:xfrm>
-          <a:prstGeom prst="rect">
-            <a:avLst/>
-          </a:prstGeom>
-          <a:noFill/>
-        </p:spPr>
-        <p:txBody>
-          <a:bodyPr wrap="none" lIns="0" rIns="0" tIns="0" bIns="0" anchor="t"/>
-          <a:lstStyle/>
-          <a:p>
-            <a:pPr algn="ctr">
-              <a:lnSpc>
-                <a:spcPts val="1214"/>
+            <a:off x="3870720" y="4677395"/>
+            <a:ext cx="723340" cy="151200"/>
+          </a:xfrm>
+          <a:prstGeom prst="rect">
+            <a:avLst/>
+          </a:prstGeom>
+          <a:noFill/>
+        </p:spPr>
+        <p:txBody>
+          <a:bodyPr wrap="none" lIns="0" rIns="0" tIns="0" bIns="0" anchor="t"/>
+          <a:lstStyle/>
+          <a:p>
+            <a:pPr algn="ctr">
+              <a:lnSpc>
+                <a:spcPts val="1163"/>
               </a:lnSpc>
             </a:pPr>
             <a:r>
@@ -8590,21 +8590,21 @@
         </p:nvSpPr>
         <p:spPr>
           <a:xfrm>
-            <a:off x="4865923" y="4639477"/>
-            <a:ext cx="1172848" cy="151200"/>
-          </a:xfrm>
-          <a:prstGeom prst="rect">
-            <a:avLst/>
-          </a:prstGeom>
-          <a:noFill/>
-        </p:spPr>
-        <p:txBody>
-          <a:bodyPr wrap="none" lIns="0" rIns="0" tIns="0" bIns="0" anchor="t"/>
-          <a:lstStyle/>
-          <a:p>
-            <a:pPr algn="ctr">
-              <a:lnSpc>
-                <a:spcPts val="1214"/>
+            <a:off x="4656960" y="4677395"/>
+            <a:ext cx="959212" cy="151200"/>
+          </a:xfrm>
+          <a:prstGeom prst="rect">
+            <a:avLst/>
+          </a:prstGeom>
+          <a:noFill/>
+        </p:spPr>
+        <p:txBody>
+          <a:bodyPr wrap="none" lIns="0" rIns="0" tIns="0" bIns="0" anchor="t"/>
+          <a:lstStyle/>
+          <a:p>
+            <a:pPr algn="ctr">
+              <a:lnSpc>
+                <a:spcPts val="1163"/>
               </a:lnSpc>
             </a:pPr>
             <a:r>
@@ -8627,21 +8627,21 @@
         </p:nvSpPr>
         <p:spPr>
           <a:xfrm>
-            <a:off x="6039022" y="4639477"/>
-            <a:ext cx="488083" cy="151200"/>
-          </a:xfrm>
-          <a:prstGeom prst="rect">
-            <a:avLst/>
-          </a:prstGeom>
-          <a:noFill/>
-        </p:spPr>
-        <p:txBody>
-          <a:bodyPr wrap="none" lIns="0" rIns="0" tIns="0" bIns="0" anchor="t"/>
-          <a:lstStyle/>
-          <a:p>
-            <a:pPr algn="ctr">
-              <a:lnSpc>
-                <a:spcPts val="1214"/>
+            <a:off x="5670000" y="4677395"/>
+            <a:ext cx="644716" cy="151200"/>
+          </a:xfrm>
+          <a:prstGeom prst="rect">
+            <a:avLst/>
+          </a:prstGeom>
+          <a:noFill/>
+        </p:spPr>
+        <p:txBody>
+          <a:bodyPr wrap="none" lIns="0" rIns="0" tIns="0" bIns="0" anchor="t"/>
+          <a:lstStyle/>
+          <a:p>
+            <a:pPr algn="ctr">
+              <a:lnSpc>
+                <a:spcPts val="1163"/>
               </a:lnSpc>
             </a:pPr>
             <a:r>
@@ -8664,21 +8664,21 @@
         </p:nvSpPr>
         <p:spPr>
           <a:xfrm>
-            <a:off x="6553693" y="4639477"/>
-            <a:ext cx="488328" cy="151200"/>
-          </a:xfrm>
-          <a:prstGeom prst="rect">
-            <a:avLst/>
-          </a:prstGeom>
-          <a:noFill/>
-        </p:spPr>
-        <p:txBody>
-          <a:bodyPr wrap="none" lIns="0" rIns="0" tIns="0" bIns="0" anchor="t"/>
-          <a:lstStyle/>
-          <a:p>
-            <a:pPr algn="ctr">
-              <a:lnSpc>
-                <a:spcPts val="1214"/>
+            <a:off x="6380640" y="4677395"/>
+            <a:ext cx="644716" cy="151200"/>
+          </a:xfrm>
+          <a:prstGeom prst="rect">
+            <a:avLst/>
+          </a:prstGeom>
+          <a:noFill/>
+        </p:spPr>
+        <p:txBody>
+          <a:bodyPr wrap="none" lIns="0" rIns="0" tIns="0" bIns="0" anchor="t"/>
+          <a:lstStyle/>
+          <a:p>
+            <a:pPr algn="ctr">
+              <a:lnSpc>
+                <a:spcPts val="1163"/>
               </a:lnSpc>
             </a:pPr>
             <a:r>
@@ -8701,8 +8701,8 @@
         </p:nvSpPr>
         <p:spPr>
           <a:xfrm>
-            <a:off x="604800" y="4927348"/>
-            <a:ext cx="2007369" cy="151200"/>
+            <a:off x="604800" y="4987710"/>
+            <a:ext cx="1776902" cy="151200"/>
           </a:xfrm>
           <a:prstGeom prst="rect">
             <a:avLst/>
@@ -8715,7 +8715,7 @@
           <a:p>
             <a:pPr algn="l">
               <a:lnSpc>
-                <a:spcPts val="1062"/>
+                <a:spcPts val="1163"/>
               </a:lnSpc>
             </a:pPr>
             <a:r>
@@ -8738,21 +8738,21 @@
         </p:nvSpPr>
         <p:spPr>
           <a:xfrm>
-            <a:off x="2580322" y="4934317"/>
-            <a:ext cx="1133536" cy="151200"/>
-          </a:xfrm>
-          <a:prstGeom prst="rect">
-            <a:avLst/>
-          </a:prstGeom>
-          <a:noFill/>
-        </p:spPr>
-        <p:txBody>
-          <a:bodyPr wrap="none" lIns="0" rIns="0" tIns="0" bIns="0" anchor="t"/>
-          <a:lstStyle/>
-          <a:p>
-            <a:pPr algn="ctr">
-              <a:lnSpc>
-                <a:spcPts val="1214"/>
+            <a:off x="2404080" y="4987710"/>
+            <a:ext cx="833414" cy="151200"/>
+          </a:xfrm>
+          <a:prstGeom prst="rect">
+            <a:avLst/>
+          </a:prstGeom>
+          <a:noFill/>
+        </p:spPr>
+        <p:txBody>
+          <a:bodyPr wrap="none" lIns="0" rIns="0" tIns="0" bIns="0" anchor="t"/>
+          <a:lstStyle/>
+          <a:p>
+            <a:pPr algn="ctr">
+              <a:lnSpc>
+                <a:spcPts val="1163"/>
               </a:lnSpc>
             </a:pPr>
             <a:r>
@@ -8775,21 +8775,21 @@
         </p:nvSpPr>
         <p:spPr>
           <a:xfrm>
-            <a:off x="3715621" y="4934317"/>
-            <a:ext cx="425061" cy="151200"/>
-          </a:xfrm>
-          <a:prstGeom prst="rect">
-            <a:avLst/>
-          </a:prstGeom>
-          <a:noFill/>
-        </p:spPr>
-        <p:txBody>
-          <a:bodyPr wrap="none" lIns="0" rIns="0" tIns="0" bIns="0" anchor="t"/>
-          <a:lstStyle/>
-          <a:p>
-            <a:pPr algn="ctr">
-              <a:lnSpc>
-                <a:spcPts val="1214"/>
+            <a:off x="3296160" y="4987710"/>
+            <a:ext cx="503193" cy="151200"/>
+          </a:xfrm>
+          <a:prstGeom prst="rect">
+            <a:avLst/>
+          </a:prstGeom>
+          <a:noFill/>
+        </p:spPr>
+        <p:txBody>
+          <a:bodyPr wrap="none" lIns="0" rIns="0" tIns="0" bIns="0" anchor="t"/>
+          <a:lstStyle/>
+          <a:p>
+            <a:pPr algn="ctr">
+              <a:lnSpc>
+                <a:spcPts val="1163"/>
               </a:lnSpc>
             </a:pPr>
             <a:r>
@@ -8812,21 +8812,21 @@
         </p:nvSpPr>
         <p:spPr>
           <a:xfrm>
-            <a:off x="4169694" y="4934317"/>
-            <a:ext cx="676903" cy="151200"/>
-          </a:xfrm>
-          <a:prstGeom prst="rect">
-            <a:avLst/>
-          </a:prstGeom>
-          <a:noFill/>
-        </p:spPr>
-        <p:txBody>
-          <a:bodyPr wrap="none" lIns="0" rIns="0" tIns="0" bIns="0" anchor="t"/>
-          <a:lstStyle/>
-          <a:p>
-            <a:pPr algn="ctr">
-              <a:lnSpc>
-                <a:spcPts val="1214"/>
+            <a:off x="3870720" y="4987710"/>
+            <a:ext cx="723340" cy="151200"/>
+          </a:xfrm>
+          <a:prstGeom prst="rect">
+            <a:avLst/>
+          </a:prstGeom>
+          <a:noFill/>
+        </p:spPr>
+        <p:txBody>
+          <a:bodyPr wrap="none" lIns="0" rIns="0" tIns="0" bIns="0" anchor="t"/>
+          <a:lstStyle/>
+          <a:p>
+            <a:pPr algn="ctr">
+              <a:lnSpc>
+                <a:spcPts val="1163"/>
               </a:lnSpc>
             </a:pPr>
             <a:r>
@@ -8849,21 +8849,21 @@
         </p:nvSpPr>
         <p:spPr>
           <a:xfrm>
-            <a:off x="4865923" y="4934317"/>
-            <a:ext cx="1172848" cy="151200"/>
-          </a:xfrm>
-          <a:prstGeom prst="rect">
-            <a:avLst/>
-          </a:prstGeom>
-          <a:noFill/>
-        </p:spPr>
-        <p:txBody>
-          <a:bodyPr wrap="none" lIns="0" rIns="0" tIns="0" bIns="0" anchor="t"/>
-          <a:lstStyle/>
-          <a:p>
-            <a:pPr algn="ctr">
-              <a:lnSpc>
-                <a:spcPts val="1214"/>
+            <a:off x="4656960" y="4987710"/>
+            <a:ext cx="959212" cy="151200"/>
+          </a:xfrm>
+          <a:prstGeom prst="rect">
+            <a:avLst/>
+          </a:prstGeom>
+          <a:noFill/>
+        </p:spPr>
+        <p:txBody>
+          <a:bodyPr wrap="none" lIns="0" rIns="0" tIns="0" bIns="0" anchor="t"/>
+          <a:lstStyle/>
+          <a:p>
+            <a:pPr algn="ctr">
+              <a:lnSpc>
+                <a:spcPts val="1163"/>
               </a:lnSpc>
             </a:pPr>
             <a:r>
@@ -8886,21 +8886,21 @@
         </p:nvSpPr>
         <p:spPr>
           <a:xfrm>
-            <a:off x="6039022" y="4934317"/>
-            <a:ext cx="488083" cy="151200"/>
-          </a:xfrm>
-          <a:prstGeom prst="rect">
-            <a:avLst/>
-          </a:prstGeom>
-          <a:noFill/>
-        </p:spPr>
-        <p:txBody>
-          <a:bodyPr wrap="none" lIns="0" rIns="0" tIns="0" bIns="0" anchor="t"/>
-          <a:lstStyle/>
-          <a:p>
-            <a:pPr algn="ctr">
-              <a:lnSpc>
-                <a:spcPts val="1214"/>
+            <a:off x="5670000" y="4987710"/>
+            <a:ext cx="644716" cy="151200"/>
+          </a:xfrm>
+          <a:prstGeom prst="rect">
+            <a:avLst/>
+          </a:prstGeom>
+          <a:noFill/>
+        </p:spPr>
+        <p:txBody>
+          <a:bodyPr wrap="none" lIns="0" rIns="0" tIns="0" bIns="0" anchor="t"/>
+          <a:lstStyle/>
+          <a:p>
+            <a:pPr algn="ctr">
+              <a:lnSpc>
+                <a:spcPts val="1163"/>
               </a:lnSpc>
             </a:pPr>
             <a:r>
@@ -8923,21 +8923,21 @@
         </p:nvSpPr>
         <p:spPr>
           <a:xfrm>
-            <a:off x="6553693" y="4934317"/>
-            <a:ext cx="488328" cy="151200"/>
-          </a:xfrm>
-          <a:prstGeom prst="rect">
-            <a:avLst/>
-          </a:prstGeom>
-          <a:noFill/>
-        </p:spPr>
-        <p:txBody>
-          <a:bodyPr wrap="none" lIns="0" rIns="0" tIns="0" bIns="0" anchor="t"/>
-          <a:lstStyle/>
-          <a:p>
-            <a:pPr algn="ctr">
-              <a:lnSpc>
-                <a:spcPts val="1214"/>
+            <a:off x="6380640" y="4987710"/>
+            <a:ext cx="644716" cy="151200"/>
+          </a:xfrm>
+          <a:prstGeom prst="rect">
+            <a:avLst/>
+          </a:prstGeom>
+          <a:noFill/>
+        </p:spPr>
+        <p:txBody>
+          <a:bodyPr wrap="none" lIns="0" rIns="0" tIns="0" bIns="0" anchor="t"/>
+          <a:lstStyle/>
+          <a:p>
+            <a:pPr algn="ctr">
+              <a:lnSpc>
+                <a:spcPts val="1163"/>
               </a:lnSpc>
             </a:pPr>
             <a:r>
@@ -8960,8 +8960,8 @@
         </p:nvSpPr>
         <p:spPr>
           <a:xfrm>
-            <a:off x="604800" y="5222188"/>
-            <a:ext cx="2007369" cy="151200"/>
+            <a:off x="604800" y="5282550"/>
+            <a:ext cx="1776902" cy="151200"/>
           </a:xfrm>
           <a:prstGeom prst="rect">
             <a:avLst/>
@@ -8974,7 +8974,7 @@
           <a:p>
             <a:pPr algn="l">
               <a:lnSpc>
-                <a:spcPts val="1062"/>
+                <a:spcPts val="1163"/>
               </a:lnSpc>
             </a:pPr>
             <a:r>
@@ -8997,21 +8997,21 @@
         </p:nvSpPr>
         <p:spPr>
           <a:xfrm>
-            <a:off x="2580322" y="5229157"/>
-            <a:ext cx="1133536" cy="151200"/>
-          </a:xfrm>
-          <a:prstGeom prst="rect">
-            <a:avLst/>
-          </a:prstGeom>
-          <a:noFill/>
-        </p:spPr>
-        <p:txBody>
-          <a:bodyPr wrap="none" lIns="0" rIns="0" tIns="0" bIns="0" anchor="t"/>
-          <a:lstStyle/>
-          <a:p>
-            <a:pPr algn="ctr">
-              <a:lnSpc>
-                <a:spcPts val="1214"/>
+            <a:off x="2404080" y="5282550"/>
+            <a:ext cx="833414" cy="151200"/>
+          </a:xfrm>
+          <a:prstGeom prst="rect">
+            <a:avLst/>
+          </a:prstGeom>
+          <a:noFill/>
+        </p:spPr>
+        <p:txBody>
+          <a:bodyPr wrap="none" lIns="0" rIns="0" tIns="0" bIns="0" anchor="t"/>
+          <a:lstStyle/>
+          <a:p>
+            <a:pPr algn="ctr">
+              <a:lnSpc>
+                <a:spcPts val="1163"/>
               </a:lnSpc>
             </a:pPr>
             <a:r>
@@ -9034,21 +9034,21 @@
         </p:nvSpPr>
         <p:spPr>
           <a:xfrm>
-            <a:off x="3715621" y="5229157"/>
-            <a:ext cx="425061" cy="151200"/>
-          </a:xfrm>
-          <a:prstGeom prst="rect">
-            <a:avLst/>
-          </a:prstGeom>
-          <a:noFill/>
-        </p:spPr>
-        <p:txBody>
-          <a:bodyPr wrap="none" lIns="0" rIns="0" tIns="0" bIns="0" anchor="t"/>
-          <a:lstStyle/>
-          <a:p>
-            <a:pPr algn="ctr">
-              <a:lnSpc>
-                <a:spcPts val="1214"/>
+            <a:off x="3296160" y="5282550"/>
+            <a:ext cx="503193" cy="151200"/>
+          </a:xfrm>
+          <a:prstGeom prst="rect">
+            <a:avLst/>
+          </a:prstGeom>
+          <a:noFill/>
+        </p:spPr>
+        <p:txBody>
+          <a:bodyPr wrap="none" lIns="0" rIns="0" tIns="0" bIns="0" anchor="t"/>
+          <a:lstStyle/>
+          <a:p>
+            <a:pPr algn="ctr">
+              <a:lnSpc>
+                <a:spcPts val="1163"/>
               </a:lnSpc>
             </a:pPr>
             <a:r>
@@ -9071,21 +9071,21 @@
         </p:nvSpPr>
         <p:spPr>
           <a:xfrm>
-            <a:off x="4169694" y="5229157"/>
-            <a:ext cx="676903" cy="151200"/>
-          </a:xfrm>
-          <a:prstGeom prst="rect">
-            <a:avLst/>
-          </a:prstGeom>
-          <a:noFill/>
-        </p:spPr>
-        <p:txBody>
-          <a:bodyPr wrap="none" lIns="0" rIns="0" tIns="0" bIns="0" anchor="t"/>
-          <a:lstStyle/>
-          <a:p>
-            <a:pPr algn="ctr">
-              <a:lnSpc>
-                <a:spcPts val="1214"/>
+            <a:off x="3870720" y="5282550"/>
+            <a:ext cx="723340" cy="151200"/>
+          </a:xfrm>
+          <a:prstGeom prst="rect">
+            <a:avLst/>
+          </a:prstGeom>
+          <a:noFill/>
+        </p:spPr>
+        <p:txBody>
+          <a:bodyPr wrap="none" lIns="0" rIns="0" tIns="0" bIns="0" anchor="t"/>
+          <a:lstStyle/>
+          <a:p>
+            <a:pPr algn="ctr">
+              <a:lnSpc>
+                <a:spcPts val="1163"/>
               </a:lnSpc>
             </a:pPr>
             <a:r>
@@ -9108,21 +9108,21 @@
         </p:nvSpPr>
         <p:spPr>
           <a:xfrm>
-            <a:off x="4865923" y="5229157"/>
-            <a:ext cx="1172848" cy="151200"/>
-          </a:xfrm>
-          <a:prstGeom prst="rect">
-            <a:avLst/>
-          </a:prstGeom>
-          <a:noFill/>
-        </p:spPr>
-        <p:txBody>
-          <a:bodyPr wrap="none" lIns="0" rIns="0" tIns="0" bIns="0" anchor="t"/>
-          <a:lstStyle/>
-          <a:p>
-            <a:pPr algn="ctr">
-              <a:lnSpc>
-                <a:spcPts val="1214"/>
+            <a:off x="4656960" y="5282550"/>
+            <a:ext cx="959212" cy="151200"/>
+          </a:xfrm>
+          <a:prstGeom prst="rect">
+            <a:avLst/>
+          </a:prstGeom>
+          <a:noFill/>
+        </p:spPr>
+        <p:txBody>
+          <a:bodyPr wrap="none" lIns="0" rIns="0" tIns="0" bIns="0" anchor="t"/>
+          <a:lstStyle/>
+          <a:p>
+            <a:pPr algn="ctr">
+              <a:lnSpc>
+                <a:spcPts val="1163"/>
               </a:lnSpc>
             </a:pPr>
             <a:r>
@@ -9145,21 +9145,21 @@
         </p:nvSpPr>
         <p:spPr>
           <a:xfrm>
-            <a:off x="6039022" y="5229157"/>
-            <a:ext cx="488083" cy="151200"/>
-          </a:xfrm>
-          <a:prstGeom prst="rect">
-            <a:avLst/>
-          </a:prstGeom>
-          <a:noFill/>
-        </p:spPr>
-        <p:txBody>
-          <a:bodyPr wrap="none" lIns="0" rIns="0" tIns="0" bIns="0" anchor="t"/>
-          <a:lstStyle/>
-          <a:p>
-            <a:pPr algn="ctr">
-              <a:lnSpc>
-                <a:spcPts val="1214"/>
+            <a:off x="5670000" y="5282550"/>
+            <a:ext cx="644716" cy="151200"/>
+          </a:xfrm>
+          <a:prstGeom prst="rect">
+            <a:avLst/>
+          </a:prstGeom>
+          <a:noFill/>
+        </p:spPr>
+        <p:txBody>
+          <a:bodyPr wrap="none" lIns="0" rIns="0" tIns="0" bIns="0" anchor="t"/>
+          <a:lstStyle/>
+          <a:p>
+            <a:pPr algn="ctr">
+              <a:lnSpc>
+                <a:spcPts val="1163"/>
               </a:lnSpc>
             </a:pPr>
             <a:r>
@@ -9182,21 +9182,21 @@
         </p:nvSpPr>
         <p:spPr>
           <a:xfrm>
-            <a:off x="6553693" y="5229157"/>
-            <a:ext cx="488328" cy="151200"/>
-          </a:xfrm>
-          <a:prstGeom prst="rect">
-            <a:avLst/>
-          </a:prstGeom>
-          <a:noFill/>
-        </p:spPr>
-        <p:txBody>
-          <a:bodyPr wrap="none" lIns="0" rIns="0" tIns="0" bIns="0" anchor="t"/>
-          <a:lstStyle/>
-          <a:p>
-            <a:pPr algn="ctr">
-              <a:lnSpc>
-                <a:spcPts val="1214"/>
+            <a:off x="6380640" y="5282550"/>
+            <a:ext cx="644716" cy="151200"/>
+          </a:xfrm>
+          <a:prstGeom prst="rect">
+            <a:avLst/>
+          </a:prstGeom>
+          <a:noFill/>
+        </p:spPr>
+        <p:txBody>
+          <a:bodyPr wrap="none" lIns="0" rIns="0" tIns="0" bIns="0" anchor="t"/>
+          <a:lstStyle/>
+          <a:p>
+            <a:pPr algn="ctr">
+              <a:lnSpc>
+                <a:spcPts val="1163"/>
               </a:lnSpc>
             </a:pPr>
             <a:r>
@@ -9219,8 +9219,8 @@
         </p:nvSpPr>
         <p:spPr>
           <a:xfrm>
-            <a:off x="604800" y="5517028"/>
-            <a:ext cx="2007369" cy="151200"/>
+            <a:off x="604800" y="5577390"/>
+            <a:ext cx="1776902" cy="151200"/>
           </a:xfrm>
           <a:prstGeom prst="rect">
             <a:avLst/>
@@ -9233,7 +9233,7 @@
           <a:p>
             <a:pPr algn="l">
               <a:lnSpc>
-                <a:spcPts val="1062"/>
+                <a:spcPts val="1163"/>
               </a:lnSpc>
             </a:pPr>
             <a:r>
@@ -9256,21 +9256,21 @@
         </p:nvSpPr>
         <p:spPr>
           <a:xfrm>
-            <a:off x="2580322" y="5523997"/>
-            <a:ext cx="1133536" cy="151200"/>
-          </a:xfrm>
-          <a:prstGeom prst="rect">
-            <a:avLst/>
-          </a:prstGeom>
-          <a:noFill/>
-        </p:spPr>
-        <p:txBody>
-          <a:bodyPr wrap="none" lIns="0" rIns="0" tIns="0" bIns="0" anchor="t"/>
-          <a:lstStyle/>
-          <a:p>
-            <a:pPr algn="ctr">
-              <a:lnSpc>
-                <a:spcPts val="1214"/>
+            <a:off x="2404080" y="5577390"/>
+            <a:ext cx="833414" cy="151200"/>
+          </a:xfrm>
+          <a:prstGeom prst="rect">
+            <a:avLst/>
+          </a:prstGeom>
+          <a:noFill/>
+        </p:spPr>
+        <p:txBody>
+          <a:bodyPr wrap="none" lIns="0" rIns="0" tIns="0" bIns="0" anchor="t"/>
+          <a:lstStyle/>
+          <a:p>
+            <a:pPr algn="ctr">
+              <a:lnSpc>
+                <a:spcPts val="1163"/>
               </a:lnSpc>
             </a:pPr>
             <a:r>
@@ -9293,21 +9293,21 @@
         </p:nvSpPr>
         <p:spPr>
           <a:xfrm>
-            <a:off x="3715621" y="5523997"/>
-            <a:ext cx="425061" cy="151200"/>
-          </a:xfrm>
-          <a:prstGeom prst="rect">
-            <a:avLst/>
-          </a:prstGeom>
-          <a:noFill/>
-        </p:spPr>
-        <p:txBody>
-          <a:bodyPr wrap="none" lIns="0" rIns="0" tIns="0" bIns="0" anchor="t"/>
-          <a:lstStyle/>
-          <a:p>
-            <a:pPr algn="ctr">
-              <a:lnSpc>
-                <a:spcPts val="1214"/>
+            <a:off x="3296160" y="5577390"/>
+            <a:ext cx="503193" cy="151200"/>
+          </a:xfrm>
+          <a:prstGeom prst="rect">
+            <a:avLst/>
+          </a:prstGeom>
+          <a:noFill/>
+        </p:spPr>
+        <p:txBody>
+          <a:bodyPr wrap="none" lIns="0" rIns="0" tIns="0" bIns="0" anchor="t"/>
+          <a:lstStyle/>
+          <a:p>
+            <a:pPr algn="ctr">
+              <a:lnSpc>
+                <a:spcPts val="1163"/>
               </a:lnSpc>
             </a:pPr>
             <a:r>
@@ -9330,21 +9330,21 @@
         </p:nvSpPr>
         <p:spPr>
           <a:xfrm>
-            <a:off x="4169694" y="5523997"/>
-            <a:ext cx="676903" cy="151200"/>
-          </a:xfrm>
-          <a:prstGeom prst="rect">
-            <a:avLst/>
-          </a:prstGeom>
-          <a:noFill/>
-        </p:spPr>
-        <p:txBody>
-          <a:bodyPr wrap="none" lIns="0" rIns="0" tIns="0" bIns="0" anchor="t"/>
-          <a:lstStyle/>
-          <a:p>
-            <a:pPr algn="ctr">
-              <a:lnSpc>
-                <a:spcPts val="1214"/>
+            <a:off x="3870720" y="5577390"/>
+            <a:ext cx="723340" cy="151200"/>
+          </a:xfrm>
+          <a:prstGeom prst="rect">
+            <a:avLst/>
+          </a:prstGeom>
+          <a:noFill/>
+        </p:spPr>
+        <p:txBody>
+          <a:bodyPr wrap="none" lIns="0" rIns="0" tIns="0" bIns="0" anchor="t"/>
+          <a:lstStyle/>
+          <a:p>
+            <a:pPr algn="ctr">
+              <a:lnSpc>
+                <a:spcPts val="1163"/>
               </a:lnSpc>
             </a:pPr>
             <a:r>
@@ -9367,21 +9367,21 @@
         </p:nvSpPr>
         <p:spPr>
           <a:xfrm>
-            <a:off x="4865923" y="5523997"/>
-            <a:ext cx="1172848" cy="151200"/>
-          </a:xfrm>
-          <a:prstGeom prst="rect">
-            <a:avLst/>
-          </a:prstGeom>
-          <a:noFill/>
-        </p:spPr>
-        <p:txBody>
-          <a:bodyPr wrap="none" lIns="0" rIns="0" tIns="0" bIns="0" anchor="t"/>
-          <a:lstStyle/>
-          <a:p>
-            <a:pPr algn="ctr">
-              <a:lnSpc>
-                <a:spcPts val="1214"/>
+            <a:off x="4656960" y="5577390"/>
+            <a:ext cx="959212" cy="151200"/>
+          </a:xfrm>
+          <a:prstGeom prst="rect">
+            <a:avLst/>
+          </a:prstGeom>
+          <a:noFill/>
+        </p:spPr>
+        <p:txBody>
+          <a:bodyPr wrap="none" lIns="0" rIns="0" tIns="0" bIns="0" anchor="t"/>
+          <a:lstStyle/>
+          <a:p>
+            <a:pPr algn="ctr">
+              <a:lnSpc>
+                <a:spcPts val="1163"/>
               </a:lnSpc>
             </a:pPr>
             <a:r>
@@ -9404,21 +9404,21 @@
         </p:nvSpPr>
         <p:spPr>
           <a:xfrm>
-            <a:off x="6039022" y="5523997"/>
-            <a:ext cx="488083" cy="151200"/>
-          </a:xfrm>
-          <a:prstGeom prst="rect">
-            <a:avLst/>
-          </a:prstGeom>
-          <a:noFill/>
-        </p:spPr>
-        <p:txBody>
-          <a:bodyPr wrap="none" lIns="0" rIns="0" tIns="0" bIns="0" anchor="t"/>
-          <a:lstStyle/>
-          <a:p>
-            <a:pPr algn="ctr">
-              <a:lnSpc>
-                <a:spcPts val="1214"/>
+            <a:off x="5670000" y="5577390"/>
+            <a:ext cx="644716" cy="151200"/>
+          </a:xfrm>
+          <a:prstGeom prst="rect">
+            <a:avLst/>
+          </a:prstGeom>
+          <a:noFill/>
+        </p:spPr>
+        <p:txBody>
+          <a:bodyPr wrap="none" lIns="0" rIns="0" tIns="0" bIns="0" anchor="t"/>
+          <a:lstStyle/>
+          <a:p>
+            <a:pPr algn="ctr">
+              <a:lnSpc>
+                <a:spcPts val="1163"/>
               </a:lnSpc>
             </a:pPr>
             <a:r>
@@ -9441,21 +9441,21 @@
         </p:nvSpPr>
         <p:spPr>
           <a:xfrm>
-            <a:off x="6553693" y="5523997"/>
-            <a:ext cx="488328" cy="151200"/>
-          </a:xfrm>
-          <a:prstGeom prst="rect">
-            <a:avLst/>
-          </a:prstGeom>
-          <a:noFill/>
-        </p:spPr>
-        <p:txBody>
-          <a:bodyPr wrap="none" lIns="0" rIns="0" tIns="0" bIns="0" anchor="t"/>
-          <a:lstStyle/>
-          <a:p>
-            <a:pPr algn="ctr">
-              <a:lnSpc>
-                <a:spcPts val="1214"/>
+            <a:off x="6380640" y="5577390"/>
+            <a:ext cx="644716" cy="151200"/>
+          </a:xfrm>
+          <a:prstGeom prst="rect">
+            <a:avLst/>
+          </a:prstGeom>
+          <a:noFill/>
+        </p:spPr>
+        <p:txBody>
+          <a:bodyPr wrap="none" lIns="0" rIns="0" tIns="0" bIns="0" anchor="t"/>
+          <a:lstStyle/>
+          <a:p>
+            <a:pPr algn="ctr">
+              <a:lnSpc>
+                <a:spcPts val="1163"/>
               </a:lnSpc>
             </a:pPr>
             <a:r>
@@ -9478,8 +9478,8 @@
         </p:nvSpPr>
         <p:spPr>
           <a:xfrm>
-            <a:off x="604800" y="5811868"/>
-            <a:ext cx="2007369" cy="151200"/>
+            <a:off x="604800" y="5872230"/>
+            <a:ext cx="1776902" cy="151200"/>
           </a:xfrm>
           <a:prstGeom prst="rect">
             <a:avLst/>
@@ -9492,7 +9492,7 @@
           <a:p>
             <a:pPr algn="l">
               <a:lnSpc>
-                <a:spcPts val="1062"/>
+                <a:spcPts val="1163"/>
               </a:lnSpc>
             </a:pPr>
             <a:r>
@@ -9515,21 +9515,21 @@
         </p:nvSpPr>
         <p:spPr>
           <a:xfrm>
-            <a:off x="2580322" y="5818837"/>
-            <a:ext cx="1133536" cy="151200"/>
-          </a:xfrm>
-          <a:prstGeom prst="rect">
-            <a:avLst/>
-          </a:prstGeom>
-          <a:noFill/>
-        </p:spPr>
-        <p:txBody>
-          <a:bodyPr wrap="none" lIns="0" rIns="0" tIns="0" bIns="0" anchor="t"/>
-          <a:lstStyle/>
-          <a:p>
-            <a:pPr algn="ctr">
-              <a:lnSpc>
-                <a:spcPts val="1214"/>
+            <a:off x="2404080" y="5872230"/>
+            <a:ext cx="833414" cy="151200"/>
+          </a:xfrm>
+          <a:prstGeom prst="rect">
+            <a:avLst/>
+          </a:prstGeom>
+          <a:noFill/>
+        </p:spPr>
+        <p:txBody>
+          <a:bodyPr wrap="none" lIns="0" rIns="0" tIns="0" bIns="0" anchor="t"/>
+          <a:lstStyle/>
+          <a:p>
+            <a:pPr algn="ctr">
+              <a:lnSpc>
+                <a:spcPts val="1163"/>
               </a:lnSpc>
             </a:pPr>
             <a:r>
@@ -9552,21 +9552,21 @@
         </p:nvSpPr>
         <p:spPr>
           <a:xfrm>
-            <a:off x="3715621" y="5818837"/>
-            <a:ext cx="425061" cy="151200"/>
-          </a:xfrm>
-          <a:prstGeom prst="rect">
-            <a:avLst/>
-          </a:prstGeom>
-          <a:noFill/>
-        </p:spPr>
-        <p:txBody>
-          <a:bodyPr wrap="none" lIns="0" rIns="0" tIns="0" bIns="0" anchor="t"/>
-          <a:lstStyle/>
-          <a:p>
-            <a:pPr algn="ctr">
-              <a:lnSpc>
-                <a:spcPts val="1214"/>
+            <a:off x="3296160" y="5872230"/>
+            <a:ext cx="503193" cy="151200"/>
+          </a:xfrm>
+          <a:prstGeom prst="rect">
+            <a:avLst/>
+          </a:prstGeom>
+          <a:noFill/>
+        </p:spPr>
+        <p:txBody>
+          <a:bodyPr wrap="none" lIns="0" rIns="0" tIns="0" bIns="0" anchor="t"/>
+          <a:lstStyle/>
+          <a:p>
+            <a:pPr algn="ctr">
+              <a:lnSpc>
+                <a:spcPts val="1163"/>
               </a:lnSpc>
             </a:pPr>
             <a:r>
@@ -9589,21 +9589,21 @@
         </p:nvSpPr>
         <p:spPr>
           <a:xfrm>
-            <a:off x="4169694" y="5818837"/>
-            <a:ext cx="676903" cy="151200"/>
-          </a:xfrm>
-          <a:prstGeom prst="rect">
-            <a:avLst/>
-          </a:prstGeom>
-          <a:noFill/>
-        </p:spPr>
-        <p:txBody>
-          <a:bodyPr wrap="none" lIns="0" rIns="0" tIns="0" bIns="0" anchor="t"/>
-          <a:lstStyle/>
-          <a:p>
-            <a:pPr algn="ctr">
-              <a:lnSpc>
-                <a:spcPts val="1214"/>
+            <a:off x="3870720" y="5872230"/>
+            <a:ext cx="723340" cy="151200"/>
+          </a:xfrm>
+          <a:prstGeom prst="rect">
+            <a:avLst/>
+          </a:prstGeom>
+          <a:noFill/>
+        </p:spPr>
+        <p:txBody>
+          <a:bodyPr wrap="none" lIns="0" rIns="0" tIns="0" bIns="0" anchor="t"/>
+          <a:lstStyle/>
+          <a:p>
+            <a:pPr algn="ctr">
+              <a:lnSpc>
+                <a:spcPts val="1163"/>
               </a:lnSpc>
             </a:pPr>
             <a:r>
@@ -9626,21 +9626,21 @@
         </p:nvSpPr>
         <p:spPr>
           <a:xfrm>
-            <a:off x="4865923" y="5818837"/>
-            <a:ext cx="1172848" cy="151200"/>
-          </a:xfrm>
-          <a:prstGeom prst="rect">
-            <a:avLst/>
-          </a:prstGeom>
-          <a:noFill/>
-        </p:spPr>
-        <p:txBody>
-          <a:bodyPr wrap="none" lIns="0" rIns="0" tIns="0" bIns="0" anchor="t"/>
-          <a:lstStyle/>
-          <a:p>
-            <a:pPr algn="ctr">
-              <a:lnSpc>
-                <a:spcPts val="1214"/>
+            <a:off x="4656960" y="5872230"/>
+            <a:ext cx="959212" cy="151200"/>
+          </a:xfrm>
+          <a:prstGeom prst="rect">
+            <a:avLst/>
+          </a:prstGeom>
+          <a:noFill/>
+        </p:spPr>
+        <p:txBody>
+          <a:bodyPr wrap="none" lIns="0" rIns="0" tIns="0" bIns="0" anchor="t"/>
+          <a:lstStyle/>
+          <a:p>
+            <a:pPr algn="ctr">
+              <a:lnSpc>
+                <a:spcPts val="1163"/>
               </a:lnSpc>
             </a:pPr>
             <a:r>
@@ -9663,21 +9663,21 @@
         </p:nvSpPr>
         <p:spPr>
           <a:xfrm>
-            <a:off x="6039022" y="5818837"/>
-            <a:ext cx="488083" cy="151200"/>
-          </a:xfrm>
-          <a:prstGeom prst="rect">
-            <a:avLst/>
-          </a:prstGeom>
-          <a:noFill/>
-        </p:spPr>
-        <p:txBody>
-          <a:bodyPr wrap="none" lIns="0" rIns="0" tIns="0" bIns="0" anchor="t"/>
-          <a:lstStyle/>
-          <a:p>
-            <a:pPr algn="ctr">
-              <a:lnSpc>
-                <a:spcPts val="1214"/>
+            <a:off x="5670000" y="5872230"/>
+            <a:ext cx="644716" cy="151200"/>
+          </a:xfrm>
+          <a:prstGeom prst="rect">
+            <a:avLst/>
+          </a:prstGeom>
+          <a:noFill/>
+        </p:spPr>
+        <p:txBody>
+          <a:bodyPr wrap="none" lIns="0" rIns="0" tIns="0" bIns="0" anchor="t"/>
+          <a:lstStyle/>
+          <a:p>
+            <a:pPr algn="ctr">
+              <a:lnSpc>
+                <a:spcPts val="1163"/>
               </a:lnSpc>
             </a:pPr>
             <a:r>
@@ -9700,21 +9700,21 @@
         </p:nvSpPr>
         <p:spPr>
           <a:xfrm>
-            <a:off x="6553693" y="5818837"/>
-            <a:ext cx="488328" cy="151200"/>
-          </a:xfrm>
-          <a:prstGeom prst="rect">
-            <a:avLst/>
-          </a:prstGeom>
-          <a:noFill/>
-        </p:spPr>
-        <p:txBody>
-          <a:bodyPr wrap="none" lIns="0" rIns="0" tIns="0" bIns="0" anchor="t"/>
-          <a:lstStyle/>
-          <a:p>
-            <a:pPr algn="ctr">
-              <a:lnSpc>
-                <a:spcPts val="1214"/>
+            <a:off x="6380640" y="5872230"/>
+            <a:ext cx="644716" cy="151200"/>
+          </a:xfrm>
+          <a:prstGeom prst="rect">
+            <a:avLst/>
+          </a:prstGeom>
+          <a:noFill/>
+        </p:spPr>
+        <p:txBody>
+          <a:bodyPr wrap="none" lIns="0" rIns="0" tIns="0" bIns="0" anchor="t"/>
+          <a:lstStyle/>
+          <a:p>
+            <a:pPr algn="ctr">
+              <a:lnSpc>
+                <a:spcPts val="1163"/>
               </a:lnSpc>
             </a:pPr>
             <a:r>
@@ -9737,8 +9737,8 @@
         </p:nvSpPr>
         <p:spPr>
           <a:xfrm>
-            <a:off x="604800" y="6106708"/>
-            <a:ext cx="2007369" cy="151200"/>
+            <a:off x="604800" y="6167070"/>
+            <a:ext cx="1776902" cy="151200"/>
           </a:xfrm>
           <a:prstGeom prst="rect">
             <a:avLst/>
@@ -9751,7 +9751,7 @@
           <a:p>
             <a:pPr algn="l">
               <a:lnSpc>
-                <a:spcPts val="1062"/>
+                <a:spcPts val="1163"/>
               </a:lnSpc>
             </a:pPr>
             <a:r>
@@ -9774,21 +9774,21 @@
         </p:nvSpPr>
         <p:spPr>
           <a:xfrm>
-            <a:off x="2580322" y="6113677"/>
-            <a:ext cx="1133536" cy="151200"/>
-          </a:xfrm>
-          <a:prstGeom prst="rect">
-            <a:avLst/>
-          </a:prstGeom>
-          <a:noFill/>
-        </p:spPr>
-        <p:txBody>
-          <a:bodyPr wrap="none" lIns="0" rIns="0" tIns="0" bIns="0" anchor="t"/>
-          <a:lstStyle/>
-          <a:p>
-            <a:pPr algn="ctr">
-              <a:lnSpc>
-                <a:spcPts val="1214"/>
+            <a:off x="2404080" y="6167070"/>
+            <a:ext cx="833414" cy="151200"/>
+          </a:xfrm>
+          <a:prstGeom prst="rect">
+            <a:avLst/>
+          </a:prstGeom>
+          <a:noFill/>
+        </p:spPr>
+        <p:txBody>
+          <a:bodyPr wrap="none" lIns="0" rIns="0" tIns="0" bIns="0" anchor="t"/>
+          <a:lstStyle/>
+          <a:p>
+            <a:pPr algn="ctr">
+              <a:lnSpc>
+                <a:spcPts val="1163"/>
               </a:lnSpc>
             </a:pPr>
             <a:r>
@@ -9811,21 +9811,21 @@
         </p:nvSpPr>
         <p:spPr>
           <a:xfrm>
-            <a:off x="3715621" y="6113677"/>
-            <a:ext cx="425061" cy="151200"/>
-          </a:xfrm>
-          <a:prstGeom prst="rect">
-            <a:avLst/>
-          </a:prstGeom>
-          <a:noFill/>
-        </p:spPr>
-        <p:txBody>
-          <a:bodyPr wrap="none" lIns="0" rIns="0" tIns="0" bIns="0" anchor="t"/>
-          <a:lstStyle/>
-          <a:p>
-            <a:pPr algn="ctr">
-              <a:lnSpc>
-                <a:spcPts val="1214"/>
+            <a:off x="3296160" y="6167070"/>
+            <a:ext cx="503193" cy="151200"/>
+          </a:xfrm>
+          <a:prstGeom prst="rect">
+            <a:avLst/>
+          </a:prstGeom>
+          <a:noFill/>
+        </p:spPr>
+        <p:txBody>
+          <a:bodyPr wrap="none" lIns="0" rIns="0" tIns="0" bIns="0" anchor="t"/>
+          <a:lstStyle/>
+          <a:p>
+            <a:pPr algn="ctr">
+              <a:lnSpc>
+                <a:spcPts val="1163"/>
               </a:lnSpc>
             </a:pPr>
             <a:r>
@@ -9848,21 +9848,21 @@
         </p:nvSpPr>
         <p:spPr>
           <a:xfrm>
-            <a:off x="4169694" y="6113677"/>
-            <a:ext cx="676903" cy="151200"/>
-          </a:xfrm>
-          <a:prstGeom prst="rect">
-            <a:avLst/>
-          </a:prstGeom>
-          <a:noFill/>
-        </p:spPr>
-        <p:txBody>
-          <a:bodyPr wrap="none" lIns="0" rIns="0" tIns="0" bIns="0" anchor="t"/>
-          <a:lstStyle/>
-          <a:p>
-            <a:pPr algn="ctr">
-              <a:lnSpc>
-                <a:spcPts val="1214"/>
+            <a:off x="3870720" y="6167070"/>
+            <a:ext cx="723340" cy="151200"/>
+          </a:xfrm>
+          <a:prstGeom prst="rect">
+            <a:avLst/>
+          </a:prstGeom>
+          <a:noFill/>
+        </p:spPr>
+        <p:txBody>
+          <a:bodyPr wrap="none" lIns="0" rIns="0" tIns="0" bIns="0" anchor="t"/>
+          <a:lstStyle/>
+          <a:p>
+            <a:pPr algn="ctr">
+              <a:lnSpc>
+                <a:spcPts val="1163"/>
               </a:lnSpc>
             </a:pPr>
             <a:r>
@@ -9885,21 +9885,21 @@
         </p:nvSpPr>
         <p:spPr>
           <a:xfrm>
-            <a:off x="4865923" y="6113677"/>
-            <a:ext cx="1172848" cy="151200"/>
-          </a:xfrm>
-          <a:prstGeom prst="rect">
-            <a:avLst/>
-          </a:prstGeom>
-          <a:noFill/>
-        </p:spPr>
-        <p:txBody>
-          <a:bodyPr wrap="none" lIns="0" rIns="0" tIns="0" bIns="0" anchor="t"/>
-          <a:lstStyle/>
-          <a:p>
-            <a:pPr algn="ctr">
-              <a:lnSpc>
-                <a:spcPts val="1214"/>
+            <a:off x="4656960" y="6167070"/>
+            <a:ext cx="959212" cy="151200"/>
+          </a:xfrm>
+          <a:prstGeom prst="rect">
+            <a:avLst/>
+          </a:prstGeom>
+          <a:noFill/>
+        </p:spPr>
+        <p:txBody>
+          <a:bodyPr wrap="none" lIns="0" rIns="0" tIns="0" bIns="0" anchor="t"/>
+          <a:lstStyle/>
+          <a:p>
+            <a:pPr algn="ctr">
+              <a:lnSpc>
+                <a:spcPts val="1163"/>
               </a:lnSpc>
             </a:pPr>
             <a:r>
@@ -9922,21 +9922,21 @@
         </p:nvSpPr>
         <p:spPr>
           <a:xfrm>
-            <a:off x="6039022" y="6113677"/>
-            <a:ext cx="488083" cy="151200"/>
-          </a:xfrm>
-          <a:prstGeom prst="rect">
-            <a:avLst/>
-          </a:prstGeom>
-          <a:noFill/>
-        </p:spPr>
-        <p:txBody>
-          <a:bodyPr wrap="none" lIns="0" rIns="0" tIns="0" bIns="0" anchor="t"/>
-          <a:lstStyle/>
-          <a:p>
-            <a:pPr algn="ctr">
-              <a:lnSpc>
-                <a:spcPts val="1214"/>
+            <a:off x="5670000" y="6167070"/>
+            <a:ext cx="644716" cy="151200"/>
+          </a:xfrm>
+          <a:prstGeom prst="rect">
+            <a:avLst/>
+          </a:prstGeom>
+          <a:noFill/>
+        </p:spPr>
+        <p:txBody>
+          <a:bodyPr wrap="none" lIns="0" rIns="0" tIns="0" bIns="0" anchor="t"/>
+          <a:lstStyle/>
+          <a:p>
+            <a:pPr algn="ctr">
+              <a:lnSpc>
+                <a:spcPts val="1163"/>
               </a:lnSpc>
             </a:pPr>
             <a:r>
@@ -9959,21 +9959,21 @@
         </p:nvSpPr>
         <p:spPr>
           <a:xfrm>
-            <a:off x="6553693" y="6113677"/>
-            <a:ext cx="488328" cy="151200"/>
-          </a:xfrm>
-          <a:prstGeom prst="rect">
-            <a:avLst/>
-          </a:prstGeom>
-          <a:noFill/>
-        </p:spPr>
-        <p:txBody>
-          <a:bodyPr wrap="none" lIns="0" rIns="0" tIns="0" bIns="0" anchor="t"/>
-          <a:lstStyle/>
-          <a:p>
-            <a:pPr algn="ctr">
-              <a:lnSpc>
-                <a:spcPts val="1214"/>
+            <a:off x="6380640" y="6167070"/>
+            <a:ext cx="644716" cy="151200"/>
+          </a:xfrm>
+          <a:prstGeom prst="rect">
+            <a:avLst/>
+          </a:prstGeom>
+          <a:noFill/>
+        </p:spPr>
+        <p:txBody>
+          <a:bodyPr wrap="none" lIns="0" rIns="0" tIns="0" bIns="0" anchor="t"/>
+          <a:lstStyle/>
+          <a:p>
+            <a:pPr algn="ctr">
+              <a:lnSpc>
+                <a:spcPts val="1163"/>
               </a:lnSpc>
             </a:pPr>
             <a:r>
@@ -9996,8 +9996,8 @@
         </p:nvSpPr>
         <p:spPr>
           <a:xfrm>
-            <a:off x="604800" y="6401548"/>
-            <a:ext cx="2007369" cy="151200"/>
+            <a:off x="604800" y="6461910"/>
+            <a:ext cx="1776902" cy="151200"/>
           </a:xfrm>
           <a:prstGeom prst="rect">
             <a:avLst/>
@@ -10010,7 +10010,7 @@
           <a:p>
             <a:pPr algn="l">
               <a:lnSpc>
-                <a:spcPts val="1062"/>
+                <a:spcPts val="1163"/>
               </a:lnSpc>
             </a:pPr>
             <a:r>
@@ -10033,21 +10033,21 @@
         </p:nvSpPr>
         <p:spPr>
           <a:xfrm>
-            <a:off x="2580322" y="6408517"/>
-            <a:ext cx="1133536" cy="151200"/>
-          </a:xfrm>
-          <a:prstGeom prst="rect">
-            <a:avLst/>
-          </a:prstGeom>
-          <a:noFill/>
-        </p:spPr>
-        <p:txBody>
-          <a:bodyPr wrap="none" lIns="0" rIns="0" tIns="0" bIns="0" anchor="t"/>
-          <a:lstStyle/>
-          <a:p>
-            <a:pPr algn="ctr">
-              <a:lnSpc>
-                <a:spcPts val="1214"/>
+            <a:off x="2404080" y="6461910"/>
+            <a:ext cx="833414" cy="151200"/>
+          </a:xfrm>
+          <a:prstGeom prst="rect">
+            <a:avLst/>
+          </a:prstGeom>
+          <a:noFill/>
+        </p:spPr>
+        <p:txBody>
+          <a:bodyPr wrap="none" lIns="0" rIns="0" tIns="0" bIns="0" anchor="t"/>
+          <a:lstStyle/>
+          <a:p>
+            <a:pPr algn="ctr">
+              <a:lnSpc>
+                <a:spcPts val="1163"/>
               </a:lnSpc>
             </a:pPr>
             <a:r>
@@ -10070,21 +10070,21 @@
         </p:nvSpPr>
         <p:spPr>
           <a:xfrm>
-            <a:off x="3715621" y="6408517"/>
-            <a:ext cx="425061" cy="151200"/>
-          </a:xfrm>
-          <a:prstGeom prst="rect">
-            <a:avLst/>
-          </a:prstGeom>
-          <a:noFill/>
-        </p:spPr>
-        <p:txBody>
-          <a:bodyPr wrap="none" lIns="0" rIns="0" tIns="0" bIns="0" anchor="t"/>
-          <a:lstStyle/>
-          <a:p>
-            <a:pPr algn="ctr">
-              <a:lnSpc>
-                <a:spcPts val="1214"/>
+            <a:off x="3296160" y="6461910"/>
+            <a:ext cx="503193" cy="151200"/>
+          </a:xfrm>
+          <a:prstGeom prst="rect">
+            <a:avLst/>
+          </a:prstGeom>
+          <a:noFill/>
+        </p:spPr>
+        <p:txBody>
+          <a:bodyPr wrap="none" lIns="0" rIns="0" tIns="0" bIns="0" anchor="t"/>
+          <a:lstStyle/>
+          <a:p>
+            <a:pPr algn="ctr">
+              <a:lnSpc>
+                <a:spcPts val="1163"/>
               </a:lnSpc>
             </a:pPr>
             <a:r>
@@ -10107,21 +10107,21 @@
         </p:nvSpPr>
         <p:spPr>
           <a:xfrm>
-            <a:off x="4169694" y="6408517"/>
-            <a:ext cx="676903" cy="151200"/>
-          </a:xfrm>
-          <a:prstGeom prst="rect">
-            <a:avLst/>
-          </a:prstGeom>
-          <a:noFill/>
-        </p:spPr>
-        <p:txBody>
-          <a:bodyPr wrap="none" lIns="0" rIns="0" tIns="0" bIns="0" anchor="t"/>
-          <a:lstStyle/>
-          <a:p>
-            <a:pPr algn="ctr">
-              <a:lnSpc>
-                <a:spcPts val="1214"/>
+            <a:off x="3870720" y="6461910"/>
+            <a:ext cx="723340" cy="151200"/>
+          </a:xfrm>
+          <a:prstGeom prst="rect">
+            <a:avLst/>
+          </a:prstGeom>
+          <a:noFill/>
+        </p:spPr>
+        <p:txBody>
+          <a:bodyPr wrap="none" lIns="0" rIns="0" tIns="0" bIns="0" anchor="t"/>
+          <a:lstStyle/>
+          <a:p>
+            <a:pPr algn="ctr">
+              <a:lnSpc>
+                <a:spcPts val="1163"/>
               </a:lnSpc>
             </a:pPr>
             <a:r>
@@ -10144,21 +10144,21 @@
         </p:nvSpPr>
         <p:spPr>
           <a:xfrm>
-            <a:off x="4865923" y="6408517"/>
-            <a:ext cx="1172848" cy="151200"/>
-          </a:xfrm>
-          <a:prstGeom prst="rect">
-            <a:avLst/>
-          </a:prstGeom>
-          <a:noFill/>
-        </p:spPr>
-        <p:txBody>
-          <a:bodyPr wrap="none" lIns="0" rIns="0" tIns="0" bIns="0" anchor="t"/>
-          <a:lstStyle/>
-          <a:p>
-            <a:pPr algn="ctr">
-              <a:lnSpc>
-                <a:spcPts val="1214"/>
+            <a:off x="4656960" y="6461910"/>
+            <a:ext cx="959212" cy="151200"/>
+          </a:xfrm>
+          <a:prstGeom prst="rect">
+            <a:avLst/>
+          </a:prstGeom>
+          <a:noFill/>
+        </p:spPr>
+        <p:txBody>
+          <a:bodyPr wrap="none" lIns="0" rIns="0" tIns="0" bIns="0" anchor="t"/>
+          <a:lstStyle/>
+          <a:p>
+            <a:pPr algn="ctr">
+              <a:lnSpc>
+                <a:spcPts val="1163"/>
               </a:lnSpc>
             </a:pPr>
             <a:r>
@@ -10181,21 +10181,21 @@
         </p:nvSpPr>
         <p:spPr>
           <a:xfrm>
-            <a:off x="6039022" y="6408517"/>
-            <a:ext cx="488083" cy="151200"/>
-          </a:xfrm>
-          <a:prstGeom prst="rect">
-            <a:avLst/>
-          </a:prstGeom>
-          <a:noFill/>
-        </p:spPr>
-        <p:txBody>
-          <a:bodyPr wrap="none" lIns="0" rIns="0" tIns="0" bIns="0" anchor="t"/>
-          <a:lstStyle/>
-          <a:p>
-            <a:pPr algn="ctr">
-              <a:lnSpc>
-                <a:spcPts val="1214"/>
+            <a:off x="5670000" y="6461910"/>
+            <a:ext cx="644716" cy="151200"/>
+          </a:xfrm>
+          <a:prstGeom prst="rect">
+            <a:avLst/>
+          </a:prstGeom>
+          <a:noFill/>
+        </p:spPr>
+        <p:txBody>
+          <a:bodyPr wrap="none" lIns="0" rIns="0" tIns="0" bIns="0" anchor="t"/>
+          <a:lstStyle/>
+          <a:p>
+            <a:pPr algn="ctr">
+              <a:lnSpc>
+                <a:spcPts val="1163"/>
               </a:lnSpc>
             </a:pPr>
             <a:r>
@@ -10218,21 +10218,21 @@
         </p:nvSpPr>
         <p:spPr>
           <a:xfrm>
-            <a:off x="6553693" y="6408517"/>
-            <a:ext cx="488328" cy="151200"/>
-          </a:xfrm>
-          <a:prstGeom prst="rect">
-            <a:avLst/>
-          </a:prstGeom>
-          <a:noFill/>
-        </p:spPr>
-        <p:txBody>
-          <a:bodyPr wrap="none" lIns="0" rIns="0" tIns="0" bIns="0" anchor="t"/>
-          <a:lstStyle/>
-          <a:p>
-            <a:pPr algn="ctr">
-              <a:lnSpc>
-                <a:spcPts val="1214"/>
+            <a:off x="6380640" y="6461910"/>
+            <a:ext cx="644716" cy="151200"/>
+          </a:xfrm>
+          <a:prstGeom prst="rect">
+            <a:avLst/>
+          </a:prstGeom>
+          <a:noFill/>
+        </p:spPr>
+        <p:txBody>
+          <a:bodyPr wrap="none" lIns="0" rIns="0" tIns="0" bIns="0" anchor="t"/>
+          <a:lstStyle/>
+          <a:p>
+            <a:pPr algn="ctr">
+              <a:lnSpc>
+                <a:spcPts val="1163"/>
               </a:lnSpc>
             </a:pPr>
             <a:r>
@@ -10255,8 +10255,8 @@
         </p:nvSpPr>
         <p:spPr>
           <a:xfrm>
-            <a:off x="604800" y="6696388"/>
-            <a:ext cx="2007369" cy="151200"/>
+            <a:off x="604800" y="6756750"/>
+            <a:ext cx="1776902" cy="151200"/>
           </a:xfrm>
           <a:prstGeom prst="rect">
             <a:avLst/>
@@ -10269,7 +10269,7 @@
           <a:p>
             <a:pPr algn="l">
               <a:lnSpc>
-                <a:spcPts val="1062"/>
+                <a:spcPts val="1163"/>
               </a:lnSpc>
             </a:pPr>
             <a:r>
@@ -10292,21 +10292,21 @@
         </p:nvSpPr>
         <p:spPr>
           <a:xfrm>
-            <a:off x="2580322" y="6703357"/>
-            <a:ext cx="1133536" cy="151200"/>
-          </a:xfrm>
-          <a:prstGeom prst="rect">
-            <a:avLst/>
-          </a:prstGeom>
-          <a:noFill/>
-        </p:spPr>
-        <p:txBody>
-          <a:bodyPr wrap="none" lIns="0" rIns="0" tIns="0" bIns="0" anchor="t"/>
-          <a:lstStyle/>
-          <a:p>
-            <a:pPr algn="ctr">
-              <a:lnSpc>
-                <a:spcPts val="1214"/>
+            <a:off x="2404080" y="6756750"/>
+            <a:ext cx="833414" cy="151200"/>
+          </a:xfrm>
+          <a:prstGeom prst="rect">
+            <a:avLst/>
+          </a:prstGeom>
+          <a:noFill/>
+        </p:spPr>
+        <p:txBody>
+          <a:bodyPr wrap="none" lIns="0" rIns="0" tIns="0" bIns="0" anchor="t"/>
+          <a:lstStyle/>
+          <a:p>
+            <a:pPr algn="ctr">
+              <a:lnSpc>
+                <a:spcPts val="1163"/>
               </a:lnSpc>
             </a:pPr>
             <a:r>
@@ -10329,21 +10329,21 @@
         </p:nvSpPr>
         <p:spPr>
           <a:xfrm>
-            <a:off x="3715621" y="6703357"/>
-            <a:ext cx="425061" cy="151200"/>
-          </a:xfrm>
-          <a:prstGeom prst="rect">
-            <a:avLst/>
-          </a:prstGeom>
-          <a:noFill/>
-        </p:spPr>
-        <p:txBody>
-          <a:bodyPr wrap="none" lIns="0" rIns="0" tIns="0" bIns="0" anchor="t"/>
-          <a:lstStyle/>
-          <a:p>
-            <a:pPr algn="ctr">
-              <a:lnSpc>
-                <a:spcPts val="1214"/>
+            <a:off x="3296160" y="6756750"/>
+            <a:ext cx="503193" cy="151200"/>
+          </a:xfrm>
+          <a:prstGeom prst="rect">
+            <a:avLst/>
+          </a:prstGeom>
+          <a:noFill/>
+        </p:spPr>
+        <p:txBody>
+          <a:bodyPr wrap="none" lIns="0" rIns="0" tIns="0" bIns="0" anchor="t"/>
+          <a:lstStyle/>
+          <a:p>
+            <a:pPr algn="ctr">
+              <a:lnSpc>
+                <a:spcPts val="1163"/>
               </a:lnSpc>
             </a:pPr>
             <a:r>
@@ -10366,21 +10366,21 @@
         </p:nvSpPr>
         <p:spPr>
           <a:xfrm>
-            <a:off x="4169694" y="6703357"/>
-            <a:ext cx="676903" cy="151200"/>
-          </a:xfrm>
-          <a:prstGeom prst="rect">
-            <a:avLst/>
-          </a:prstGeom>
-          <a:noFill/>
-        </p:spPr>
-        <p:txBody>
-          <a:bodyPr wrap="none" lIns="0" rIns="0" tIns="0" bIns="0" anchor="t"/>
-          <a:lstStyle/>
-          <a:p>
-            <a:pPr algn="ctr">
-              <a:lnSpc>
-                <a:spcPts val="1214"/>
+            <a:off x="3870720" y="6756750"/>
+            <a:ext cx="723340" cy="151200"/>
+          </a:xfrm>
+          <a:prstGeom prst="rect">
+            <a:avLst/>
+          </a:prstGeom>
+          <a:noFill/>
+        </p:spPr>
+        <p:txBody>
+          <a:bodyPr wrap="none" lIns="0" rIns="0" tIns="0" bIns="0" anchor="t"/>
+          <a:lstStyle/>
+          <a:p>
+            <a:pPr algn="ctr">
+              <a:lnSpc>
+                <a:spcPts val="1163"/>
               </a:lnSpc>
             </a:pPr>
             <a:r>
@@ -10403,21 +10403,21 @@
         </p:nvSpPr>
         <p:spPr>
           <a:xfrm>
-            <a:off x="4865923" y="6703357"/>
-            <a:ext cx="1172848" cy="151200"/>
-          </a:xfrm>
-          <a:prstGeom prst="rect">
-            <a:avLst/>
-          </a:prstGeom>
-          <a:noFill/>
-        </p:spPr>
-        <p:txBody>
-          <a:bodyPr wrap="none" lIns="0" rIns="0" tIns="0" bIns="0" anchor="t"/>
-          <a:lstStyle/>
-          <a:p>
-            <a:pPr algn="ctr">
-              <a:lnSpc>
-                <a:spcPts val="1214"/>
+            <a:off x="4656960" y="6756750"/>
+            <a:ext cx="959212" cy="151200"/>
+          </a:xfrm>
+          <a:prstGeom prst="rect">
+            <a:avLst/>
+          </a:prstGeom>
+          <a:noFill/>
+        </p:spPr>
+        <p:txBody>
+          <a:bodyPr wrap="none" lIns="0" rIns="0" tIns="0" bIns="0" anchor="t"/>
+          <a:lstStyle/>
+          <a:p>
+            <a:pPr algn="ctr">
+              <a:lnSpc>
+                <a:spcPts val="1163"/>
               </a:lnSpc>
             </a:pPr>
             <a:r>
@@ -10440,21 +10440,21 @@
         </p:nvSpPr>
         <p:spPr>
           <a:xfrm>
-            <a:off x="6039022" y="6703357"/>
-            <a:ext cx="488083" cy="151200"/>
-          </a:xfrm>
-          <a:prstGeom prst="rect">
-            <a:avLst/>
-          </a:prstGeom>
-          <a:noFill/>
-        </p:spPr>
-        <p:txBody>
-          <a:bodyPr wrap="none" lIns="0" rIns="0" tIns="0" bIns="0" anchor="t"/>
-          <a:lstStyle/>
-          <a:p>
-            <a:pPr algn="ctr">
-              <a:lnSpc>
-                <a:spcPts val="1214"/>
+            <a:off x="5670000" y="6756750"/>
+            <a:ext cx="644716" cy="151200"/>
+          </a:xfrm>
+          <a:prstGeom prst="rect">
+            <a:avLst/>
+          </a:prstGeom>
+          <a:noFill/>
+        </p:spPr>
+        <p:txBody>
+          <a:bodyPr wrap="none" lIns="0" rIns="0" tIns="0" bIns="0" anchor="t"/>
+          <a:lstStyle/>
+          <a:p>
+            <a:pPr algn="ctr">
+              <a:lnSpc>
+                <a:spcPts val="1163"/>
               </a:lnSpc>
             </a:pPr>
             <a:r>
@@ -10477,21 +10477,21 @@
         </p:nvSpPr>
         <p:spPr>
           <a:xfrm>
-            <a:off x="6553693" y="6703357"/>
-            <a:ext cx="488328" cy="151200"/>
-          </a:xfrm>
-          <a:prstGeom prst="rect">
-            <a:avLst/>
-          </a:prstGeom>
-          <a:noFill/>
-        </p:spPr>
-        <p:txBody>
-          <a:bodyPr wrap="none" lIns="0" rIns="0" tIns="0" bIns="0" anchor="t"/>
-          <a:lstStyle/>
-          <a:p>
-            <a:pPr algn="ctr">
-              <a:lnSpc>
-                <a:spcPts val="1214"/>
+            <a:off x="6380640" y="6756750"/>
+            <a:ext cx="644716" cy="151200"/>
+          </a:xfrm>
+          <a:prstGeom prst="rect">
+            <a:avLst/>
+          </a:prstGeom>
+          <a:noFill/>
+        </p:spPr>
+        <p:txBody>
+          <a:bodyPr wrap="none" lIns="0" rIns="0" tIns="0" bIns="0" anchor="t"/>
+          <a:lstStyle/>
+          <a:p>
+            <a:pPr algn="ctr">
+              <a:lnSpc>
+                <a:spcPts val="1163"/>
               </a:lnSpc>
             </a:pPr>
             <a:r>
@@ -10514,8 +10514,8 @@
         </p:nvSpPr>
         <p:spPr>
           <a:xfrm>
-            <a:off x="604800" y="6991228"/>
-            <a:ext cx="2007369" cy="151200"/>
+            <a:off x="604800" y="7051590"/>
+            <a:ext cx="1776902" cy="151200"/>
           </a:xfrm>
           <a:prstGeom prst="rect">
             <a:avLst/>
@@ -10528,7 +10528,7 @@
           <a:p>
             <a:pPr algn="l">
               <a:lnSpc>
-                <a:spcPts val="1062"/>
+                <a:spcPts val="1163"/>
               </a:lnSpc>
             </a:pPr>
             <a:r>
@@ -10551,21 +10551,21 @@
         </p:nvSpPr>
         <p:spPr>
           <a:xfrm>
-            <a:off x="2580322" y="6998197"/>
-            <a:ext cx="1133536" cy="151200"/>
-          </a:xfrm>
-          <a:prstGeom prst="rect">
-            <a:avLst/>
-          </a:prstGeom>
-          <a:noFill/>
-        </p:spPr>
-        <p:txBody>
-          <a:bodyPr wrap="none" lIns="0" rIns="0" tIns="0" bIns="0" anchor="t"/>
-          <a:lstStyle/>
-          <a:p>
-            <a:pPr algn="ctr">
-              <a:lnSpc>
-                <a:spcPts val="1214"/>
+            <a:off x="2404080" y="7051590"/>
+            <a:ext cx="833414" cy="151200"/>
+          </a:xfrm>
+          <a:prstGeom prst="rect">
+            <a:avLst/>
+          </a:prstGeom>
+          <a:noFill/>
+        </p:spPr>
+        <p:txBody>
+          <a:bodyPr wrap="none" lIns="0" rIns="0" tIns="0" bIns="0" anchor="t"/>
+          <a:lstStyle/>
+          <a:p>
+            <a:pPr algn="ctr">
+              <a:lnSpc>
+                <a:spcPts val="1163"/>
               </a:lnSpc>
             </a:pPr>
             <a:r>
@@ -10588,21 +10588,21 @@
         </p:nvSpPr>
         <p:spPr>
           <a:xfrm>
-            <a:off x="3715621" y="6998197"/>
-            <a:ext cx="425061" cy="151200"/>
-          </a:xfrm>
-          <a:prstGeom prst="rect">
-            <a:avLst/>
-          </a:prstGeom>
-          <a:noFill/>
-        </p:spPr>
-        <p:txBody>
-          <a:bodyPr wrap="none" lIns="0" rIns="0" tIns="0" bIns="0" anchor="t"/>
-          <a:lstStyle/>
-          <a:p>
-            <a:pPr algn="ctr">
-              <a:lnSpc>
-                <a:spcPts val="1214"/>
+            <a:off x="3296160" y="7051590"/>
+            <a:ext cx="503193" cy="151200"/>
+          </a:xfrm>
+          <a:prstGeom prst="rect">
+            <a:avLst/>
+          </a:prstGeom>
+          <a:noFill/>
+        </p:spPr>
+        <p:txBody>
+          <a:bodyPr wrap="none" lIns="0" rIns="0" tIns="0" bIns="0" anchor="t"/>
+          <a:lstStyle/>
+          <a:p>
+            <a:pPr algn="ctr">
+              <a:lnSpc>
+                <a:spcPts val="1163"/>
               </a:lnSpc>
             </a:pPr>
             <a:r>
@@ -10625,21 +10625,21 @@
         </p:nvSpPr>
         <p:spPr>
           <a:xfrm>
-            <a:off x="4169694" y="6998197"/>
-            <a:ext cx="676903" cy="151200"/>
-          </a:xfrm>
-          <a:prstGeom prst="rect">
-            <a:avLst/>
-          </a:prstGeom>
-          <a:noFill/>
-        </p:spPr>
-        <p:txBody>
-          <a:bodyPr wrap="none" lIns="0" rIns="0" tIns="0" bIns="0" anchor="t"/>
-          <a:lstStyle/>
-          <a:p>
-            <a:pPr algn="ctr">
-              <a:lnSpc>
-                <a:spcPts val="1214"/>
+            <a:off x="3870720" y="7051590"/>
+            <a:ext cx="723340" cy="151200"/>
+          </a:xfrm>
+          <a:prstGeom prst="rect">
+            <a:avLst/>
+          </a:prstGeom>
+          <a:noFill/>
+        </p:spPr>
+        <p:txBody>
+          <a:bodyPr wrap="none" lIns="0" rIns="0" tIns="0" bIns="0" anchor="t"/>
+          <a:lstStyle/>
+          <a:p>
+            <a:pPr algn="ctr">
+              <a:lnSpc>
+                <a:spcPts val="1163"/>
               </a:lnSpc>
             </a:pPr>
             <a:r>
@@ -10662,21 +10662,21 @@
         </p:nvSpPr>
         <p:spPr>
           <a:xfrm>
-            <a:off x="4865923" y="6998197"/>
-            <a:ext cx="1172848" cy="151200"/>
-          </a:xfrm>
-          <a:prstGeom prst="rect">
-            <a:avLst/>
-          </a:prstGeom>
-          <a:noFill/>
-        </p:spPr>
-        <p:txBody>
-          <a:bodyPr wrap="none" lIns="0" rIns="0" tIns="0" bIns="0" anchor="t"/>
-          <a:lstStyle/>
-          <a:p>
-            <a:pPr algn="ctr">
-              <a:lnSpc>
-                <a:spcPts val="1214"/>
+            <a:off x="4656960" y="7051590"/>
+            <a:ext cx="959212" cy="151200"/>
+          </a:xfrm>
+          <a:prstGeom prst="rect">
+            <a:avLst/>
+          </a:prstGeom>
+          <a:noFill/>
+        </p:spPr>
+        <p:txBody>
+          <a:bodyPr wrap="none" lIns="0" rIns="0" tIns="0" bIns="0" anchor="t"/>
+          <a:lstStyle/>
+          <a:p>
+            <a:pPr algn="ctr">
+              <a:lnSpc>
+                <a:spcPts val="1163"/>
               </a:lnSpc>
             </a:pPr>
             <a:r>
@@ -10699,21 +10699,21 @@
         </p:nvSpPr>
         <p:spPr>
           <a:xfrm>
-            <a:off x="6039022" y="6998197"/>
-            <a:ext cx="488083" cy="151200"/>
-          </a:xfrm>
-          <a:prstGeom prst="rect">
-            <a:avLst/>
-          </a:prstGeom>
-          <a:noFill/>
-        </p:spPr>
-        <p:txBody>
-          <a:bodyPr wrap="none" lIns="0" rIns="0" tIns="0" bIns="0" anchor="t"/>
-          <a:lstStyle/>
-          <a:p>
-            <a:pPr algn="ctr">
-              <a:lnSpc>
-                <a:spcPts val="1214"/>
+            <a:off x="5670000" y="7051590"/>
+            <a:ext cx="644716" cy="151200"/>
+          </a:xfrm>
+          <a:prstGeom prst="rect">
+            <a:avLst/>
+          </a:prstGeom>
+          <a:noFill/>
+        </p:spPr>
+        <p:txBody>
+          <a:bodyPr wrap="none" lIns="0" rIns="0" tIns="0" bIns="0" anchor="t"/>
+          <a:lstStyle/>
+          <a:p>
+            <a:pPr algn="ctr">
+              <a:lnSpc>
+                <a:spcPts val="1163"/>
               </a:lnSpc>
             </a:pPr>
             <a:r>
@@ -10736,21 +10736,21 @@
         </p:nvSpPr>
         <p:spPr>
           <a:xfrm>
-            <a:off x="6553693" y="6998197"/>
-            <a:ext cx="488328" cy="151200"/>
-          </a:xfrm>
-          <a:prstGeom prst="rect">
-            <a:avLst/>
-          </a:prstGeom>
-          <a:noFill/>
-        </p:spPr>
-        <p:txBody>
-          <a:bodyPr wrap="none" lIns="0" rIns="0" tIns="0" bIns="0" anchor="t"/>
-          <a:lstStyle/>
-          <a:p>
-            <a:pPr algn="ctr">
-              <a:lnSpc>
-                <a:spcPts val="1214"/>
+            <a:off x="6380640" y="7051590"/>
+            <a:ext cx="644716" cy="151200"/>
+          </a:xfrm>
+          <a:prstGeom prst="rect">
+            <a:avLst/>
+          </a:prstGeom>
+          <a:noFill/>
+        </p:spPr>
+        <p:txBody>
+          <a:bodyPr wrap="none" lIns="0" rIns="0" tIns="0" bIns="0" anchor="t"/>
+          <a:lstStyle/>
+          <a:p>
+            <a:pPr algn="ctr">
+              <a:lnSpc>
+                <a:spcPts val="1163"/>
               </a:lnSpc>
             </a:pPr>
             <a:r>
@@ -10773,8 +10773,8 @@
         </p:nvSpPr>
         <p:spPr>
           <a:xfrm>
-            <a:off x="604800" y="7221217"/>
-            <a:ext cx="1930162" cy="286098"/>
+            <a:off x="604800" y="7288076"/>
+            <a:ext cx="1708560" cy="298974"/>
           </a:xfrm>
           <a:prstGeom prst="rect">
             <a:avLst/>
@@ -10787,7 +10787,7 @@
           <a:p>
             <a:pPr algn="l">
               <a:lnSpc>
-                <a:spcPts val="1062"/>
+                <a:spcPts val="1163"/>
               </a:lnSpc>
             </a:pPr>
             <a:r>
@@ -10810,21 +10810,21 @@
         </p:nvSpPr>
         <p:spPr>
           <a:xfrm>
-            <a:off x="2580322" y="7295636"/>
-            <a:ext cx="1133536" cy="151200"/>
-          </a:xfrm>
-          <a:prstGeom prst="rect">
-            <a:avLst/>
-          </a:prstGeom>
-          <a:noFill/>
-        </p:spPr>
-        <p:txBody>
-          <a:bodyPr wrap="none" lIns="0" rIns="0" tIns="0" bIns="0" anchor="t"/>
-          <a:lstStyle/>
-          <a:p>
-            <a:pPr algn="ctr">
-              <a:lnSpc>
-                <a:spcPts val="1214"/>
+            <a:off x="2404080" y="7361904"/>
+            <a:ext cx="833414" cy="151200"/>
+          </a:xfrm>
+          <a:prstGeom prst="rect">
+            <a:avLst/>
+          </a:prstGeom>
+          <a:noFill/>
+        </p:spPr>
+        <p:txBody>
+          <a:bodyPr wrap="none" lIns="0" rIns="0" tIns="0" bIns="0" anchor="t"/>
+          <a:lstStyle/>
+          <a:p>
+            <a:pPr algn="ctr">
+              <a:lnSpc>
+                <a:spcPts val="1163"/>
               </a:lnSpc>
             </a:pPr>
             <a:r>
@@ -10847,21 +10847,21 @@
         </p:nvSpPr>
         <p:spPr>
           <a:xfrm>
-            <a:off x="3715621" y="7295636"/>
-            <a:ext cx="425061" cy="151200"/>
-          </a:xfrm>
-          <a:prstGeom prst="rect">
-            <a:avLst/>
-          </a:prstGeom>
-          <a:noFill/>
-        </p:spPr>
-        <p:txBody>
-          <a:bodyPr wrap="none" lIns="0" rIns="0" tIns="0" bIns="0" anchor="t"/>
-          <a:lstStyle/>
-          <a:p>
-            <a:pPr algn="ctr">
-              <a:lnSpc>
-                <a:spcPts val="1214"/>
+            <a:off x="3296160" y="7361904"/>
+            <a:ext cx="503193" cy="151200"/>
+          </a:xfrm>
+          <a:prstGeom prst="rect">
+            <a:avLst/>
+          </a:prstGeom>
+          <a:noFill/>
+        </p:spPr>
+        <p:txBody>
+          <a:bodyPr wrap="none" lIns="0" rIns="0" tIns="0" bIns="0" anchor="t"/>
+          <a:lstStyle/>
+          <a:p>
+            <a:pPr algn="ctr">
+              <a:lnSpc>
+                <a:spcPts val="1163"/>
               </a:lnSpc>
             </a:pPr>
             <a:r>
@@ -10884,21 +10884,21 @@
         </p:nvSpPr>
         <p:spPr>
           <a:xfrm>
-            <a:off x="4169694" y="7295636"/>
-            <a:ext cx="676903" cy="151200"/>
-          </a:xfrm>
-          <a:prstGeom prst="rect">
-            <a:avLst/>
-          </a:prstGeom>
-          <a:noFill/>
-        </p:spPr>
-        <p:txBody>
-          <a:bodyPr wrap="none" lIns="0" rIns="0" tIns="0" bIns="0" anchor="t"/>
-          <a:lstStyle/>
-          <a:p>
-            <a:pPr algn="ctr">
-              <a:lnSpc>
-                <a:spcPts val="1214"/>
+            <a:off x="3870720" y="7361904"/>
+            <a:ext cx="723340" cy="151200"/>
+          </a:xfrm>
+          <a:prstGeom prst="rect">
+            <a:avLst/>
+          </a:prstGeom>
+          <a:noFill/>
+        </p:spPr>
+        <p:txBody>
+          <a:bodyPr wrap="none" lIns="0" rIns="0" tIns="0" bIns="0" anchor="t"/>
+          <a:lstStyle/>
+          <a:p>
+            <a:pPr algn="ctr">
+              <a:lnSpc>
+                <a:spcPts val="1163"/>
               </a:lnSpc>
             </a:pPr>
             <a:r>
@@ -10921,21 +10921,21 @@
         </p:nvSpPr>
         <p:spPr>
           <a:xfrm>
-            <a:off x="4865923" y="7295636"/>
-            <a:ext cx="1172848" cy="151200"/>
-          </a:xfrm>
-          <a:prstGeom prst="rect">
-            <a:avLst/>
-          </a:prstGeom>
-          <a:noFill/>
-        </p:spPr>
-        <p:txBody>
-          <a:bodyPr wrap="none" lIns="0" rIns="0" tIns="0" bIns="0" anchor="t"/>
-          <a:lstStyle/>
-          <a:p>
-            <a:pPr algn="ctr">
-              <a:lnSpc>
-                <a:spcPts val="1214"/>
+            <a:off x="4656960" y="7361904"/>
+            <a:ext cx="959212" cy="151200"/>
+          </a:xfrm>
+          <a:prstGeom prst="rect">
+            <a:avLst/>
+          </a:prstGeom>
+          <a:noFill/>
+        </p:spPr>
+        <p:txBody>
+          <a:bodyPr wrap="none" lIns="0" rIns="0" tIns="0" bIns="0" anchor="t"/>
+          <a:lstStyle/>
+          <a:p>
+            <a:pPr algn="ctr">
+              <a:lnSpc>
+                <a:spcPts val="1163"/>
               </a:lnSpc>
             </a:pPr>
             <a:r>
@@ -10958,21 +10958,21 @@
         </p:nvSpPr>
         <p:spPr>
           <a:xfrm>
-            <a:off x="6039022" y="7295636"/>
-            <a:ext cx="488083" cy="151200"/>
-          </a:xfrm>
-          <a:prstGeom prst="rect">
-            <a:avLst/>
-          </a:prstGeom>
-          <a:noFill/>
-        </p:spPr>
-        <p:txBody>
-          <a:bodyPr wrap="none" lIns="0" rIns="0" tIns="0" bIns="0" anchor="t"/>
-          <a:lstStyle/>
-          <a:p>
-            <a:pPr algn="ctr">
-              <a:lnSpc>
-                <a:spcPts val="1214"/>
+            <a:off x="5670000" y="7361904"/>
+            <a:ext cx="644716" cy="151200"/>
+          </a:xfrm>
+          <a:prstGeom prst="rect">
+            <a:avLst/>
+          </a:prstGeom>
+          <a:noFill/>
+        </p:spPr>
+        <p:txBody>
+          <a:bodyPr wrap="none" lIns="0" rIns="0" tIns="0" bIns="0" anchor="t"/>
+          <a:lstStyle/>
+          <a:p>
+            <a:pPr algn="ctr">
+              <a:lnSpc>
+                <a:spcPts val="1163"/>
               </a:lnSpc>
             </a:pPr>
             <a:r>
@@ -10995,21 +10995,21 @@
         </p:nvSpPr>
         <p:spPr>
           <a:xfrm>
-            <a:off x="6553693" y="7295636"/>
-            <a:ext cx="488328" cy="151200"/>
-          </a:xfrm>
-          <a:prstGeom prst="rect">
-            <a:avLst/>
-          </a:prstGeom>
-          <a:noFill/>
-        </p:spPr>
-        <p:txBody>
-          <a:bodyPr wrap="none" lIns="0" rIns="0" tIns="0" bIns="0" anchor="t"/>
-          <a:lstStyle/>
-          <a:p>
-            <a:pPr algn="ctr">
-              <a:lnSpc>
-                <a:spcPts val="1214"/>
+            <a:off x="6380640" y="7361904"/>
+            <a:ext cx="644716" cy="151200"/>
+          </a:xfrm>
+          <a:prstGeom prst="rect">
+            <a:avLst/>
+          </a:prstGeom>
+          <a:noFill/>
+        </p:spPr>
+        <p:txBody>
+          <a:bodyPr wrap="none" lIns="0" rIns="0" tIns="0" bIns="0" anchor="t"/>
+          <a:lstStyle/>
+          <a:p>
+            <a:pPr algn="ctr">
+              <a:lnSpc>
+                <a:spcPts val="1163"/>
               </a:lnSpc>
             </a:pPr>
             <a:r>
@@ -11032,8 +11032,8 @@
         </p:nvSpPr>
         <p:spPr>
           <a:xfrm>
-            <a:off x="604800" y="7586105"/>
-            <a:ext cx="2007369" cy="151200"/>
+            <a:off x="604800" y="7672218"/>
+            <a:ext cx="1776902" cy="151200"/>
           </a:xfrm>
           <a:prstGeom prst="rect">
             <a:avLst/>
@@ -11046,7 +11046,7 @@
           <a:p>
             <a:pPr algn="l">
               <a:lnSpc>
-                <a:spcPts val="1062"/>
+                <a:spcPts val="1163"/>
               </a:lnSpc>
             </a:pPr>
             <a:r>
@@ -11069,21 +11069,21 @@
         </p:nvSpPr>
         <p:spPr>
           <a:xfrm>
-            <a:off x="2580322" y="7593075"/>
-            <a:ext cx="1133536" cy="151200"/>
-          </a:xfrm>
-          <a:prstGeom prst="rect">
-            <a:avLst/>
-          </a:prstGeom>
-          <a:noFill/>
-        </p:spPr>
-        <p:txBody>
-          <a:bodyPr wrap="none" lIns="0" rIns="0" tIns="0" bIns="0" anchor="t"/>
-          <a:lstStyle/>
-          <a:p>
-            <a:pPr algn="ctr">
-              <a:lnSpc>
-                <a:spcPts val="1214"/>
+            <a:off x="2404080" y="7672218"/>
+            <a:ext cx="833414" cy="151200"/>
+          </a:xfrm>
+          <a:prstGeom prst="rect">
+            <a:avLst/>
+          </a:prstGeom>
+          <a:noFill/>
+        </p:spPr>
+        <p:txBody>
+          <a:bodyPr wrap="none" lIns="0" rIns="0" tIns="0" bIns="0" anchor="t"/>
+          <a:lstStyle/>
+          <a:p>
+            <a:pPr algn="ctr">
+              <a:lnSpc>
+                <a:spcPts val="1163"/>
               </a:lnSpc>
             </a:pPr>
             <a:r>
@@ -11106,21 +11106,21 @@
         </p:nvSpPr>
         <p:spPr>
           <a:xfrm>
-            <a:off x="3715621" y="7593075"/>
-            <a:ext cx="425061" cy="151200"/>
-          </a:xfrm>
-          <a:prstGeom prst="rect">
-            <a:avLst/>
-          </a:prstGeom>
-          <a:noFill/>
-        </p:spPr>
-        <p:txBody>
-          <a:bodyPr wrap="none" lIns="0" rIns="0" tIns="0" bIns="0" anchor="t"/>
-          <a:lstStyle/>
-          <a:p>
-            <a:pPr algn="ctr">
-              <a:lnSpc>
-                <a:spcPts val="1214"/>
+            <a:off x="3296160" y="7672218"/>
+            <a:ext cx="503193" cy="151200"/>
+          </a:xfrm>
+          <a:prstGeom prst="rect">
+            <a:avLst/>
+          </a:prstGeom>
+          <a:noFill/>
+        </p:spPr>
+        <p:txBody>
+          <a:bodyPr wrap="none" lIns="0" rIns="0" tIns="0" bIns="0" anchor="t"/>
+          <a:lstStyle/>
+          <a:p>
+            <a:pPr algn="ctr">
+              <a:lnSpc>
+                <a:spcPts val="1163"/>
               </a:lnSpc>
             </a:pPr>
             <a:r>
@@ -11143,21 +11143,21 @@
         </p:nvSpPr>
         <p:spPr>
           <a:xfrm>
-            <a:off x="4169694" y="7593075"/>
-            <a:ext cx="676903" cy="151200"/>
-          </a:xfrm>
-          <a:prstGeom prst="rect">
-            <a:avLst/>
-          </a:prstGeom>
-          <a:noFill/>
-        </p:spPr>
-        <p:txBody>
-          <a:bodyPr wrap="none" lIns="0" rIns="0" tIns="0" bIns="0" anchor="t"/>
-          <a:lstStyle/>
-          <a:p>
-            <a:pPr algn="ctr">
-              <a:lnSpc>
-                <a:spcPts val="1214"/>
+            <a:off x="3870720" y="7672218"/>
+            <a:ext cx="723340" cy="151200"/>
+          </a:xfrm>
+          <a:prstGeom prst="rect">
+            <a:avLst/>
+          </a:prstGeom>
+          <a:noFill/>
+        </p:spPr>
+        <p:txBody>
+          <a:bodyPr wrap="none" lIns="0" rIns="0" tIns="0" bIns="0" anchor="t"/>
+          <a:lstStyle/>
+          <a:p>
+            <a:pPr algn="ctr">
+              <a:lnSpc>
+                <a:spcPts val="1163"/>
               </a:lnSpc>
             </a:pPr>
             <a:r>
@@ -11180,21 +11180,21 @@
         </p:nvSpPr>
         <p:spPr>
           <a:xfrm>
-            <a:off x="4865923" y="7593075"/>
-            <a:ext cx="1172848" cy="151200"/>
-          </a:xfrm>
-          <a:prstGeom prst="rect">
-            <a:avLst/>
-          </a:prstGeom>
-          <a:noFill/>
-        </p:spPr>
-        <p:txBody>
-          <a:bodyPr wrap="none" lIns="0" rIns="0" tIns="0" bIns="0" anchor="t"/>
-          <a:lstStyle/>
-          <a:p>
-            <a:pPr algn="ctr">
-              <a:lnSpc>
-                <a:spcPts val="1214"/>
+            <a:off x="4656960" y="7672218"/>
+            <a:ext cx="959212" cy="151200"/>
+          </a:xfrm>
+          <a:prstGeom prst="rect">
+            <a:avLst/>
+          </a:prstGeom>
+          <a:noFill/>
+        </p:spPr>
+        <p:txBody>
+          <a:bodyPr wrap="none" lIns="0" rIns="0" tIns="0" bIns="0" anchor="t"/>
+          <a:lstStyle/>
+          <a:p>
+            <a:pPr algn="ctr">
+              <a:lnSpc>
+                <a:spcPts val="1163"/>
               </a:lnSpc>
             </a:pPr>
             <a:r>
@@ -11217,21 +11217,21 @@
         </p:nvSpPr>
         <p:spPr>
           <a:xfrm>
-            <a:off x="6039022" y="7593075"/>
-            <a:ext cx="488083" cy="151200"/>
-          </a:xfrm>
-          <a:prstGeom prst="rect">
-            <a:avLst/>
-          </a:prstGeom>
-          <a:noFill/>
-        </p:spPr>
-        <p:txBody>
-          <a:bodyPr wrap="none" lIns="0" rIns="0" tIns="0" bIns="0" anchor="t"/>
-          <a:lstStyle/>
-          <a:p>
-            <a:pPr algn="ctr">
-              <a:lnSpc>
-                <a:spcPts val="1214"/>
+            <a:off x="5670000" y="7672218"/>
+            <a:ext cx="644716" cy="151200"/>
+          </a:xfrm>
+          <a:prstGeom prst="rect">
+            <a:avLst/>
+          </a:prstGeom>
+          <a:noFill/>
+        </p:spPr>
+        <p:txBody>
+          <a:bodyPr wrap="none" lIns="0" rIns="0" tIns="0" bIns="0" anchor="t"/>
+          <a:lstStyle/>
+          <a:p>
+            <a:pPr algn="ctr">
+              <a:lnSpc>
+                <a:spcPts val="1163"/>
               </a:lnSpc>
             </a:pPr>
             <a:r>
@@ -11254,21 +11254,21 @@
         </p:nvSpPr>
         <p:spPr>
           <a:xfrm>
-            <a:off x="6553693" y="7593075"/>
-            <a:ext cx="488328" cy="151200"/>
-          </a:xfrm>
-          <a:prstGeom prst="rect">
-            <a:avLst/>
-          </a:prstGeom>
-          <a:noFill/>
-        </p:spPr>
-        <p:txBody>
-          <a:bodyPr wrap="none" lIns="0" rIns="0" tIns="0" bIns="0" anchor="t"/>
-          <a:lstStyle/>
-          <a:p>
-            <a:pPr algn="ctr">
-              <a:lnSpc>
-                <a:spcPts val="1214"/>
+            <a:off x="6380640" y="7672218"/>
+            <a:ext cx="644716" cy="151200"/>
+          </a:xfrm>
+          <a:prstGeom prst="rect">
+            <a:avLst/>
+          </a:prstGeom>
+          <a:noFill/>
+        </p:spPr>
+        <p:txBody>
+          <a:bodyPr wrap="none" lIns="0" rIns="0" tIns="0" bIns="0" anchor="t"/>
+          <a:lstStyle/>
+          <a:p>
+            <a:pPr algn="ctr">
+              <a:lnSpc>
+                <a:spcPts val="1163"/>
               </a:lnSpc>
             </a:pPr>
             <a:r>
@@ -11291,8 +11291,8 @@
         </p:nvSpPr>
         <p:spPr>
           <a:xfrm>
-            <a:off x="604800" y="7816095"/>
-            <a:ext cx="1930162" cy="286098"/>
+            <a:off x="604800" y="7908705"/>
+            <a:ext cx="1708560" cy="298974"/>
           </a:xfrm>
           <a:prstGeom prst="rect">
             <a:avLst/>
@@ -11305,7 +11305,7 @@
           <a:p>
             <a:pPr algn="l">
               <a:lnSpc>
-                <a:spcPts val="1062"/>
+                <a:spcPts val="1163"/>
               </a:lnSpc>
             </a:pPr>
             <a:r>
@@ -11328,21 +11328,21 @@
         </p:nvSpPr>
         <p:spPr>
           <a:xfrm>
-            <a:off x="2580322" y="7890513"/>
-            <a:ext cx="1133536" cy="151200"/>
-          </a:xfrm>
-          <a:prstGeom prst="rect">
-            <a:avLst/>
-          </a:prstGeom>
-          <a:noFill/>
-        </p:spPr>
-        <p:txBody>
-          <a:bodyPr wrap="none" lIns="0" rIns="0" tIns="0" bIns="0" anchor="t"/>
-          <a:lstStyle/>
-          <a:p>
-            <a:pPr algn="ctr">
-              <a:lnSpc>
-                <a:spcPts val="1214"/>
+            <a:off x="2404080" y="7982533"/>
+            <a:ext cx="833414" cy="151200"/>
+          </a:xfrm>
+          <a:prstGeom prst="rect">
+            <a:avLst/>
+          </a:prstGeom>
+          <a:noFill/>
+        </p:spPr>
+        <p:txBody>
+          <a:bodyPr wrap="none" lIns="0" rIns="0" tIns="0" bIns="0" anchor="t"/>
+          <a:lstStyle/>
+          <a:p>
+            <a:pPr algn="ctr">
+              <a:lnSpc>
+                <a:spcPts val="1163"/>
               </a:lnSpc>
             </a:pPr>
             <a:r>
@@ -11365,21 +11365,21 @@
         </p:nvSpPr>
         <p:spPr>
           <a:xfrm>
-            <a:off x="3715621" y="7890513"/>
-            <a:ext cx="425061" cy="151200"/>
-          </a:xfrm>
-          <a:prstGeom prst="rect">
-            <a:avLst/>
-          </a:prstGeom>
-          <a:noFill/>
-        </p:spPr>
-        <p:txBody>
-          <a:bodyPr wrap="none" lIns="0" rIns="0" tIns="0" bIns="0" anchor="t"/>
-          <a:lstStyle/>
-          <a:p>
-            <a:pPr algn="ctr">
-              <a:lnSpc>
-                <a:spcPts val="1214"/>
+            <a:off x="3296160" y="7982533"/>
+            <a:ext cx="503193" cy="151200"/>
+          </a:xfrm>
+          <a:prstGeom prst="rect">
+            <a:avLst/>
+          </a:prstGeom>
+          <a:noFill/>
+        </p:spPr>
+        <p:txBody>
+          <a:bodyPr wrap="none" lIns="0" rIns="0" tIns="0" bIns="0" anchor="t"/>
+          <a:lstStyle/>
+          <a:p>
+            <a:pPr algn="ctr">
+              <a:lnSpc>
+                <a:spcPts val="1163"/>
               </a:lnSpc>
             </a:pPr>
             <a:r>
@@ -11402,21 +11402,21 @@
         </p:nvSpPr>
         <p:spPr>
           <a:xfrm>
-            <a:off x="4169694" y="7890513"/>
-            <a:ext cx="676903" cy="151200"/>
-          </a:xfrm>
-          <a:prstGeom prst="rect">
-            <a:avLst/>
-          </a:prstGeom>
-          <a:noFill/>
-        </p:spPr>
-        <p:txBody>
-          <a:bodyPr wrap="none" lIns="0" rIns="0" tIns="0" bIns="0" anchor="t"/>
-          <a:lstStyle/>
-          <a:p>
-            <a:pPr algn="ctr">
-              <a:lnSpc>
-                <a:spcPts val="1214"/>
+            <a:off x="3870720" y="7982533"/>
+            <a:ext cx="723340" cy="151200"/>
+          </a:xfrm>
+          <a:prstGeom prst="rect">
+            <a:avLst/>
+          </a:prstGeom>
+          <a:noFill/>
+        </p:spPr>
+        <p:txBody>
+          <a:bodyPr wrap="none" lIns="0" rIns="0" tIns="0" bIns="0" anchor="t"/>
+          <a:lstStyle/>
+          <a:p>
+            <a:pPr algn="ctr">
+              <a:lnSpc>
+                <a:spcPts val="1163"/>
               </a:lnSpc>
             </a:pPr>
             <a:r>
@@ -11439,21 +11439,21 @@
         </p:nvSpPr>
         <p:spPr>
           <a:xfrm>
-            <a:off x="4865923" y="7890513"/>
-            <a:ext cx="1172848" cy="151200"/>
-          </a:xfrm>
-          <a:prstGeom prst="rect">
-            <a:avLst/>
-          </a:prstGeom>
-          <a:noFill/>
-        </p:spPr>
-        <p:txBody>
-          <a:bodyPr wrap="none" lIns="0" rIns="0" tIns="0" bIns="0" anchor="t"/>
-          <a:lstStyle/>
-          <a:p>
-            <a:pPr algn="ctr">
-              <a:lnSpc>
-                <a:spcPts val="1214"/>
+            <a:off x="4656960" y="7982533"/>
+            <a:ext cx="959212" cy="151200"/>
+          </a:xfrm>
+          <a:prstGeom prst="rect">
+            <a:avLst/>
+          </a:prstGeom>
+          <a:noFill/>
+        </p:spPr>
+        <p:txBody>
+          <a:bodyPr wrap="none" lIns="0" rIns="0" tIns="0" bIns="0" anchor="t"/>
+          <a:lstStyle/>
+          <a:p>
+            <a:pPr algn="ctr">
+              <a:lnSpc>
+                <a:spcPts val="1163"/>
               </a:lnSpc>
             </a:pPr>
             <a:r>
@@ -11476,21 +11476,21 @@
         </p:nvSpPr>
         <p:spPr>
           <a:xfrm>
-            <a:off x="6039022" y="7890513"/>
-            <a:ext cx="488083" cy="151200"/>
-          </a:xfrm>
-          <a:prstGeom prst="rect">
-            <a:avLst/>
-          </a:prstGeom>
-          <a:noFill/>
-        </p:spPr>
-        <p:txBody>
-          <a:bodyPr wrap="none" lIns="0" rIns="0" tIns="0" bIns="0" anchor="t"/>
-          <a:lstStyle/>
-          <a:p>
-            <a:pPr algn="ctr">
-              <a:lnSpc>
-                <a:spcPts val="1214"/>
+            <a:off x="5670000" y="7982533"/>
+            <a:ext cx="644716" cy="151200"/>
+          </a:xfrm>
+          <a:prstGeom prst="rect">
+            <a:avLst/>
+          </a:prstGeom>
+          <a:noFill/>
+        </p:spPr>
+        <p:txBody>
+          <a:bodyPr wrap="none" lIns="0" rIns="0" tIns="0" bIns="0" anchor="t"/>
+          <a:lstStyle/>
+          <a:p>
+            <a:pPr algn="ctr">
+              <a:lnSpc>
+                <a:spcPts val="1163"/>
               </a:lnSpc>
             </a:pPr>
             <a:r>
@@ -11513,21 +11513,21 @@
         </p:nvSpPr>
         <p:spPr>
           <a:xfrm>
-            <a:off x="6553693" y="7890513"/>
-            <a:ext cx="488328" cy="151200"/>
-          </a:xfrm>
-          <a:prstGeom prst="rect">
-            <a:avLst/>
-          </a:prstGeom>
-          <a:noFill/>
-        </p:spPr>
-        <p:txBody>
-          <a:bodyPr wrap="none" lIns="0" rIns="0" tIns="0" bIns="0" anchor="t"/>
-          <a:lstStyle/>
-          <a:p>
-            <a:pPr algn="ctr">
-              <a:lnSpc>
-                <a:spcPts val="1214"/>
+            <a:off x="6380640" y="7982533"/>
+            <a:ext cx="644716" cy="151200"/>
+          </a:xfrm>
+          <a:prstGeom prst="rect">
+            <a:avLst/>
+          </a:prstGeom>
+          <a:noFill/>
+        </p:spPr>
+        <p:txBody>
+          <a:bodyPr wrap="none" lIns="0" rIns="0" tIns="0" bIns="0" anchor="t"/>
+          <a:lstStyle/>
+          <a:p>
+            <a:pPr algn="ctr">
+              <a:lnSpc>
+                <a:spcPts val="1163"/>
               </a:lnSpc>
             </a:pPr>
             <a:r>
@@ -11550,8 +11550,8 @@
         </p:nvSpPr>
         <p:spPr>
           <a:xfrm>
-            <a:off x="604800" y="8180983"/>
-            <a:ext cx="2007369" cy="151200"/>
+            <a:off x="604800" y="8292847"/>
+            <a:ext cx="1776902" cy="151200"/>
           </a:xfrm>
           <a:prstGeom prst="rect">
             <a:avLst/>
@@ -11564,7 +11564,7 @@
           <a:p>
             <a:pPr algn="l">
               <a:lnSpc>
-                <a:spcPts val="1062"/>
+                <a:spcPts val="1163"/>
               </a:lnSpc>
             </a:pPr>
             <a:r>
@@ -11587,21 +11587,21 @@
         </p:nvSpPr>
         <p:spPr>
           <a:xfrm>
-            <a:off x="2580322" y="8187952"/>
-            <a:ext cx="1133536" cy="151200"/>
-          </a:xfrm>
-          <a:prstGeom prst="rect">
-            <a:avLst/>
-          </a:prstGeom>
-          <a:noFill/>
-        </p:spPr>
-        <p:txBody>
-          <a:bodyPr wrap="none" lIns="0" rIns="0" tIns="0" bIns="0" anchor="t"/>
-          <a:lstStyle/>
-          <a:p>
-            <a:pPr algn="ctr">
-              <a:lnSpc>
-                <a:spcPts val="1214"/>
+            <a:off x="2404080" y="8292847"/>
+            <a:ext cx="833414" cy="151200"/>
+          </a:xfrm>
+          <a:prstGeom prst="rect">
+            <a:avLst/>
+          </a:prstGeom>
+          <a:noFill/>
+        </p:spPr>
+        <p:txBody>
+          <a:bodyPr wrap="none" lIns="0" rIns="0" tIns="0" bIns="0" anchor="t"/>
+          <a:lstStyle/>
+          <a:p>
+            <a:pPr algn="ctr">
+              <a:lnSpc>
+                <a:spcPts val="1163"/>
               </a:lnSpc>
             </a:pPr>
             <a:r>
@@ -11624,21 +11624,21 @@
         </p:nvSpPr>
         <p:spPr>
           <a:xfrm>
-            <a:off x="3715621" y="8187952"/>
-            <a:ext cx="425061" cy="151200"/>
-          </a:xfrm>
-          <a:prstGeom prst="rect">
-            <a:avLst/>
-          </a:prstGeom>
-          <a:noFill/>
-        </p:spPr>
-        <p:txBody>
-          <a:bodyPr wrap="none" lIns="0" rIns="0" tIns="0" bIns="0" anchor="t"/>
-          <a:lstStyle/>
-          <a:p>
-            <a:pPr algn="ctr">
-              <a:lnSpc>
-                <a:spcPts val="1214"/>
+            <a:off x="3296160" y="8292847"/>
+            <a:ext cx="503193" cy="151200"/>
+          </a:xfrm>
+          <a:prstGeom prst="rect">
+            <a:avLst/>
+          </a:prstGeom>
+          <a:noFill/>
+        </p:spPr>
+        <p:txBody>
+          <a:bodyPr wrap="none" lIns="0" rIns="0" tIns="0" bIns="0" anchor="t"/>
+          <a:lstStyle/>
+          <a:p>
+            <a:pPr algn="ctr">
+              <a:lnSpc>
+                <a:spcPts val="1163"/>
               </a:lnSpc>
             </a:pPr>
             <a:r>
@@ -11661,21 +11661,21 @@
         </p:nvSpPr>
         <p:spPr>
           <a:xfrm>
-            <a:off x="4169694" y="8187952"/>
-            <a:ext cx="676903" cy="151200"/>
-          </a:xfrm>
-          <a:prstGeom prst="rect">
-            <a:avLst/>
-          </a:prstGeom>
-          <a:noFill/>
-        </p:spPr>
-        <p:txBody>
-          <a:bodyPr wrap="none" lIns="0" rIns="0" tIns="0" bIns="0" anchor="t"/>
-          <a:lstStyle/>
-          <a:p>
-            <a:pPr algn="ctr">
-              <a:lnSpc>
-                <a:spcPts val="1214"/>
+            <a:off x="3870720" y="8292847"/>
+            <a:ext cx="723340" cy="151200"/>
+          </a:xfrm>
+          <a:prstGeom prst="rect">
+            <a:avLst/>
+          </a:prstGeom>
+          <a:noFill/>
+        </p:spPr>
+        <p:txBody>
+          <a:bodyPr wrap="none" lIns="0" rIns="0" tIns="0" bIns="0" anchor="t"/>
+          <a:lstStyle/>
+          <a:p>
+            <a:pPr algn="ctr">
+              <a:lnSpc>
+                <a:spcPts val="1163"/>
               </a:lnSpc>
             </a:pPr>
             <a:r>
@@ -11698,21 +11698,21 @@
         </p:nvSpPr>
         <p:spPr>
           <a:xfrm>
-            <a:off x="4865923" y="8187952"/>
-            <a:ext cx="1172848" cy="151200"/>
-          </a:xfrm>
-          <a:prstGeom prst="rect">
-            <a:avLst/>
-          </a:prstGeom>
-          <a:noFill/>
-        </p:spPr>
-        <p:txBody>
-          <a:bodyPr wrap="none" lIns="0" rIns="0" tIns="0" bIns="0" anchor="t"/>
-          <a:lstStyle/>
-          <a:p>
-            <a:pPr algn="ctr">
-              <a:lnSpc>
-                <a:spcPts val="1214"/>
+            <a:off x="4656960" y="8292847"/>
+            <a:ext cx="959212" cy="151200"/>
+          </a:xfrm>
+          <a:prstGeom prst="rect">
+            <a:avLst/>
+          </a:prstGeom>
+          <a:noFill/>
+        </p:spPr>
+        <p:txBody>
+          <a:bodyPr wrap="none" lIns="0" rIns="0" tIns="0" bIns="0" anchor="t"/>
+          <a:lstStyle/>
+          <a:p>
+            <a:pPr algn="ctr">
+              <a:lnSpc>
+                <a:spcPts val="1163"/>
               </a:lnSpc>
             </a:pPr>
             <a:r>
@@ -11735,21 +11735,21 @@
         </p:nvSpPr>
         <p:spPr>
           <a:xfrm>
-            <a:off x="6039022" y="8187952"/>
-            <a:ext cx="488083" cy="151200"/>
-          </a:xfrm>
-          <a:prstGeom prst="rect">
-            <a:avLst/>
-          </a:prstGeom>
-          <a:noFill/>
-        </p:spPr>
-        <p:txBody>
-          <a:bodyPr wrap="none" lIns="0" rIns="0" tIns="0" bIns="0" anchor="t"/>
-          <a:lstStyle/>
-          <a:p>
-            <a:pPr algn="ctr">
-              <a:lnSpc>
-                <a:spcPts val="1214"/>
+            <a:off x="5670000" y="8292847"/>
+            <a:ext cx="644716" cy="151200"/>
+          </a:xfrm>
+          <a:prstGeom prst="rect">
+            <a:avLst/>
+          </a:prstGeom>
+          <a:noFill/>
+        </p:spPr>
+        <p:txBody>
+          <a:bodyPr wrap="none" lIns="0" rIns="0" tIns="0" bIns="0" anchor="t"/>
+          <a:lstStyle/>
+          <a:p>
+            <a:pPr algn="ctr">
+              <a:lnSpc>
+                <a:spcPts val="1163"/>
               </a:lnSpc>
             </a:pPr>
             <a:r>
@@ -11772,21 +11772,21 @@
         </p:nvSpPr>
         <p:spPr>
           <a:xfrm>
-            <a:off x="6553693" y="8187952"/>
-            <a:ext cx="488328" cy="151200"/>
-          </a:xfrm>
-          <a:prstGeom prst="rect">
-            <a:avLst/>
-          </a:prstGeom>
-          <a:noFill/>
-        </p:spPr>
-        <p:txBody>
-          <a:bodyPr wrap="none" lIns="0" rIns="0" tIns="0" bIns="0" anchor="t"/>
-          <a:lstStyle/>
-          <a:p>
-            <a:pPr algn="ctr">
-              <a:lnSpc>
-                <a:spcPts val="1214"/>
+            <a:off x="6380640" y="8292847"/>
+            <a:ext cx="644716" cy="151200"/>
+          </a:xfrm>
+          <a:prstGeom prst="rect">
+            <a:avLst/>
+          </a:prstGeom>
+          <a:noFill/>
+        </p:spPr>
+        <p:txBody>
+          <a:bodyPr wrap="none" lIns="0" rIns="0" tIns="0" bIns="0" anchor="t"/>
+          <a:lstStyle/>
+          <a:p>
+            <a:pPr algn="ctr">
+              <a:lnSpc>
+                <a:spcPts val="1163"/>
               </a:lnSpc>
             </a:pPr>
             <a:r>
@@ -11809,8 +11809,8 @@
         </p:nvSpPr>
         <p:spPr>
           <a:xfrm>
-            <a:off x="604800" y="8475823"/>
-            <a:ext cx="2007369" cy="151200"/>
+            <a:off x="604800" y="8587687"/>
+            <a:ext cx="1776902" cy="151200"/>
           </a:xfrm>
           <a:prstGeom prst="rect">
             <a:avLst/>
@@ -11823,7 +11823,7 @@
           <a:p>
             <a:pPr algn="l">
               <a:lnSpc>
-                <a:spcPts val="1062"/>
+                <a:spcPts val="1163"/>
               </a:lnSpc>
             </a:pPr>
             <a:r>
@@ -11846,21 +11846,21 @@
         </p:nvSpPr>
         <p:spPr>
           <a:xfrm>
-            <a:off x="2580322" y="8482792"/>
-            <a:ext cx="1133536" cy="151200"/>
-          </a:xfrm>
-          <a:prstGeom prst="rect">
-            <a:avLst/>
-          </a:prstGeom>
-          <a:noFill/>
-        </p:spPr>
-        <p:txBody>
-          <a:bodyPr wrap="none" lIns="0" rIns="0" tIns="0" bIns="0" anchor="t"/>
-          <a:lstStyle/>
-          <a:p>
-            <a:pPr algn="ctr">
-              <a:lnSpc>
-                <a:spcPts val="1214"/>
+            <a:off x="2404080" y="8587687"/>
+            <a:ext cx="833414" cy="151200"/>
+          </a:xfrm>
+          <a:prstGeom prst="rect">
+            <a:avLst/>
+          </a:prstGeom>
+          <a:noFill/>
+        </p:spPr>
+        <p:txBody>
+          <a:bodyPr wrap="none" lIns="0" rIns="0" tIns="0" bIns="0" anchor="t"/>
+          <a:lstStyle/>
+          <a:p>
+            <a:pPr algn="ctr">
+              <a:lnSpc>
+                <a:spcPts val="1163"/>
               </a:lnSpc>
             </a:pPr>
             <a:r>
@@ -11883,21 +11883,21 @@
         </p:nvSpPr>
         <p:spPr>
           <a:xfrm>
-            <a:off x="3715621" y="8482792"/>
-            <a:ext cx="425061" cy="151200"/>
-          </a:xfrm>
-          <a:prstGeom prst="rect">
-            <a:avLst/>
-          </a:prstGeom>
-          <a:noFill/>
-        </p:spPr>
-        <p:txBody>
-          <a:bodyPr wrap="none" lIns="0" rIns="0" tIns="0" bIns="0" anchor="t"/>
-          <a:lstStyle/>
-          <a:p>
-            <a:pPr algn="ctr">
-              <a:lnSpc>
-                <a:spcPts val="1214"/>
+            <a:off x="3296160" y="8587687"/>
+            <a:ext cx="503193" cy="151200"/>
+          </a:xfrm>
+          <a:prstGeom prst="rect">
+            <a:avLst/>
+          </a:prstGeom>
+          <a:noFill/>
+        </p:spPr>
+        <p:txBody>
+          <a:bodyPr wrap="none" lIns="0" rIns="0" tIns="0" bIns="0" anchor="t"/>
+          <a:lstStyle/>
+          <a:p>
+            <a:pPr algn="ctr">
+              <a:lnSpc>
+                <a:spcPts val="1163"/>
               </a:lnSpc>
             </a:pPr>
             <a:r>
@@ -11920,21 +11920,21 @@
         </p:nvSpPr>
         <p:spPr>
           <a:xfrm>
-            <a:off x="4169694" y="8482792"/>
-            <a:ext cx="676903" cy="151200"/>
-          </a:xfrm>
-          <a:prstGeom prst="rect">
-            <a:avLst/>
-          </a:prstGeom>
-          <a:noFill/>
-        </p:spPr>
-        <p:txBody>
-          <a:bodyPr wrap="none" lIns="0" rIns="0" tIns="0" bIns="0" anchor="t"/>
-          <a:lstStyle/>
-          <a:p>
-            <a:pPr algn="ctr">
-              <a:lnSpc>
-                <a:spcPts val="1214"/>
+            <a:off x="3870720" y="8587687"/>
+            <a:ext cx="723340" cy="151200"/>
+          </a:xfrm>
+          <a:prstGeom prst="rect">
+            <a:avLst/>
+          </a:prstGeom>
+          <a:noFill/>
+        </p:spPr>
+        <p:txBody>
+          <a:bodyPr wrap="none" lIns="0" rIns="0" tIns="0" bIns="0" anchor="t"/>
+          <a:lstStyle/>
+          <a:p>
+            <a:pPr algn="ctr">
+              <a:lnSpc>
+                <a:spcPts val="1163"/>
               </a:lnSpc>
             </a:pPr>
             <a:r>
@@ -11957,21 +11957,21 @@
         </p:nvSpPr>
         <p:spPr>
           <a:xfrm>
-            <a:off x="4865923" y="8482792"/>
-            <a:ext cx="1172848" cy="151200"/>
-          </a:xfrm>
-          <a:prstGeom prst="rect">
-            <a:avLst/>
-          </a:prstGeom>
-          <a:noFill/>
-        </p:spPr>
-        <p:txBody>
-          <a:bodyPr wrap="none" lIns="0" rIns="0" tIns="0" bIns="0" anchor="t"/>
-          <a:lstStyle/>
-          <a:p>
-            <a:pPr algn="ctr">
-              <a:lnSpc>
-                <a:spcPts val="1214"/>
+            <a:off x="4656960" y="8587687"/>
+            <a:ext cx="959212" cy="151200"/>
+          </a:xfrm>
+          <a:prstGeom prst="rect">
+            <a:avLst/>
+          </a:prstGeom>
+          <a:noFill/>
+        </p:spPr>
+        <p:txBody>
+          <a:bodyPr wrap="none" lIns="0" rIns="0" tIns="0" bIns="0" anchor="t"/>
+          <a:lstStyle/>
+          <a:p>
+            <a:pPr algn="ctr">
+              <a:lnSpc>
+                <a:spcPts val="1163"/>
               </a:lnSpc>
             </a:pPr>
             <a:r>
@@ -11994,21 +11994,21 @@
         </p:nvSpPr>
         <p:spPr>
           <a:xfrm>
-            <a:off x="6039022" y="8482792"/>
-            <a:ext cx="488083" cy="151200"/>
-          </a:xfrm>
-          <a:prstGeom prst="rect">
-            <a:avLst/>
-          </a:prstGeom>
-          <a:noFill/>
-        </p:spPr>
-        <p:txBody>
-          <a:bodyPr wrap="none" lIns="0" rIns="0" tIns="0" bIns="0" anchor="t"/>
-          <a:lstStyle/>
-          <a:p>
-            <a:pPr algn="ctr">
-              <a:lnSpc>
-                <a:spcPts val="1214"/>
+            <a:off x="5670000" y="8587687"/>
+            <a:ext cx="644716" cy="151200"/>
+          </a:xfrm>
+          <a:prstGeom prst="rect">
+            <a:avLst/>
+          </a:prstGeom>
+          <a:noFill/>
+        </p:spPr>
+        <p:txBody>
+          <a:bodyPr wrap="none" lIns="0" rIns="0" tIns="0" bIns="0" anchor="t"/>
+          <a:lstStyle/>
+          <a:p>
+            <a:pPr algn="ctr">
+              <a:lnSpc>
+                <a:spcPts val="1163"/>
               </a:lnSpc>
             </a:pPr>
             <a:r>
@@ -12031,21 +12031,21 @@
         </p:nvSpPr>
         <p:spPr>
           <a:xfrm>
-            <a:off x="6553693" y="8482792"/>
-            <a:ext cx="488328" cy="151200"/>
-          </a:xfrm>
-          <a:prstGeom prst="rect">
-            <a:avLst/>
-          </a:prstGeom>
-          <a:noFill/>
-        </p:spPr>
-        <p:txBody>
-          <a:bodyPr wrap="none" lIns="0" rIns="0" tIns="0" bIns="0" anchor="t"/>
-          <a:lstStyle/>
-          <a:p>
-            <a:pPr algn="ctr">
-              <a:lnSpc>
-                <a:spcPts val="1214"/>
+            <a:off x="6380640" y="8587687"/>
+            <a:ext cx="644716" cy="151200"/>
+          </a:xfrm>
+          <a:prstGeom prst="rect">
+            <a:avLst/>
+          </a:prstGeom>
+          <a:noFill/>
+        </p:spPr>
+        <p:txBody>
+          <a:bodyPr wrap="none" lIns="0" rIns="0" tIns="0" bIns="0" anchor="t"/>
+          <a:lstStyle/>
+          <a:p>
+            <a:pPr algn="ctr">
+              <a:lnSpc>
+                <a:spcPts val="1163"/>
               </a:lnSpc>
             </a:pPr>
             <a:r>
@@ -12068,8 +12068,8 @@
         </p:nvSpPr>
         <p:spPr>
           <a:xfrm>
-            <a:off x="604800" y="8770663"/>
-            <a:ext cx="2007369" cy="151200"/>
+            <a:off x="604800" y="8882527"/>
+            <a:ext cx="1776902" cy="151200"/>
           </a:xfrm>
           <a:prstGeom prst="rect">
             <a:avLst/>
@@ -12082,7 +12082,7 @@
           <a:p>
             <a:pPr algn="l">
               <a:lnSpc>
-                <a:spcPts val="1062"/>
+                <a:spcPts val="1163"/>
               </a:lnSpc>
             </a:pPr>
             <a:r>
@@ -12105,21 +12105,21 @@
         </p:nvSpPr>
         <p:spPr>
           <a:xfrm>
-            <a:off x="2580322" y="8777632"/>
-            <a:ext cx="1133536" cy="151200"/>
-          </a:xfrm>
-          <a:prstGeom prst="rect">
-            <a:avLst/>
-          </a:prstGeom>
-          <a:noFill/>
-        </p:spPr>
-        <p:txBody>
-          <a:bodyPr wrap="none" lIns="0" rIns="0" tIns="0" bIns="0" anchor="t"/>
-          <a:lstStyle/>
-          <a:p>
-            <a:pPr algn="ctr">
-              <a:lnSpc>
-                <a:spcPts val="1214"/>
+            <a:off x="2404080" y="8882527"/>
+            <a:ext cx="833414" cy="151200"/>
+          </a:xfrm>
+          <a:prstGeom prst="rect">
+            <a:avLst/>
+          </a:prstGeom>
+          <a:noFill/>
+        </p:spPr>
+        <p:txBody>
+          <a:bodyPr wrap="none" lIns="0" rIns="0" tIns="0" bIns="0" anchor="t"/>
+          <a:lstStyle/>
+          <a:p>
+            <a:pPr algn="ctr">
+              <a:lnSpc>
+                <a:spcPts val="1163"/>
               </a:lnSpc>
             </a:pPr>
             <a:r>
@@ -12142,21 +12142,21 @@
         </p:nvSpPr>
         <p:spPr>
           <a:xfrm>
-            <a:off x="3715621" y="8777632"/>
-            <a:ext cx="425061" cy="151200"/>
-          </a:xfrm>
-          <a:prstGeom prst="rect">
-            <a:avLst/>
-          </a:prstGeom>
-          <a:noFill/>
-        </p:spPr>
-        <p:txBody>
-          <a:bodyPr wrap="none" lIns="0" rIns="0" tIns="0" bIns="0" anchor="t"/>
-          <a:lstStyle/>
-          <a:p>
-            <a:pPr algn="ctr">
-              <a:lnSpc>
-                <a:spcPts val="1214"/>
+            <a:off x="3296160" y="8882527"/>
+            <a:ext cx="503193" cy="151200"/>
+          </a:xfrm>
+          <a:prstGeom prst="rect">
+            <a:avLst/>
+          </a:prstGeom>
+          <a:noFill/>
+        </p:spPr>
+        <p:txBody>
+          <a:bodyPr wrap="none" lIns="0" rIns="0" tIns="0" bIns="0" anchor="t"/>
+          <a:lstStyle/>
+          <a:p>
+            <a:pPr algn="ctr">
+              <a:lnSpc>
+                <a:spcPts val="1163"/>
               </a:lnSpc>
             </a:pPr>
             <a:r>
@@ -12179,21 +12179,21 @@
         </p:nvSpPr>
         <p:spPr>
           <a:xfrm>
-            <a:off x="4169694" y="8777632"/>
-            <a:ext cx="676903" cy="151200"/>
-          </a:xfrm>
-          <a:prstGeom prst="rect">
-            <a:avLst/>
-          </a:prstGeom>
-          <a:noFill/>
-        </p:spPr>
-        <p:txBody>
-          <a:bodyPr wrap="none" lIns="0" rIns="0" tIns="0" bIns="0" anchor="t"/>
-          <a:lstStyle/>
-          <a:p>
-            <a:pPr algn="ctr">
-              <a:lnSpc>
-                <a:spcPts val="1214"/>
+            <a:off x="3870720" y="8882527"/>
+            <a:ext cx="723340" cy="151200"/>
+          </a:xfrm>
+          <a:prstGeom prst="rect">
+            <a:avLst/>
+          </a:prstGeom>
+          <a:noFill/>
+        </p:spPr>
+        <p:txBody>
+          <a:bodyPr wrap="none" lIns="0" rIns="0" tIns="0" bIns="0" anchor="t"/>
+          <a:lstStyle/>
+          <a:p>
+            <a:pPr algn="ctr">
+              <a:lnSpc>
+                <a:spcPts val="1163"/>
               </a:lnSpc>
             </a:pPr>
             <a:r>
@@ -12216,21 +12216,21 @@
         </p:nvSpPr>
         <p:spPr>
           <a:xfrm>
-            <a:off x="4865923" y="8777632"/>
-            <a:ext cx="1172848" cy="151200"/>
-          </a:xfrm>
-          <a:prstGeom prst="rect">
-            <a:avLst/>
-          </a:prstGeom>
-          <a:noFill/>
-        </p:spPr>
-        <p:txBody>
-          <a:bodyPr wrap="none" lIns="0" rIns="0" tIns="0" bIns="0" anchor="t"/>
-          <a:lstStyle/>
-          <a:p>
-            <a:pPr algn="ctr">
-              <a:lnSpc>
-                <a:spcPts val="1214"/>
+            <a:off x="4656960" y="8882527"/>
+            <a:ext cx="959212" cy="151200"/>
+          </a:xfrm>
+          <a:prstGeom prst="rect">
+            <a:avLst/>
+          </a:prstGeom>
+          <a:noFill/>
+        </p:spPr>
+        <p:txBody>
+          <a:bodyPr wrap="none" lIns="0" rIns="0" tIns="0" bIns="0" anchor="t"/>
+          <a:lstStyle/>
+          <a:p>
+            <a:pPr algn="ctr">
+              <a:lnSpc>
+                <a:spcPts val="1163"/>
               </a:lnSpc>
             </a:pPr>
             <a:r>
@@ -12253,21 +12253,21 @@
         </p:nvSpPr>
         <p:spPr>
           <a:xfrm>
-            <a:off x="6039022" y="8777632"/>
-            <a:ext cx="488083" cy="151200"/>
-          </a:xfrm>
-          <a:prstGeom prst="rect">
-            <a:avLst/>
-          </a:prstGeom>
-          <a:noFill/>
-        </p:spPr>
-        <p:txBody>
-          <a:bodyPr wrap="none" lIns="0" rIns="0" tIns="0" bIns="0" anchor="t"/>
-          <a:lstStyle/>
-          <a:p>
-            <a:pPr algn="ctr">
-              <a:lnSpc>
-                <a:spcPts val="1214"/>
+            <a:off x="5670000" y="8882527"/>
+            <a:ext cx="644716" cy="151200"/>
+          </a:xfrm>
+          <a:prstGeom prst="rect">
+            <a:avLst/>
+          </a:prstGeom>
+          <a:noFill/>
+        </p:spPr>
+        <p:txBody>
+          <a:bodyPr wrap="none" lIns="0" rIns="0" tIns="0" bIns="0" anchor="t"/>
+          <a:lstStyle/>
+          <a:p>
+            <a:pPr algn="ctr">
+              <a:lnSpc>
+                <a:spcPts val="1163"/>
               </a:lnSpc>
             </a:pPr>
             <a:r>
@@ -12290,21 +12290,21 @@
         </p:nvSpPr>
         <p:spPr>
           <a:xfrm>
-            <a:off x="6553693" y="8777632"/>
-            <a:ext cx="488328" cy="151200"/>
-          </a:xfrm>
-          <a:prstGeom prst="rect">
-            <a:avLst/>
-          </a:prstGeom>
-          <a:noFill/>
-        </p:spPr>
-        <p:txBody>
-          <a:bodyPr wrap="none" lIns="0" rIns="0" tIns="0" bIns="0" anchor="t"/>
-          <a:lstStyle/>
-          <a:p>
-            <a:pPr algn="ctr">
-              <a:lnSpc>
-                <a:spcPts val="1214"/>
+            <a:off x="6380640" y="8882527"/>
+            <a:ext cx="644716" cy="151200"/>
+          </a:xfrm>
+          <a:prstGeom prst="rect">
+            <a:avLst/>
+          </a:prstGeom>
+          <a:noFill/>
+        </p:spPr>
+        <p:txBody>
+          <a:bodyPr wrap="none" lIns="0" rIns="0" tIns="0" bIns="0" anchor="t"/>
+          <a:lstStyle/>
+          <a:p>
+            <a:pPr algn="ctr">
+              <a:lnSpc>
+                <a:spcPts val="1163"/>
               </a:lnSpc>
             </a:pPr>
             <a:r>
@@ -12327,8 +12327,8 @@
         </p:nvSpPr>
         <p:spPr>
           <a:xfrm>
-            <a:off x="604800" y="9065503"/>
-            <a:ext cx="2007369" cy="151200"/>
+            <a:off x="604800" y="9177367"/>
+            <a:ext cx="1776902" cy="151200"/>
           </a:xfrm>
           <a:prstGeom prst="rect">
             <a:avLst/>
@@ -12341,7 +12341,7 @@
           <a:p>
             <a:pPr algn="l">
               <a:lnSpc>
-                <a:spcPts val="1062"/>
+                <a:spcPts val="1163"/>
               </a:lnSpc>
             </a:pPr>
             <a:r>
@@ -12364,21 +12364,21 @@
         </p:nvSpPr>
         <p:spPr>
           <a:xfrm>
-            <a:off x="2580322" y="9072472"/>
-            <a:ext cx="1133536" cy="151200"/>
-          </a:xfrm>
-          <a:prstGeom prst="rect">
-            <a:avLst/>
-          </a:prstGeom>
-          <a:noFill/>
-        </p:spPr>
-        <p:txBody>
-          <a:bodyPr wrap="none" lIns="0" rIns="0" tIns="0" bIns="0" anchor="t"/>
-          <a:lstStyle/>
-          <a:p>
-            <a:pPr algn="ctr">
-              <a:lnSpc>
-                <a:spcPts val="1214"/>
+            <a:off x="2404080" y="9177367"/>
+            <a:ext cx="833414" cy="151200"/>
+          </a:xfrm>
+          <a:prstGeom prst="rect">
+            <a:avLst/>
+          </a:prstGeom>
+          <a:noFill/>
+        </p:spPr>
+        <p:txBody>
+          <a:bodyPr wrap="none" lIns="0" rIns="0" tIns="0" bIns="0" anchor="t"/>
+          <a:lstStyle/>
+          <a:p>
+            <a:pPr algn="ctr">
+              <a:lnSpc>
+                <a:spcPts val="1163"/>
               </a:lnSpc>
             </a:pPr>
             <a:r>
@@ -12401,21 +12401,21 @@
         </p:nvSpPr>
         <p:spPr>
           <a:xfrm>
-            <a:off x="3715621" y="9072472"/>
-            <a:ext cx="425061" cy="151200"/>
-          </a:xfrm>
-          <a:prstGeom prst="rect">
-            <a:avLst/>
-          </a:prstGeom>
-          <a:noFill/>
-        </p:spPr>
-        <p:txBody>
-          <a:bodyPr wrap="none" lIns="0" rIns="0" tIns="0" bIns="0" anchor="t"/>
-          <a:lstStyle/>
-          <a:p>
-            <a:pPr algn="ctr">
-              <a:lnSpc>
-                <a:spcPts val="1214"/>
+            <a:off x="3296160" y="9177367"/>
+            <a:ext cx="503193" cy="151200"/>
+          </a:xfrm>
+          <a:prstGeom prst="rect">
+            <a:avLst/>
+          </a:prstGeom>
+          <a:noFill/>
+        </p:spPr>
+        <p:txBody>
+          <a:bodyPr wrap="none" lIns="0" rIns="0" tIns="0" bIns="0" anchor="t"/>
+          <a:lstStyle/>
+          <a:p>
+            <a:pPr algn="ctr">
+              <a:lnSpc>
+                <a:spcPts val="1163"/>
               </a:lnSpc>
             </a:pPr>
             <a:r>
@@ -12438,21 +12438,21 @@
         </p:nvSpPr>
         <p:spPr>
           <a:xfrm>
-            <a:off x="4169694" y="9072472"/>
-            <a:ext cx="676903" cy="151200"/>
-          </a:xfrm>
-          <a:prstGeom prst="rect">
-            <a:avLst/>
-          </a:prstGeom>
-          <a:noFill/>
-        </p:spPr>
-        <p:txBody>
-          <a:bodyPr wrap="none" lIns="0" rIns="0" tIns="0" bIns="0" anchor="t"/>
-          <a:lstStyle/>
-          <a:p>
-            <a:pPr algn="ctr">
-              <a:lnSpc>
-                <a:spcPts val="1214"/>
+            <a:off x="3870720" y="9177367"/>
+            <a:ext cx="723340" cy="151200"/>
+          </a:xfrm>
+          <a:prstGeom prst="rect">
+            <a:avLst/>
+          </a:prstGeom>
+          <a:noFill/>
+        </p:spPr>
+        <p:txBody>
+          <a:bodyPr wrap="none" lIns="0" rIns="0" tIns="0" bIns="0" anchor="t"/>
+          <a:lstStyle/>
+          <a:p>
+            <a:pPr algn="ctr">
+              <a:lnSpc>
+                <a:spcPts val="1163"/>
               </a:lnSpc>
             </a:pPr>
             <a:r>
@@ -12475,21 +12475,21 @@
         </p:nvSpPr>
         <p:spPr>
           <a:xfrm>
-            <a:off x="4865923" y="9072472"/>
-            <a:ext cx="1172848" cy="151200"/>
-          </a:xfrm>
-          <a:prstGeom prst="rect">
-            <a:avLst/>
-          </a:prstGeom>
-          <a:noFill/>
-        </p:spPr>
-        <p:txBody>
-          <a:bodyPr wrap="none" lIns="0" rIns="0" tIns="0" bIns="0" anchor="t"/>
-          <a:lstStyle/>
-          <a:p>
-            <a:pPr algn="ctr">
-              <a:lnSpc>
-                <a:spcPts val="1214"/>
+            <a:off x="4656960" y="9177367"/>
+            <a:ext cx="959212" cy="151200"/>
+          </a:xfrm>
+          <a:prstGeom prst="rect">
+            <a:avLst/>
+          </a:prstGeom>
+          <a:noFill/>
+        </p:spPr>
+        <p:txBody>
+          <a:bodyPr wrap="none" lIns="0" rIns="0" tIns="0" bIns="0" anchor="t"/>
+          <a:lstStyle/>
+          <a:p>
+            <a:pPr algn="ctr">
+              <a:lnSpc>
+                <a:spcPts val="1163"/>
               </a:lnSpc>
             </a:pPr>
             <a:r>
@@ -12512,21 +12512,21 @@
         </p:nvSpPr>
         <p:spPr>
           <a:xfrm>
-            <a:off x="6039022" y="9072472"/>
-            <a:ext cx="488083" cy="151200"/>
-          </a:xfrm>
-          <a:prstGeom prst="rect">
-            <a:avLst/>
-          </a:prstGeom>
-          <a:noFill/>
-        </p:spPr>
-        <p:txBody>
-          <a:bodyPr wrap="none" lIns="0" rIns="0" tIns="0" bIns="0" anchor="t"/>
-          <a:lstStyle/>
-          <a:p>
-            <a:pPr algn="ctr">
-              <a:lnSpc>
-                <a:spcPts val="1214"/>
+            <a:off x="5670000" y="9177367"/>
+            <a:ext cx="644716" cy="151200"/>
+          </a:xfrm>
+          <a:prstGeom prst="rect">
+            <a:avLst/>
+          </a:prstGeom>
+          <a:noFill/>
+        </p:spPr>
+        <p:txBody>
+          <a:bodyPr wrap="none" lIns="0" rIns="0" tIns="0" bIns="0" anchor="t"/>
+          <a:lstStyle/>
+          <a:p>
+            <a:pPr algn="ctr">
+              <a:lnSpc>
+                <a:spcPts val="1163"/>
               </a:lnSpc>
             </a:pPr>
             <a:r>
@@ -12549,21 +12549,21 @@
         </p:nvSpPr>
         <p:spPr>
           <a:xfrm>
-            <a:off x="6553693" y="9072472"/>
-            <a:ext cx="488328" cy="151200"/>
-          </a:xfrm>
-          <a:prstGeom prst="rect">
-            <a:avLst/>
-          </a:prstGeom>
-          <a:noFill/>
-        </p:spPr>
-        <p:txBody>
-          <a:bodyPr wrap="none" lIns="0" rIns="0" tIns="0" bIns="0" anchor="t"/>
-          <a:lstStyle/>
-          <a:p>
-            <a:pPr algn="ctr">
-              <a:lnSpc>
-                <a:spcPts val="1214"/>
+            <a:off x="6380640" y="9177367"/>
+            <a:ext cx="644716" cy="151200"/>
+          </a:xfrm>
+          <a:prstGeom prst="rect">
+            <a:avLst/>
+          </a:prstGeom>
+          <a:noFill/>
+        </p:spPr>
+        <p:txBody>
+          <a:bodyPr wrap="none" lIns="0" rIns="0" tIns="0" bIns="0" anchor="t"/>
+          <a:lstStyle/>
+          <a:p>
+            <a:pPr algn="ctr">
+              <a:lnSpc>
+                <a:spcPts val="1163"/>
               </a:lnSpc>
             </a:pPr>
             <a:r>
@@ -12586,8 +12586,8 @@
         </p:nvSpPr>
         <p:spPr>
           <a:xfrm>
-            <a:off x="604800" y="9360343"/>
-            <a:ext cx="2007369" cy="151200"/>
+            <a:off x="604800" y="9472207"/>
+            <a:ext cx="1776902" cy="151200"/>
           </a:xfrm>
           <a:prstGeom prst="rect">
             <a:avLst/>
@@ -12600,7 +12600,7 @@
           <a:p>
             <a:pPr algn="l">
               <a:lnSpc>
-                <a:spcPts val="1062"/>
+                <a:spcPts val="1163"/>
               </a:lnSpc>
             </a:pPr>
             <a:r>
@@ -12623,21 +12623,21 @@
         </p:nvSpPr>
         <p:spPr>
           <a:xfrm>
-            <a:off x="2580322" y="9367312"/>
-            <a:ext cx="1133536" cy="151200"/>
-          </a:xfrm>
-          <a:prstGeom prst="rect">
-            <a:avLst/>
-          </a:prstGeom>
-          <a:noFill/>
-        </p:spPr>
-        <p:txBody>
-          <a:bodyPr wrap="none" lIns="0" rIns="0" tIns="0" bIns="0" anchor="t"/>
-          <a:lstStyle/>
-          <a:p>
-            <a:pPr algn="ctr">
-              <a:lnSpc>
-                <a:spcPts val="1214"/>
+            <a:off x="2404080" y="9472207"/>
+            <a:ext cx="833414" cy="151200"/>
+          </a:xfrm>
+          <a:prstGeom prst="rect">
+            <a:avLst/>
+          </a:prstGeom>
+          <a:noFill/>
+        </p:spPr>
+        <p:txBody>
+          <a:bodyPr wrap="none" lIns="0" rIns="0" tIns="0" bIns="0" anchor="t"/>
+          <a:lstStyle/>
+          <a:p>
+            <a:pPr algn="ctr">
+              <a:lnSpc>
+                <a:spcPts val="1163"/>
               </a:lnSpc>
             </a:pPr>
             <a:r>
@@ -12660,21 +12660,21 @@
         </p:nvSpPr>
         <p:spPr>
           <a:xfrm>
-            <a:off x="3715621" y="9367312"/>
-            <a:ext cx="425061" cy="151200"/>
-          </a:xfrm>
-          <a:prstGeom prst="rect">
-            <a:avLst/>
-          </a:prstGeom>
-          <a:noFill/>
-        </p:spPr>
-        <p:txBody>
-          <a:bodyPr wrap="none" lIns="0" rIns="0" tIns="0" bIns="0" anchor="t"/>
-          <a:lstStyle/>
-          <a:p>
-            <a:pPr algn="ctr">
-              <a:lnSpc>
-                <a:spcPts val="1214"/>
+            <a:off x="3296160" y="9472207"/>
+            <a:ext cx="503193" cy="151200"/>
+          </a:xfrm>
+          <a:prstGeom prst="rect">
+            <a:avLst/>
+          </a:prstGeom>
+          <a:noFill/>
+        </p:spPr>
+        <p:txBody>
+          <a:bodyPr wrap="none" lIns="0" rIns="0" tIns="0" bIns="0" anchor="t"/>
+          <a:lstStyle/>
+          <a:p>
+            <a:pPr algn="ctr">
+              <a:lnSpc>
+                <a:spcPts val="1163"/>
               </a:lnSpc>
             </a:pPr>
             <a:r>
@@ -12697,21 +12697,21 @@
         </p:nvSpPr>
         <p:spPr>
           <a:xfrm>
-            <a:off x="4169694" y="9367312"/>
-            <a:ext cx="676903" cy="151200"/>
-          </a:xfrm>
-          <a:prstGeom prst="rect">
-            <a:avLst/>
-          </a:prstGeom>
-          <a:noFill/>
-        </p:spPr>
-        <p:txBody>
-          <a:bodyPr wrap="none" lIns="0" rIns="0" tIns="0" bIns="0" anchor="t"/>
-          <a:lstStyle/>
-          <a:p>
-            <a:pPr algn="ctr">
-              <a:lnSpc>
-                <a:spcPts val="1214"/>
+            <a:off x="3870720" y="9472207"/>
+            <a:ext cx="723340" cy="151200"/>
+          </a:xfrm>
+          <a:prstGeom prst="rect">
+            <a:avLst/>
+          </a:prstGeom>
+          <a:noFill/>
+        </p:spPr>
+        <p:txBody>
+          <a:bodyPr wrap="none" lIns="0" rIns="0" tIns="0" bIns="0" anchor="t"/>
+          <a:lstStyle/>
+          <a:p>
+            <a:pPr algn="ctr">
+              <a:lnSpc>
+                <a:spcPts val="1163"/>
               </a:lnSpc>
             </a:pPr>
             <a:r>
@@ -12734,21 +12734,21 @@
         </p:nvSpPr>
         <p:spPr>
           <a:xfrm>
-            <a:off x="4865923" y="9367312"/>
-            <a:ext cx="1172848" cy="151200"/>
-          </a:xfrm>
-          <a:prstGeom prst="rect">
-            <a:avLst/>
-          </a:prstGeom>
-          <a:noFill/>
-        </p:spPr>
-        <p:txBody>
-          <a:bodyPr wrap="none" lIns="0" rIns="0" tIns="0" bIns="0" anchor="t"/>
-          <a:lstStyle/>
-          <a:p>
-            <a:pPr algn="ctr">
-              <a:lnSpc>
-                <a:spcPts val="1214"/>
+            <a:off x="4656960" y="9472207"/>
+            <a:ext cx="959212" cy="151200"/>
+          </a:xfrm>
+          <a:prstGeom prst="rect">
+            <a:avLst/>
+          </a:prstGeom>
+          <a:noFill/>
+        </p:spPr>
+        <p:txBody>
+          <a:bodyPr wrap="none" lIns="0" rIns="0" tIns="0" bIns="0" anchor="t"/>
+          <a:lstStyle/>
+          <a:p>
+            <a:pPr algn="ctr">
+              <a:lnSpc>
+                <a:spcPts val="1163"/>
               </a:lnSpc>
             </a:pPr>
             <a:r>
@@ -12771,21 +12771,21 @@
         </p:nvSpPr>
         <p:spPr>
           <a:xfrm>
-            <a:off x="6039022" y="9367312"/>
-            <a:ext cx="488083" cy="151200"/>
-          </a:xfrm>
-          <a:prstGeom prst="rect">
-            <a:avLst/>
-          </a:prstGeom>
-          <a:noFill/>
-        </p:spPr>
-        <p:txBody>
-          <a:bodyPr wrap="none" lIns="0" rIns="0" tIns="0" bIns="0" anchor="t"/>
-          <a:lstStyle/>
-          <a:p>
-            <a:pPr algn="ctr">
-              <a:lnSpc>
-                <a:spcPts val="1214"/>
+            <a:off x="5670000" y="9472207"/>
+            <a:ext cx="644716" cy="151200"/>
+          </a:xfrm>
+          <a:prstGeom prst="rect">
+            <a:avLst/>
+          </a:prstGeom>
+          <a:noFill/>
+        </p:spPr>
+        <p:txBody>
+          <a:bodyPr wrap="none" lIns="0" rIns="0" tIns="0" bIns="0" anchor="t"/>
+          <a:lstStyle/>
+          <a:p>
+            <a:pPr algn="ctr">
+              <a:lnSpc>
+                <a:spcPts val="1163"/>
               </a:lnSpc>
             </a:pPr>
             <a:r>
@@ -12808,21 +12808,21 @@
         </p:nvSpPr>
         <p:spPr>
           <a:xfrm>
-            <a:off x="6553693" y="9367312"/>
-            <a:ext cx="488328" cy="151200"/>
-          </a:xfrm>
-          <a:prstGeom prst="rect">
-            <a:avLst/>
-          </a:prstGeom>
-          <a:noFill/>
-        </p:spPr>
-        <p:txBody>
-          <a:bodyPr wrap="none" lIns="0" rIns="0" tIns="0" bIns="0" anchor="t"/>
-          <a:lstStyle/>
-          <a:p>
-            <a:pPr algn="ctr">
-              <a:lnSpc>
-                <a:spcPts val="1214"/>
+            <a:off x="6380640" y="9472207"/>
+            <a:ext cx="644716" cy="151200"/>
+          </a:xfrm>
+          <a:prstGeom prst="rect">
+            <a:avLst/>
+          </a:prstGeom>
+          <a:noFill/>
+        </p:spPr>
+        <p:txBody>
+          <a:bodyPr wrap="none" lIns="0" rIns="0" tIns="0" bIns="0" anchor="t"/>
+          <a:lstStyle/>
+          <a:p>
+            <a:pPr algn="ctr">
+              <a:lnSpc>
+                <a:spcPts val="1163"/>
               </a:lnSpc>
             </a:pPr>
             <a:r>

--- a/AutomaTivio/saida/2026-08/pptx/Tivio Banks - Relatório de Gestão - Agosto 2026.pptx
+++ b/AutomaTivio/saida/2026-08/pptx/Tivio Banks - Relatório de Gestão - Agosto 2026.pptx
@@ -4556,13 +4556,22 @@
               </a:lnSpc>
             </a:pPr>
             <a:r>
+              <a:rPr sz="744" b="1" i="0">
+                <a:solidFill>
+                  <a:srgbClr val="444444"/>
+                </a:solidFill>
+                <a:latin typeface="Versos"/>
+              </a:rPr>
+              <a:t>Data base:</a:t>
+            </a:r>
+            <a:r>
               <a:rPr sz="744" b="0" i="0">
                 <a:solidFill>
                   <a:srgbClr val="444444"/>
                 </a:solidFill>
                 <a:latin typeface="Versos"/>
               </a:rPr>
-              <a:t>31/08/2026</a:t>
+              <a:t> 31/08/2026</a:t>
             </a:r>
           </a:p>
         </p:txBody>
@@ -6888,7 +6897,7 @@
         </p:nvSpPr>
         <p:spPr>
           <a:xfrm>
-            <a:off x="604800" y="2892881"/>
+            <a:off x="604800" y="2884140"/>
             <a:ext cx="1776902" cy="151200"/>
           </a:xfrm>
           <a:prstGeom prst="rect">
@@ -6925,7 +6934,7 @@
         </p:nvSpPr>
         <p:spPr>
           <a:xfrm>
-            <a:off x="2404080" y="2892881"/>
+            <a:off x="2404080" y="2884140"/>
             <a:ext cx="833414" cy="151200"/>
           </a:xfrm>
           <a:prstGeom prst="rect">
@@ -6962,7 +6971,7 @@
         </p:nvSpPr>
         <p:spPr>
           <a:xfrm>
-            <a:off x="3296160" y="2892881"/>
+            <a:off x="3296160" y="2884140"/>
             <a:ext cx="503193" cy="151200"/>
           </a:xfrm>
           <a:prstGeom prst="rect">
@@ -6999,7 +7008,7 @@
         </p:nvSpPr>
         <p:spPr>
           <a:xfrm>
-            <a:off x="3870720" y="2892881"/>
+            <a:off x="3870720" y="2884140"/>
             <a:ext cx="723340" cy="151200"/>
           </a:xfrm>
           <a:prstGeom prst="rect">
@@ -7036,7 +7045,7 @@
         </p:nvSpPr>
         <p:spPr>
           <a:xfrm>
-            <a:off x="4656960" y="2892881"/>
+            <a:off x="4656960" y="2884140"/>
             <a:ext cx="959212" cy="151200"/>
           </a:xfrm>
           <a:prstGeom prst="rect">
@@ -7073,7 +7082,7 @@
         </p:nvSpPr>
         <p:spPr>
           <a:xfrm>
-            <a:off x="5670000" y="2892881"/>
+            <a:off x="5670000" y="2884140"/>
             <a:ext cx="644716" cy="151200"/>
           </a:xfrm>
           <a:prstGeom prst="rect">
@@ -7110,7 +7119,7 @@
         </p:nvSpPr>
         <p:spPr>
           <a:xfrm>
-            <a:off x="6380640" y="2892881"/>
+            <a:off x="6380640" y="2884140"/>
             <a:ext cx="644716" cy="151200"/>
           </a:xfrm>
           <a:prstGeom prst="rect">
@@ -7147,7 +7156,7 @@
         </p:nvSpPr>
         <p:spPr>
           <a:xfrm>
-            <a:off x="604800" y="3187721"/>
+            <a:off x="604800" y="3161379"/>
             <a:ext cx="1776902" cy="151200"/>
           </a:xfrm>
           <a:prstGeom prst="rect">
@@ -7184,7 +7193,7 @@
         </p:nvSpPr>
         <p:spPr>
           <a:xfrm>
-            <a:off x="2404080" y="3187721"/>
+            <a:off x="2404080" y="3161379"/>
             <a:ext cx="833414" cy="151200"/>
           </a:xfrm>
           <a:prstGeom prst="rect">
@@ -7221,7 +7230,7 @@
         </p:nvSpPr>
         <p:spPr>
           <a:xfrm>
-            <a:off x="3296160" y="3187721"/>
+            <a:off x="3296160" y="3161379"/>
             <a:ext cx="503193" cy="151200"/>
           </a:xfrm>
           <a:prstGeom prst="rect">
@@ -7258,7 +7267,7 @@
         </p:nvSpPr>
         <p:spPr>
           <a:xfrm>
-            <a:off x="3870720" y="3187721"/>
+            <a:off x="3870720" y="3161379"/>
             <a:ext cx="723340" cy="151200"/>
           </a:xfrm>
           <a:prstGeom prst="rect">
@@ -7295,7 +7304,7 @@
         </p:nvSpPr>
         <p:spPr>
           <a:xfrm>
-            <a:off x="4656960" y="3187721"/>
+            <a:off x="4656960" y="3161379"/>
             <a:ext cx="959212" cy="151200"/>
           </a:xfrm>
           <a:prstGeom prst="rect">
@@ -7332,7 +7341,7 @@
         </p:nvSpPr>
         <p:spPr>
           <a:xfrm>
-            <a:off x="5670000" y="3187721"/>
+            <a:off x="5670000" y="3161379"/>
             <a:ext cx="644716" cy="151200"/>
           </a:xfrm>
           <a:prstGeom prst="rect">
@@ -7369,7 +7378,7 @@
         </p:nvSpPr>
         <p:spPr>
           <a:xfrm>
-            <a:off x="6380640" y="3187721"/>
+            <a:off x="6380640" y="3161379"/>
             <a:ext cx="644716" cy="151200"/>
           </a:xfrm>
           <a:prstGeom prst="rect">
@@ -7406,7 +7415,7 @@
         </p:nvSpPr>
         <p:spPr>
           <a:xfrm>
-            <a:off x="604800" y="3482561"/>
+            <a:off x="604800" y="3438618"/>
             <a:ext cx="1776902" cy="151200"/>
           </a:xfrm>
           <a:prstGeom prst="rect">
@@ -7443,7 +7452,7 @@
         </p:nvSpPr>
         <p:spPr>
           <a:xfrm>
-            <a:off x="2404080" y="3482561"/>
+            <a:off x="2404080" y="3438618"/>
             <a:ext cx="833414" cy="151200"/>
           </a:xfrm>
           <a:prstGeom prst="rect">
@@ -7480,7 +7489,7 @@
         </p:nvSpPr>
         <p:spPr>
           <a:xfrm>
-            <a:off x="3296160" y="3482561"/>
+            <a:off x="3296160" y="3438618"/>
             <a:ext cx="503193" cy="151200"/>
           </a:xfrm>
           <a:prstGeom prst="rect">
@@ -7517,7 +7526,7 @@
         </p:nvSpPr>
         <p:spPr>
           <a:xfrm>
-            <a:off x="3870720" y="3482561"/>
+            <a:off x="3870720" y="3438618"/>
             <a:ext cx="723340" cy="151200"/>
           </a:xfrm>
           <a:prstGeom prst="rect">
@@ -7554,7 +7563,7 @@
         </p:nvSpPr>
         <p:spPr>
           <a:xfrm>
-            <a:off x="4656960" y="3482561"/>
+            <a:off x="4656960" y="3438618"/>
             <a:ext cx="959212" cy="151200"/>
           </a:xfrm>
           <a:prstGeom prst="rect">
@@ -7591,7 +7600,7 @@
         </p:nvSpPr>
         <p:spPr>
           <a:xfrm>
-            <a:off x="5670000" y="3482561"/>
+            <a:off x="5670000" y="3438618"/>
             <a:ext cx="644716" cy="151200"/>
           </a:xfrm>
           <a:prstGeom prst="rect">
@@ -7628,7 +7637,7 @@
         </p:nvSpPr>
         <p:spPr>
           <a:xfrm>
-            <a:off x="6380640" y="3482561"/>
+            <a:off x="6380640" y="3438618"/>
             <a:ext cx="644716" cy="151200"/>
           </a:xfrm>
           <a:prstGeom prst="rect">
@@ -7665,7 +7674,7 @@
         </p:nvSpPr>
         <p:spPr>
           <a:xfrm>
-            <a:off x="604800" y="3777401"/>
+            <a:off x="604800" y="3715858"/>
             <a:ext cx="1776902" cy="151200"/>
           </a:xfrm>
           <a:prstGeom prst="rect">
@@ -7702,7 +7711,7 @@
         </p:nvSpPr>
         <p:spPr>
           <a:xfrm>
-            <a:off x="2404080" y="3777401"/>
+            <a:off x="2404080" y="3715858"/>
             <a:ext cx="833414" cy="151200"/>
           </a:xfrm>
           <a:prstGeom prst="rect">
@@ -7739,7 +7748,7 @@
         </p:nvSpPr>
         <p:spPr>
           <a:xfrm>
-            <a:off x="3296160" y="3777401"/>
+            <a:off x="3296160" y="3715858"/>
             <a:ext cx="503193" cy="151200"/>
           </a:xfrm>
           <a:prstGeom prst="rect">
@@ -7776,7 +7785,7 @@
         </p:nvSpPr>
         <p:spPr>
           <a:xfrm>
-            <a:off x="3870720" y="3777401"/>
+            <a:off x="3870720" y="3715858"/>
             <a:ext cx="723340" cy="151200"/>
           </a:xfrm>
           <a:prstGeom prst="rect">
@@ -7813,7 +7822,7 @@
         </p:nvSpPr>
         <p:spPr>
           <a:xfrm>
-            <a:off x="4656960" y="3777401"/>
+            <a:off x="4656960" y="3715858"/>
             <a:ext cx="959212" cy="151200"/>
           </a:xfrm>
           <a:prstGeom prst="rect">
@@ -7850,7 +7859,7 @@
         </p:nvSpPr>
         <p:spPr>
           <a:xfrm>
-            <a:off x="5670000" y="3777401"/>
+            <a:off x="5670000" y="3715858"/>
             <a:ext cx="644716" cy="151200"/>
           </a:xfrm>
           <a:prstGeom prst="rect">
@@ -7887,7 +7896,7 @@
         </p:nvSpPr>
         <p:spPr>
           <a:xfrm>
-            <a:off x="6380640" y="3777401"/>
+            <a:off x="6380640" y="3715858"/>
             <a:ext cx="644716" cy="151200"/>
           </a:xfrm>
           <a:prstGeom prst="rect">
@@ -7924,7 +7933,7 @@
         </p:nvSpPr>
         <p:spPr>
           <a:xfrm>
-            <a:off x="604800" y="4072241"/>
+            <a:off x="604800" y="3993097"/>
             <a:ext cx="1776902" cy="151200"/>
           </a:xfrm>
           <a:prstGeom prst="rect">
@@ -7961,7 +7970,7 @@
         </p:nvSpPr>
         <p:spPr>
           <a:xfrm>
-            <a:off x="2404080" y="4072241"/>
+            <a:off x="2404080" y="3993097"/>
             <a:ext cx="833414" cy="151200"/>
           </a:xfrm>
           <a:prstGeom prst="rect">
@@ -7998,7 +8007,7 @@
         </p:nvSpPr>
         <p:spPr>
           <a:xfrm>
-            <a:off x="3296160" y="4072241"/>
+            <a:off x="3296160" y="3993097"/>
             <a:ext cx="503193" cy="151200"/>
           </a:xfrm>
           <a:prstGeom prst="rect">
@@ -8035,7 +8044,7 @@
         </p:nvSpPr>
         <p:spPr>
           <a:xfrm>
-            <a:off x="3870720" y="4072241"/>
+            <a:off x="3870720" y="3993097"/>
             <a:ext cx="723340" cy="151200"/>
           </a:xfrm>
           <a:prstGeom prst="rect">
@@ -8072,7 +8081,7 @@
         </p:nvSpPr>
         <p:spPr>
           <a:xfrm>
-            <a:off x="4656960" y="4072241"/>
+            <a:off x="4656960" y="3993097"/>
             <a:ext cx="959212" cy="151200"/>
           </a:xfrm>
           <a:prstGeom prst="rect">
@@ -8109,7 +8118,7 @@
         </p:nvSpPr>
         <p:spPr>
           <a:xfrm>
-            <a:off x="5670000" y="4072241"/>
+            <a:off x="5670000" y="3993097"/>
             <a:ext cx="644716" cy="151200"/>
           </a:xfrm>
           <a:prstGeom prst="rect">
@@ -8146,7 +8155,7 @@
         </p:nvSpPr>
         <p:spPr>
           <a:xfrm>
-            <a:off x="6380640" y="4072241"/>
+            <a:off x="6380640" y="3993097"/>
             <a:ext cx="644716" cy="151200"/>
           </a:xfrm>
           <a:prstGeom prst="rect">
@@ -8183,7 +8192,7 @@
         </p:nvSpPr>
         <p:spPr>
           <a:xfrm>
-            <a:off x="604800" y="4367081"/>
+            <a:off x="604800" y="4270336"/>
             <a:ext cx="1776902" cy="151200"/>
           </a:xfrm>
           <a:prstGeom prst="rect">
@@ -8220,7 +8229,7 @@
         </p:nvSpPr>
         <p:spPr>
           <a:xfrm>
-            <a:off x="2404080" y="4367081"/>
+            <a:off x="2404080" y="4270336"/>
             <a:ext cx="833414" cy="151200"/>
           </a:xfrm>
           <a:prstGeom prst="rect">
@@ -8257,7 +8266,7 @@
         </p:nvSpPr>
         <p:spPr>
           <a:xfrm>
-            <a:off x="3296160" y="4367081"/>
+            <a:off x="3296160" y="4270336"/>
             <a:ext cx="503193" cy="151200"/>
           </a:xfrm>
           <a:prstGeom prst="rect">
@@ -8294,7 +8303,7 @@
         </p:nvSpPr>
         <p:spPr>
           <a:xfrm>
-            <a:off x="3870720" y="4367081"/>
+            <a:off x="3870720" y="4270336"/>
             <a:ext cx="723340" cy="151200"/>
           </a:xfrm>
           <a:prstGeom prst="rect">
@@ -8331,7 +8340,7 @@
         </p:nvSpPr>
         <p:spPr>
           <a:xfrm>
-            <a:off x="4656960" y="4367081"/>
+            <a:off x="4656960" y="4270336"/>
             <a:ext cx="959212" cy="151200"/>
           </a:xfrm>
           <a:prstGeom prst="rect">
@@ -8368,7 +8377,7 @@
         </p:nvSpPr>
         <p:spPr>
           <a:xfrm>
-            <a:off x="5670000" y="4367081"/>
+            <a:off x="5670000" y="4270336"/>
             <a:ext cx="644716" cy="151200"/>
           </a:xfrm>
           <a:prstGeom prst="rect">
@@ -8405,7 +8414,7 @@
         </p:nvSpPr>
         <p:spPr>
           <a:xfrm>
-            <a:off x="6380640" y="4367081"/>
+            <a:off x="6380640" y="4270336"/>
             <a:ext cx="644716" cy="151200"/>
           </a:xfrm>
           <a:prstGeom prst="rect">
@@ -8442,7 +8451,7 @@
         </p:nvSpPr>
         <p:spPr>
           <a:xfrm>
-            <a:off x="604800" y="4603567"/>
+            <a:off x="604800" y="4505878"/>
             <a:ext cx="1708560" cy="298974"/>
           </a:xfrm>
           <a:prstGeom prst="rect">
@@ -8479,7 +8488,7 @@
         </p:nvSpPr>
         <p:spPr>
           <a:xfrm>
-            <a:off x="2404080" y="4677395"/>
+            <a:off x="2404080" y="4579706"/>
             <a:ext cx="833414" cy="151200"/>
           </a:xfrm>
           <a:prstGeom prst="rect">
@@ -8516,7 +8525,7 @@
         </p:nvSpPr>
         <p:spPr>
           <a:xfrm>
-            <a:off x="3296160" y="4677395"/>
+            <a:off x="3296160" y="4579706"/>
             <a:ext cx="503193" cy="151200"/>
           </a:xfrm>
           <a:prstGeom prst="rect">
@@ -8553,7 +8562,7 @@
         </p:nvSpPr>
         <p:spPr>
           <a:xfrm>
-            <a:off x="3870720" y="4677395"/>
+            <a:off x="3870720" y="4579706"/>
             <a:ext cx="723340" cy="151200"/>
           </a:xfrm>
           <a:prstGeom prst="rect">
@@ -8590,7 +8599,7 @@
         </p:nvSpPr>
         <p:spPr>
           <a:xfrm>
-            <a:off x="4656960" y="4677395"/>
+            <a:off x="4656960" y="4579706"/>
             <a:ext cx="959212" cy="151200"/>
           </a:xfrm>
           <a:prstGeom prst="rect">
@@ -8627,7 +8636,7 @@
         </p:nvSpPr>
         <p:spPr>
           <a:xfrm>
-            <a:off x="5670000" y="4677395"/>
+            <a:off x="5670000" y="4579706"/>
             <a:ext cx="644716" cy="151200"/>
           </a:xfrm>
           <a:prstGeom prst="rect">
@@ -8664,7 +8673,7 @@
         </p:nvSpPr>
         <p:spPr>
           <a:xfrm>
-            <a:off x="6380640" y="4677395"/>
+            <a:off x="6380640" y="4579706"/>
             <a:ext cx="644716" cy="151200"/>
           </a:xfrm>
           <a:prstGeom prst="rect">
@@ -8701,7 +8710,7 @@
         </p:nvSpPr>
         <p:spPr>
           <a:xfrm>
-            <a:off x="604800" y="4987710"/>
+            <a:off x="604800" y="4889193"/>
             <a:ext cx="1776902" cy="151200"/>
           </a:xfrm>
           <a:prstGeom prst="rect">
@@ -8738,7 +8747,7 @@
         </p:nvSpPr>
         <p:spPr>
           <a:xfrm>
-            <a:off x="2404080" y="4987710"/>
+            <a:off x="2404080" y="4889193"/>
             <a:ext cx="833414" cy="151200"/>
           </a:xfrm>
           <a:prstGeom prst="rect">
@@ -8775,7 +8784,7 @@
         </p:nvSpPr>
         <p:spPr>
           <a:xfrm>
-            <a:off x="3296160" y="4987710"/>
+            <a:off x="3296160" y="4889193"/>
             <a:ext cx="503193" cy="151200"/>
           </a:xfrm>
           <a:prstGeom prst="rect">
@@ -8812,7 +8821,7 @@
         </p:nvSpPr>
         <p:spPr>
           <a:xfrm>
-            <a:off x="3870720" y="4987710"/>
+            <a:off x="3870720" y="4889193"/>
             <a:ext cx="723340" cy="151200"/>
           </a:xfrm>
           <a:prstGeom prst="rect">
@@ -8849,7 +8858,7 @@
         </p:nvSpPr>
         <p:spPr>
           <a:xfrm>
-            <a:off x="4656960" y="4987710"/>
+            <a:off x="4656960" y="4889193"/>
             <a:ext cx="959212" cy="151200"/>
           </a:xfrm>
           <a:prstGeom prst="rect">
@@ -8886,7 +8895,7 @@
         </p:nvSpPr>
         <p:spPr>
           <a:xfrm>
-            <a:off x="5670000" y="4987710"/>
+            <a:off x="5670000" y="4889193"/>
             <a:ext cx="644716" cy="151200"/>
           </a:xfrm>
           <a:prstGeom prst="rect">
@@ -8923,7 +8932,7 @@
         </p:nvSpPr>
         <p:spPr>
           <a:xfrm>
-            <a:off x="6380640" y="4987710"/>
+            <a:off x="6380640" y="4889193"/>
             <a:ext cx="644716" cy="151200"/>
           </a:xfrm>
           <a:prstGeom prst="rect">
@@ -8960,7 +8969,7 @@
         </p:nvSpPr>
         <p:spPr>
           <a:xfrm>
-            <a:off x="604800" y="5282550"/>
+            <a:off x="604800" y="5166433"/>
             <a:ext cx="1776902" cy="151200"/>
           </a:xfrm>
           <a:prstGeom prst="rect">
@@ -8997,7 +9006,7 @@
         </p:nvSpPr>
         <p:spPr>
           <a:xfrm>
-            <a:off x="2404080" y="5282550"/>
+            <a:off x="2404080" y="5166433"/>
             <a:ext cx="833414" cy="151200"/>
           </a:xfrm>
           <a:prstGeom prst="rect">
@@ -9034,7 +9043,7 @@
         </p:nvSpPr>
         <p:spPr>
           <a:xfrm>
-            <a:off x="3296160" y="5282550"/>
+            <a:off x="3296160" y="5166433"/>
             <a:ext cx="503193" cy="151200"/>
           </a:xfrm>
           <a:prstGeom prst="rect">
@@ -9071,7 +9080,7 @@
         </p:nvSpPr>
         <p:spPr>
           <a:xfrm>
-            <a:off x="3870720" y="5282550"/>
+            <a:off x="3870720" y="5166433"/>
             <a:ext cx="723340" cy="151200"/>
           </a:xfrm>
           <a:prstGeom prst="rect">
@@ -9108,7 +9117,7 @@
         </p:nvSpPr>
         <p:spPr>
           <a:xfrm>
-            <a:off x="4656960" y="5282550"/>
+            <a:off x="4656960" y="5166433"/>
             <a:ext cx="959212" cy="151200"/>
           </a:xfrm>
           <a:prstGeom prst="rect">
@@ -9145,7 +9154,7 @@
         </p:nvSpPr>
         <p:spPr>
           <a:xfrm>
-            <a:off x="5670000" y="5282550"/>
+            <a:off x="5670000" y="5166433"/>
             <a:ext cx="644716" cy="151200"/>
           </a:xfrm>
           <a:prstGeom prst="rect">
@@ -9182,7 +9191,7 @@
         </p:nvSpPr>
         <p:spPr>
           <a:xfrm>
-            <a:off x="6380640" y="5282550"/>
+            <a:off x="6380640" y="5166433"/>
             <a:ext cx="644716" cy="151200"/>
           </a:xfrm>
           <a:prstGeom prst="rect">
@@ -9219,7 +9228,7 @@
         </p:nvSpPr>
         <p:spPr>
           <a:xfrm>
-            <a:off x="604800" y="5577390"/>
+            <a:off x="604800" y="5443672"/>
             <a:ext cx="1776902" cy="151200"/>
           </a:xfrm>
           <a:prstGeom prst="rect">
@@ -9256,7 +9265,7 @@
         </p:nvSpPr>
         <p:spPr>
           <a:xfrm>
-            <a:off x="2404080" y="5577390"/>
+            <a:off x="2404080" y="5443672"/>
             <a:ext cx="833414" cy="151200"/>
           </a:xfrm>
           <a:prstGeom prst="rect">
@@ -9293,7 +9302,7 @@
         </p:nvSpPr>
         <p:spPr>
           <a:xfrm>
-            <a:off x="3296160" y="5577390"/>
+            <a:off x="3296160" y="5443672"/>
             <a:ext cx="503193" cy="151200"/>
           </a:xfrm>
           <a:prstGeom prst="rect">
@@ -9330,7 +9339,7 @@
         </p:nvSpPr>
         <p:spPr>
           <a:xfrm>
-            <a:off x="3870720" y="5577390"/>
+            <a:off x="3870720" y="5443672"/>
             <a:ext cx="723340" cy="151200"/>
           </a:xfrm>
           <a:prstGeom prst="rect">
@@ -9367,7 +9376,7 @@
         </p:nvSpPr>
         <p:spPr>
           <a:xfrm>
-            <a:off x="4656960" y="5577390"/>
+            <a:off x="4656960" y="5443672"/>
             <a:ext cx="959212" cy="151200"/>
           </a:xfrm>
           <a:prstGeom prst="rect">
@@ -9404,7 +9413,7 @@
         </p:nvSpPr>
         <p:spPr>
           <a:xfrm>
-            <a:off x="5670000" y="5577390"/>
+            <a:off x="5670000" y="5443672"/>
             <a:ext cx="644716" cy="151200"/>
           </a:xfrm>
           <a:prstGeom prst="rect">
@@ -9441,7 +9450,7 @@
         </p:nvSpPr>
         <p:spPr>
           <a:xfrm>
-            <a:off x="6380640" y="5577390"/>
+            <a:off x="6380640" y="5443672"/>
             <a:ext cx="644716" cy="151200"/>
           </a:xfrm>
           <a:prstGeom prst="rect">
@@ -9478,7 +9487,7 @@
         </p:nvSpPr>
         <p:spPr>
           <a:xfrm>
-            <a:off x="604800" y="5872230"/>
+            <a:off x="604800" y="5720911"/>
             <a:ext cx="1776902" cy="151200"/>
           </a:xfrm>
           <a:prstGeom prst="rect">
@@ -9515,7 +9524,7 @@
         </p:nvSpPr>
         <p:spPr>
           <a:xfrm>
-            <a:off x="2404080" y="5872230"/>
+            <a:off x="2404080" y="5720911"/>
             <a:ext cx="833414" cy="151200"/>
           </a:xfrm>
           <a:prstGeom prst="rect">
@@ -9552,7 +9561,7 @@
         </p:nvSpPr>
         <p:spPr>
           <a:xfrm>
-            <a:off x="3296160" y="5872230"/>
+            <a:off x="3296160" y="5720911"/>
             <a:ext cx="503193" cy="151200"/>
           </a:xfrm>
           <a:prstGeom prst="rect">
@@ -9589,7 +9598,7 @@
         </p:nvSpPr>
         <p:spPr>
           <a:xfrm>
-            <a:off x="3870720" y="5872230"/>
+            <a:off x="3870720" y="5720911"/>
             <a:ext cx="723340" cy="151200"/>
           </a:xfrm>
           <a:prstGeom prst="rect">
@@ -9626,7 +9635,7 @@
         </p:nvSpPr>
         <p:spPr>
           <a:xfrm>
-            <a:off x="4656960" y="5872230"/>
+            <a:off x="4656960" y="5720911"/>
             <a:ext cx="959212" cy="151200"/>
           </a:xfrm>
           <a:prstGeom prst="rect">
@@ -9663,7 +9672,7 @@
         </p:nvSpPr>
         <p:spPr>
           <a:xfrm>
-            <a:off x="5670000" y="5872230"/>
+            <a:off x="5670000" y="5720911"/>
             <a:ext cx="644716" cy="151200"/>
           </a:xfrm>
           <a:prstGeom prst="rect">
@@ -9700,7 +9709,7 @@
         </p:nvSpPr>
         <p:spPr>
           <a:xfrm>
-            <a:off x="6380640" y="5872230"/>
+            <a:off x="6380640" y="5720911"/>
             <a:ext cx="644716" cy="151200"/>
           </a:xfrm>
           <a:prstGeom prst="rect">
@@ -9737,7 +9746,7 @@
         </p:nvSpPr>
         <p:spPr>
           <a:xfrm>
-            <a:off x="604800" y="6167070"/>
+            <a:off x="604800" y="5998151"/>
             <a:ext cx="1776902" cy="151200"/>
           </a:xfrm>
           <a:prstGeom prst="rect">
@@ -9774,7 +9783,7 @@
         </p:nvSpPr>
         <p:spPr>
           <a:xfrm>
-            <a:off x="2404080" y="6167070"/>
+            <a:off x="2404080" y="5998151"/>
             <a:ext cx="833414" cy="151200"/>
           </a:xfrm>
           <a:prstGeom prst="rect">
@@ -9811,7 +9820,7 @@
         </p:nvSpPr>
         <p:spPr>
           <a:xfrm>
-            <a:off x="3296160" y="6167070"/>
+            <a:off x="3296160" y="5998151"/>
             <a:ext cx="503193" cy="151200"/>
           </a:xfrm>
           <a:prstGeom prst="rect">
@@ -9848,7 +9857,7 @@
         </p:nvSpPr>
         <p:spPr>
           <a:xfrm>
-            <a:off x="3870720" y="6167070"/>
+            <a:off x="3870720" y="5998151"/>
             <a:ext cx="723340" cy="151200"/>
           </a:xfrm>
           <a:prstGeom prst="rect">
@@ -9885,7 +9894,7 @@
         </p:nvSpPr>
         <p:spPr>
           <a:xfrm>
-            <a:off x="4656960" y="6167070"/>
+            <a:off x="4656960" y="5998151"/>
             <a:ext cx="959212" cy="151200"/>
           </a:xfrm>
           <a:prstGeom prst="rect">
@@ -9922,7 +9931,7 @@
         </p:nvSpPr>
         <p:spPr>
           <a:xfrm>
-            <a:off x="5670000" y="6167070"/>
+            <a:off x="5670000" y="5998151"/>
             <a:ext cx="644716" cy="151200"/>
           </a:xfrm>
           <a:prstGeom prst="rect">
@@ -9959,7 +9968,7 @@
         </p:nvSpPr>
         <p:spPr>
           <a:xfrm>
-            <a:off x="6380640" y="6167070"/>
+            <a:off x="6380640" y="5998151"/>
             <a:ext cx="644716" cy="151200"/>
           </a:xfrm>
           <a:prstGeom prst="rect">
@@ -9996,7 +10005,7 @@
         </p:nvSpPr>
         <p:spPr>
           <a:xfrm>
-            <a:off x="604800" y="6461910"/>
+            <a:off x="604800" y="6275390"/>
             <a:ext cx="1776902" cy="151200"/>
           </a:xfrm>
           <a:prstGeom prst="rect">
@@ -10033,7 +10042,7 @@
         </p:nvSpPr>
         <p:spPr>
           <a:xfrm>
-            <a:off x="2404080" y="6461910"/>
+            <a:off x="2404080" y="6275390"/>
             <a:ext cx="833414" cy="151200"/>
           </a:xfrm>
           <a:prstGeom prst="rect">
@@ -10070,7 +10079,7 @@
         </p:nvSpPr>
         <p:spPr>
           <a:xfrm>
-            <a:off x="3296160" y="6461910"/>
+            <a:off x="3296160" y="6275390"/>
             <a:ext cx="503193" cy="151200"/>
           </a:xfrm>
           <a:prstGeom prst="rect">
@@ -10107,7 +10116,7 @@
         </p:nvSpPr>
         <p:spPr>
           <a:xfrm>
-            <a:off x="3870720" y="6461910"/>
+            <a:off x="3870720" y="6275390"/>
             <a:ext cx="723340" cy="151200"/>
           </a:xfrm>
           <a:prstGeom prst="rect">
@@ -10144,7 +10153,7 @@
         </p:nvSpPr>
         <p:spPr>
           <a:xfrm>
-            <a:off x="4656960" y="6461910"/>
+            <a:off x="4656960" y="6275390"/>
             <a:ext cx="959212" cy="151200"/>
           </a:xfrm>
           <a:prstGeom prst="rect">
@@ -10181,7 +10190,7 @@
         </p:nvSpPr>
         <p:spPr>
           <a:xfrm>
-            <a:off x="5670000" y="6461910"/>
+            <a:off x="5670000" y="6275390"/>
             <a:ext cx="644716" cy="151200"/>
           </a:xfrm>
           <a:prstGeom prst="rect">
@@ -10218,7 +10227,7 @@
         </p:nvSpPr>
         <p:spPr>
           <a:xfrm>
-            <a:off x="6380640" y="6461910"/>
+            <a:off x="6380640" y="6275390"/>
             <a:ext cx="644716" cy="151200"/>
           </a:xfrm>
           <a:prstGeom prst="rect">
@@ -10255,7 +10264,7 @@
         </p:nvSpPr>
         <p:spPr>
           <a:xfrm>
-            <a:off x="604800" y="6756750"/>
+            <a:off x="604800" y="6552630"/>
             <a:ext cx="1776902" cy="151200"/>
           </a:xfrm>
           <a:prstGeom prst="rect">
@@ -10292,7 +10301,7 @@
         </p:nvSpPr>
         <p:spPr>
           <a:xfrm>
-            <a:off x="2404080" y="6756750"/>
+            <a:off x="2404080" y="6552630"/>
             <a:ext cx="833414" cy="151200"/>
           </a:xfrm>
           <a:prstGeom prst="rect">
@@ -10329,7 +10338,7 @@
         </p:nvSpPr>
         <p:spPr>
           <a:xfrm>
-            <a:off x="3296160" y="6756750"/>
+            <a:off x="3296160" y="6552630"/>
             <a:ext cx="503193" cy="151200"/>
           </a:xfrm>
           <a:prstGeom prst="rect">
@@ -10366,7 +10375,7 @@
         </p:nvSpPr>
         <p:spPr>
           <a:xfrm>
-            <a:off x="3870720" y="6756750"/>
+            <a:off x="3870720" y="6552630"/>
             <a:ext cx="723340" cy="151200"/>
           </a:xfrm>
           <a:prstGeom prst="rect">
@@ -10403,7 +10412,7 @@
         </p:nvSpPr>
         <p:spPr>
           <a:xfrm>
-            <a:off x="4656960" y="6756750"/>
+            <a:off x="4656960" y="6552630"/>
             <a:ext cx="959212" cy="151200"/>
           </a:xfrm>
           <a:prstGeom prst="rect">
@@ -10440,7 +10449,7 @@
         </p:nvSpPr>
         <p:spPr>
           <a:xfrm>
-            <a:off x="5670000" y="6756750"/>
+            <a:off x="5670000" y="6552630"/>
             <a:ext cx="644716" cy="151200"/>
           </a:xfrm>
           <a:prstGeom prst="rect">
@@ -10477,7 +10486,7 @@
         </p:nvSpPr>
         <p:spPr>
           <a:xfrm>
-            <a:off x="6380640" y="6756750"/>
+            <a:off x="6380640" y="6552630"/>
             <a:ext cx="644716" cy="151200"/>
           </a:xfrm>
           <a:prstGeom prst="rect">
@@ -10514,7 +10523,7 @@
         </p:nvSpPr>
         <p:spPr>
           <a:xfrm>
-            <a:off x="604800" y="7051590"/>
+            <a:off x="604800" y="6829869"/>
             <a:ext cx="1776902" cy="151200"/>
           </a:xfrm>
           <a:prstGeom prst="rect">
@@ -10551,7 +10560,7 @@
         </p:nvSpPr>
         <p:spPr>
           <a:xfrm>
-            <a:off x="2404080" y="7051590"/>
+            <a:off x="2404080" y="6829869"/>
             <a:ext cx="833414" cy="151200"/>
           </a:xfrm>
           <a:prstGeom prst="rect">
@@ -10588,7 +10597,7 @@
         </p:nvSpPr>
         <p:spPr>
           <a:xfrm>
-            <a:off x="3296160" y="7051590"/>
+            <a:off x="3296160" y="6829869"/>
             <a:ext cx="503193" cy="151200"/>
           </a:xfrm>
           <a:prstGeom prst="rect">
@@ -10625,7 +10634,7 @@
         </p:nvSpPr>
         <p:spPr>
           <a:xfrm>
-            <a:off x="3870720" y="7051590"/>
+            <a:off x="3870720" y="6829869"/>
             <a:ext cx="723340" cy="151200"/>
           </a:xfrm>
           <a:prstGeom prst="rect">
@@ -10662,7 +10671,7 @@
         </p:nvSpPr>
         <p:spPr>
           <a:xfrm>
-            <a:off x="4656960" y="7051590"/>
+            <a:off x="4656960" y="6829869"/>
             <a:ext cx="959212" cy="151200"/>
           </a:xfrm>
           <a:prstGeom prst="rect">
@@ -10699,7 +10708,7 @@
         </p:nvSpPr>
         <p:spPr>
           <a:xfrm>
-            <a:off x="5670000" y="7051590"/>
+            <a:off x="5670000" y="6829869"/>
             <a:ext cx="644716" cy="151200"/>
           </a:xfrm>
           <a:prstGeom prst="rect">
@@ -10736,7 +10745,7 @@
         </p:nvSpPr>
         <p:spPr>
           <a:xfrm>
-            <a:off x="6380640" y="7051590"/>
+            <a:off x="6380640" y="6829869"/>
             <a:ext cx="644716" cy="151200"/>
           </a:xfrm>
           <a:prstGeom prst="rect">
@@ -10773,7 +10782,7 @@
         </p:nvSpPr>
         <p:spPr>
           <a:xfrm>
-            <a:off x="604800" y="7288076"/>
+            <a:off x="604800" y="7065410"/>
             <a:ext cx="1708560" cy="298974"/>
           </a:xfrm>
           <a:prstGeom prst="rect">
@@ -10810,7 +10819,7 @@
         </p:nvSpPr>
         <p:spPr>
           <a:xfrm>
-            <a:off x="2404080" y="7361904"/>
+            <a:off x="2404080" y="7139238"/>
             <a:ext cx="833414" cy="151200"/>
           </a:xfrm>
           <a:prstGeom prst="rect">
@@ -10847,7 +10856,7 @@
         </p:nvSpPr>
         <p:spPr>
           <a:xfrm>
-            <a:off x="3296160" y="7361904"/>
+            <a:off x="3296160" y="7139238"/>
             <a:ext cx="503193" cy="151200"/>
           </a:xfrm>
           <a:prstGeom prst="rect">
@@ -10884,7 +10893,7 @@
         </p:nvSpPr>
         <p:spPr>
           <a:xfrm>
-            <a:off x="3870720" y="7361904"/>
+            <a:off x="3870720" y="7139238"/>
             <a:ext cx="723340" cy="151200"/>
           </a:xfrm>
           <a:prstGeom prst="rect">
@@ -10921,7 +10930,7 @@
         </p:nvSpPr>
         <p:spPr>
           <a:xfrm>
-            <a:off x="4656960" y="7361904"/>
+            <a:off x="4656960" y="7139238"/>
             <a:ext cx="959212" cy="151200"/>
           </a:xfrm>
           <a:prstGeom prst="rect">
@@ -10958,7 +10967,7 @@
         </p:nvSpPr>
         <p:spPr>
           <a:xfrm>
-            <a:off x="5670000" y="7361904"/>
+            <a:off x="5670000" y="7139238"/>
             <a:ext cx="644716" cy="151200"/>
           </a:xfrm>
           <a:prstGeom prst="rect">
@@ -10995,7 +11004,7 @@
         </p:nvSpPr>
         <p:spPr>
           <a:xfrm>
-            <a:off x="6380640" y="7361904"/>
+            <a:off x="6380640" y="7139238"/>
             <a:ext cx="644716" cy="151200"/>
           </a:xfrm>
           <a:prstGeom prst="rect">
@@ -11032,7 +11041,7 @@
         </p:nvSpPr>
         <p:spPr>
           <a:xfrm>
-            <a:off x="604800" y="7672218"/>
+            <a:off x="604800" y="7448726"/>
             <a:ext cx="1776902" cy="151200"/>
           </a:xfrm>
           <a:prstGeom prst="rect">
@@ -11069,7 +11078,7 @@
         </p:nvSpPr>
         <p:spPr>
           <a:xfrm>
-            <a:off x="2404080" y="7672218"/>
+            <a:off x="2404080" y="7448726"/>
             <a:ext cx="833414" cy="151200"/>
           </a:xfrm>
           <a:prstGeom prst="rect">
@@ -11106,7 +11115,7 @@
         </p:nvSpPr>
         <p:spPr>
           <a:xfrm>
-            <a:off x="3296160" y="7672218"/>
+            <a:off x="3296160" y="7448726"/>
             <a:ext cx="503193" cy="151200"/>
           </a:xfrm>
           <a:prstGeom prst="rect">
@@ -11143,7 +11152,7 @@
         </p:nvSpPr>
         <p:spPr>
           <a:xfrm>
-            <a:off x="3870720" y="7672218"/>
+            <a:off x="3870720" y="7448726"/>
             <a:ext cx="723340" cy="151200"/>
           </a:xfrm>
           <a:prstGeom prst="rect">
@@ -11180,7 +11189,7 @@
         </p:nvSpPr>
         <p:spPr>
           <a:xfrm>
-            <a:off x="4656960" y="7672218"/>
+            <a:off x="4656960" y="7448726"/>
             <a:ext cx="959212" cy="151200"/>
           </a:xfrm>
           <a:prstGeom prst="rect">
@@ -11217,7 +11226,7 @@
         </p:nvSpPr>
         <p:spPr>
           <a:xfrm>
-            <a:off x="5670000" y="7672218"/>
+            <a:off x="5670000" y="7448726"/>
             <a:ext cx="644716" cy="151200"/>
           </a:xfrm>
           <a:prstGeom prst="rect">
@@ -11254,7 +11263,7 @@
         </p:nvSpPr>
         <p:spPr>
           <a:xfrm>
-            <a:off x="6380640" y="7672218"/>
+            <a:off x="6380640" y="7448726"/>
             <a:ext cx="644716" cy="151200"/>
           </a:xfrm>
           <a:prstGeom prst="rect">
@@ -11291,7 +11300,7 @@
         </p:nvSpPr>
         <p:spPr>
           <a:xfrm>
-            <a:off x="604800" y="7908705"/>
+            <a:off x="604800" y="7684267"/>
             <a:ext cx="1708560" cy="298974"/>
           </a:xfrm>
           <a:prstGeom prst="rect">
@@ -11328,7 +11337,7 @@
         </p:nvSpPr>
         <p:spPr>
           <a:xfrm>
-            <a:off x="2404080" y="7982533"/>
+            <a:off x="2404080" y="7758095"/>
             <a:ext cx="833414" cy="151200"/>
           </a:xfrm>
           <a:prstGeom prst="rect">
@@ -11365,7 +11374,7 @@
         </p:nvSpPr>
         <p:spPr>
           <a:xfrm>
-            <a:off x="3296160" y="7982533"/>
+            <a:off x="3296160" y="7758095"/>
             <a:ext cx="503193" cy="151200"/>
           </a:xfrm>
           <a:prstGeom prst="rect">
@@ -11402,7 +11411,7 @@
         </p:nvSpPr>
         <p:spPr>
           <a:xfrm>
-            <a:off x="3870720" y="7982533"/>
+            <a:off x="3870720" y="7758095"/>
             <a:ext cx="723340" cy="151200"/>
           </a:xfrm>
           <a:prstGeom prst="rect">
@@ -11439,7 +11448,7 @@
         </p:nvSpPr>
         <p:spPr>
           <a:xfrm>
-            <a:off x="4656960" y="7982533"/>
+            <a:off x="4656960" y="7758095"/>
             <a:ext cx="959212" cy="151200"/>
           </a:xfrm>
           <a:prstGeom prst="rect">
@@ -11476,7 +11485,7 @@
         </p:nvSpPr>
         <p:spPr>
           <a:xfrm>
-            <a:off x="5670000" y="7982533"/>
+            <a:off x="5670000" y="7758095"/>
             <a:ext cx="644716" cy="151200"/>
           </a:xfrm>
           <a:prstGeom prst="rect">
@@ -11513,7 +11522,7 @@
         </p:nvSpPr>
         <p:spPr>
           <a:xfrm>
-            <a:off x="6380640" y="7982533"/>
+            <a:off x="6380640" y="7758095"/>
             <a:ext cx="644716" cy="151200"/>
           </a:xfrm>
           <a:prstGeom prst="rect">
@@ -11550,7 +11559,7 @@
         </p:nvSpPr>
         <p:spPr>
           <a:xfrm>
-            <a:off x="604800" y="8292847"/>
+            <a:off x="604800" y="8067583"/>
             <a:ext cx="1776902" cy="151200"/>
           </a:xfrm>
           <a:prstGeom prst="rect">
@@ -11587,7 +11596,7 @@
         </p:nvSpPr>
         <p:spPr>
           <a:xfrm>
-            <a:off x="2404080" y="8292847"/>
+            <a:off x="2404080" y="8067583"/>
             <a:ext cx="833414" cy="151200"/>
           </a:xfrm>
           <a:prstGeom prst="rect">
@@ -11624,7 +11633,7 @@
         </p:nvSpPr>
         <p:spPr>
           <a:xfrm>
-            <a:off x="3296160" y="8292847"/>
+            <a:off x="3296160" y="8067583"/>
             <a:ext cx="503193" cy="151200"/>
           </a:xfrm>
           <a:prstGeom prst="rect">
@@ -11661,7 +11670,7 @@
         </p:nvSpPr>
         <p:spPr>
           <a:xfrm>
-            <a:off x="3870720" y="8292847"/>
+            <a:off x="3870720" y="8067583"/>
             <a:ext cx="723340" cy="151200"/>
           </a:xfrm>
           <a:prstGeom prst="rect">
@@ -11698,7 +11707,7 @@
         </p:nvSpPr>
         <p:spPr>
           <a:xfrm>
-            <a:off x="4656960" y="8292847"/>
+            <a:off x="4656960" y="8067583"/>
             <a:ext cx="959212" cy="151200"/>
           </a:xfrm>
           <a:prstGeom prst="rect">
@@ -11735,7 +11744,7 @@
         </p:nvSpPr>
         <p:spPr>
           <a:xfrm>
-            <a:off x="5670000" y="8292847"/>
+            <a:off x="5670000" y="8067583"/>
             <a:ext cx="644716" cy="151200"/>
           </a:xfrm>
           <a:prstGeom prst="rect">
@@ -11772,7 +11781,7 @@
         </p:nvSpPr>
         <p:spPr>
           <a:xfrm>
-            <a:off x="6380640" y="8292847"/>
+            <a:off x="6380640" y="8067583"/>
             <a:ext cx="644716" cy="151200"/>
           </a:xfrm>
           <a:prstGeom prst="rect">
@@ -11809,7 +11818,7 @@
         </p:nvSpPr>
         <p:spPr>
           <a:xfrm>
-            <a:off x="604800" y="8587687"/>
+            <a:off x="604800" y="8344822"/>
             <a:ext cx="1776902" cy="151200"/>
           </a:xfrm>
           <a:prstGeom prst="rect">
@@ -11846,7 +11855,7 @@
         </p:nvSpPr>
         <p:spPr>
           <a:xfrm>
-            <a:off x="2404080" y="8587687"/>
+            <a:off x="2404080" y="8344822"/>
             <a:ext cx="833414" cy="151200"/>
           </a:xfrm>
           <a:prstGeom prst="rect">
@@ -11883,7 +11892,7 @@
         </p:nvSpPr>
         <p:spPr>
           <a:xfrm>
-            <a:off x="3296160" y="8587687"/>
+            <a:off x="3296160" y="8344822"/>
             <a:ext cx="503193" cy="151200"/>
           </a:xfrm>
           <a:prstGeom prst="rect">
@@ -11920,7 +11929,7 @@
         </p:nvSpPr>
         <p:spPr>
           <a:xfrm>
-            <a:off x="3870720" y="8587687"/>
+            <a:off x="3870720" y="8344822"/>
             <a:ext cx="723340" cy="151200"/>
           </a:xfrm>
           <a:prstGeom prst="rect">
@@ -11957,7 +11966,7 @@
         </p:nvSpPr>
         <p:spPr>
           <a:xfrm>
-            <a:off x="4656960" y="8587687"/>
+            <a:off x="4656960" y="8344822"/>
             <a:ext cx="959212" cy="151200"/>
           </a:xfrm>
           <a:prstGeom prst="rect">
@@ -11994,7 +12003,7 @@
         </p:nvSpPr>
         <p:spPr>
           <a:xfrm>
-            <a:off x="5670000" y="8587687"/>
+            <a:off x="5670000" y="8344822"/>
             <a:ext cx="644716" cy="151200"/>
           </a:xfrm>
           <a:prstGeom prst="rect">
@@ -12031,7 +12040,7 @@
         </p:nvSpPr>
         <p:spPr>
           <a:xfrm>
-            <a:off x="6380640" y="8587687"/>
+            <a:off x="6380640" y="8344822"/>
             <a:ext cx="644716" cy="151200"/>
           </a:xfrm>
           <a:prstGeom prst="rect">
@@ -12068,7 +12077,7 @@
         </p:nvSpPr>
         <p:spPr>
           <a:xfrm>
-            <a:off x="604800" y="8882527"/>
+            <a:off x="604800" y="8622061"/>
             <a:ext cx="1776902" cy="151200"/>
           </a:xfrm>
           <a:prstGeom prst="rect">
@@ -12105,7 +12114,7 @@
         </p:nvSpPr>
         <p:spPr>
           <a:xfrm>
-            <a:off x="2404080" y="8882527"/>
+            <a:off x="2404080" y="8622061"/>
             <a:ext cx="833414" cy="151200"/>
           </a:xfrm>
           <a:prstGeom prst="rect">
@@ -12142,7 +12151,7 @@
         </p:nvSpPr>
         <p:spPr>
           <a:xfrm>
-            <a:off x="3296160" y="8882527"/>
+            <a:off x="3296160" y="8622061"/>
             <a:ext cx="503193" cy="151200"/>
           </a:xfrm>
           <a:prstGeom prst="rect">
@@ -12179,7 +12188,7 @@
         </p:nvSpPr>
         <p:spPr>
           <a:xfrm>
-            <a:off x="3870720" y="8882527"/>
+            <a:off x="3870720" y="8622061"/>
             <a:ext cx="723340" cy="151200"/>
           </a:xfrm>
           <a:prstGeom prst="rect">
@@ -12216,7 +12225,7 @@
         </p:nvSpPr>
         <p:spPr>
           <a:xfrm>
-            <a:off x="4656960" y="8882527"/>
+            <a:off x="4656960" y="8622061"/>
             <a:ext cx="959212" cy="151200"/>
           </a:xfrm>
           <a:prstGeom prst="rect">
@@ -12253,7 +12262,7 @@
         </p:nvSpPr>
         <p:spPr>
           <a:xfrm>
-            <a:off x="5670000" y="8882527"/>
+            <a:off x="5670000" y="8622061"/>
             <a:ext cx="644716" cy="151200"/>
           </a:xfrm>
           <a:prstGeom prst="rect">
@@ -12290,7 +12299,7 @@
         </p:nvSpPr>
         <p:spPr>
           <a:xfrm>
-            <a:off x="6380640" y="8882527"/>
+            <a:off x="6380640" y="8622061"/>
             <a:ext cx="644716" cy="151200"/>
           </a:xfrm>
           <a:prstGeom prst="rect">
@@ -12327,7 +12336,7 @@
         </p:nvSpPr>
         <p:spPr>
           <a:xfrm>
-            <a:off x="604800" y="9177367"/>
+            <a:off x="604800" y="8899301"/>
             <a:ext cx="1776902" cy="151200"/>
           </a:xfrm>
           <a:prstGeom prst="rect">
@@ -12364,7 +12373,7 @@
         </p:nvSpPr>
         <p:spPr>
           <a:xfrm>
-            <a:off x="2404080" y="9177367"/>
+            <a:off x="2404080" y="8899301"/>
             <a:ext cx="833414" cy="151200"/>
           </a:xfrm>
           <a:prstGeom prst="rect">
@@ -12401,7 +12410,7 @@
         </p:nvSpPr>
         <p:spPr>
           <a:xfrm>
-            <a:off x="3296160" y="9177367"/>
+            <a:off x="3296160" y="8899301"/>
             <a:ext cx="503193" cy="151200"/>
           </a:xfrm>
           <a:prstGeom prst="rect">
@@ -12438,7 +12447,7 @@
         </p:nvSpPr>
         <p:spPr>
           <a:xfrm>
-            <a:off x="3870720" y="9177367"/>
+            <a:off x="3870720" y="8899301"/>
             <a:ext cx="723340" cy="151200"/>
           </a:xfrm>
           <a:prstGeom prst="rect">
@@ -12475,7 +12484,7 @@
         </p:nvSpPr>
         <p:spPr>
           <a:xfrm>
-            <a:off x="4656960" y="9177367"/>
+            <a:off x="4656960" y="8899301"/>
             <a:ext cx="959212" cy="151200"/>
           </a:xfrm>
           <a:prstGeom prst="rect">
@@ -12512,7 +12521,7 @@
         </p:nvSpPr>
         <p:spPr>
           <a:xfrm>
-            <a:off x="5670000" y="9177367"/>
+            <a:off x="5670000" y="8899301"/>
             <a:ext cx="644716" cy="151200"/>
           </a:xfrm>
           <a:prstGeom prst="rect">
@@ -12549,7 +12558,7 @@
         </p:nvSpPr>
         <p:spPr>
           <a:xfrm>
-            <a:off x="6380640" y="9177367"/>
+            <a:off x="6380640" y="8899301"/>
             <a:ext cx="644716" cy="151200"/>
           </a:xfrm>
           <a:prstGeom prst="rect">
@@ -12586,7 +12595,7 @@
         </p:nvSpPr>
         <p:spPr>
           <a:xfrm>
-            <a:off x="604800" y="9472207"/>
+            <a:off x="604800" y="9177131"/>
             <a:ext cx="1776902" cy="151200"/>
           </a:xfrm>
           <a:prstGeom prst="rect">
@@ -12623,7 +12632,7 @@
         </p:nvSpPr>
         <p:spPr>
           <a:xfrm>
-            <a:off x="2404080" y="9472207"/>
+            <a:off x="2404080" y="9177131"/>
             <a:ext cx="833414" cy="151200"/>
           </a:xfrm>
           <a:prstGeom prst="rect">
@@ -12660,7 +12669,7 @@
         </p:nvSpPr>
         <p:spPr>
           <a:xfrm>
-            <a:off x="3296160" y="9472207"/>
+            <a:off x="3296160" y="9177131"/>
             <a:ext cx="503193" cy="151200"/>
           </a:xfrm>
           <a:prstGeom prst="rect">
@@ -12697,7 +12706,7 @@
         </p:nvSpPr>
         <p:spPr>
           <a:xfrm>
-            <a:off x="3870720" y="9472207"/>
+            <a:off x="3870720" y="9177131"/>
             <a:ext cx="723340" cy="151200"/>
           </a:xfrm>
           <a:prstGeom prst="rect">
@@ -12734,7 +12743,7 @@
         </p:nvSpPr>
         <p:spPr>
           <a:xfrm>
-            <a:off x="4656960" y="9472207"/>
+            <a:off x="4656960" y="9177131"/>
             <a:ext cx="959212" cy="151200"/>
           </a:xfrm>
           <a:prstGeom prst="rect">
@@ -12771,7 +12780,7 @@
         </p:nvSpPr>
         <p:spPr>
           <a:xfrm>
-            <a:off x="5670000" y="9472207"/>
+            <a:off x="5670000" y="9177131"/>
             <a:ext cx="644716" cy="151200"/>
           </a:xfrm>
           <a:prstGeom prst="rect">
@@ -12808,7 +12817,7 @@
         </p:nvSpPr>
         <p:spPr>
           <a:xfrm>
-            <a:off x="6380640" y="9472207"/>
+            <a:off x="6380640" y="9177131"/>
             <a:ext cx="644716" cy="151200"/>
           </a:xfrm>
           <a:prstGeom prst="rect">

--- a/AutomaTivio/saida/2026-08/pptx/Tivio Banks - Relatório de Gestão - Agosto 2026.pptx
+++ b/AutomaTivio/saida/2026-08/pptx/Tivio Banks - Relatório de Gestão - Agosto 2026.pptx
@@ -3150,7 +3150,7 @@
               <a:t>TIVIO BANKS RENDA FIXA CRÉDITO PRIVADO FIF – RL </a:t>
             </a:r>
             <a:r>
-              <a:rPr sz="833" b="0" i="0">
+              <a:rPr sz="829" b="0" i="0">
                 <a:solidFill>
                   <a:srgbClr val="FFFFFF"/>
                 </a:solidFill>

--- a/AutomaTivio/saida/2026-08/pptx/Tivio Banks - Relatório de Gestão - Agosto 2026.pptx
+++ b/AutomaTivio/saida/2026-08/pptx/Tivio Banks - Relatório de Gestão - Agosto 2026.pptx
@@ -5435,8 +5435,8 @@
         </p:nvSpPr>
         <p:spPr>
           <a:xfrm>
-            <a:off x="3802680" y="5646256"/>
-            <a:ext cx="1603929" cy="120960"/>
+            <a:off x="3802680" y="6542825"/>
+            <a:ext cx="1603929" cy="143640"/>
           </a:xfrm>
           <a:prstGeom prst="rect">
             <a:avLst/>
@@ -5449,11 +5449,11 @@
           <a:p>
             <a:pPr algn="r">
               <a:lnSpc>
-                <a:spcPts val="890"/>
-              </a:lnSpc>
-            </a:pPr>
-            <a:r>
-              <a:rPr sz="809" b="0" i="0">
+                <a:spcPts val="1047"/>
+              </a:lnSpc>
+            </a:pPr>
+            <a:r>
+              <a:rPr sz="952" b="0" i="0">
                 <a:solidFill>
                   <a:srgbClr val="222222"/>
                 </a:solidFill>
@@ -5472,8 +5472,8 @@
         </p:nvSpPr>
         <p:spPr>
           <a:xfrm>
-            <a:off x="6752497" y="5638578"/>
-            <a:ext cx="466215" cy="143640"/>
+            <a:off x="6752497" y="6533730"/>
+            <a:ext cx="524569" cy="166320"/>
           </a:xfrm>
           <a:prstGeom prst="rect">
             <a:avLst/>
@@ -5486,49 +5486,49 @@
           <a:p>
             <a:pPr algn="l">
               <a:lnSpc>
-                <a:spcPts val="1142"/>
+                <a:spcPts val="1285"/>
+              </a:lnSpc>
+            </a:pPr>
+            <a:r>
+              <a:rPr sz="1071" b="0" i="0">
+                <a:solidFill>
+                  <a:srgbClr val="5A82A0"/>
+                </a:solidFill>
+                <a:latin typeface="Versos"/>
+              </a:rPr>
+              <a:t>75,69%</a:t>
+            </a:r>
+          </a:p>
+        </p:txBody>
+      </p:sp>
+      <p:sp>
+        <p:nvSpPr>
+          <p:cNvPr id="67" name="TextBox 66"/>
+          <p:cNvSpPr txBox="1"/>
+          <p:nvPr/>
+        </p:nvSpPr>
+        <p:spPr>
+          <a:xfrm>
+            <a:off x="3802680" y="8824646"/>
+            <a:ext cx="1603929" cy="143640"/>
+          </a:xfrm>
+          <a:prstGeom prst="rect">
+            <a:avLst/>
+          </a:prstGeom>
+          <a:noFill/>
+        </p:spPr>
+        <p:txBody>
+          <a:bodyPr wrap="none" lIns="0" rIns="0" tIns="0" bIns="0" anchor="t"/>
+          <a:lstStyle/>
+          <a:p>
+            <a:pPr algn="r">
+              <a:lnSpc>
+                <a:spcPts val="1047"/>
               </a:lnSpc>
             </a:pPr>
             <a:r>
               <a:rPr sz="952" b="0" i="0">
                 <a:solidFill>
-                  <a:srgbClr val="111111"/>
-                </a:solidFill>
-                <a:latin typeface="Versos"/>
-              </a:rPr>
-              <a:t>75,69%</a:t>
-            </a:r>
-          </a:p>
-        </p:txBody>
-      </p:sp>
-      <p:sp>
-        <p:nvSpPr>
-          <p:cNvPr id="67" name="TextBox 66"/>
-          <p:cNvSpPr txBox="1"/>
-          <p:nvPr/>
-        </p:nvSpPr>
-        <p:spPr>
-          <a:xfrm>
-            <a:off x="3802680" y="6114976"/>
-            <a:ext cx="1603929" cy="120960"/>
-          </a:xfrm>
-          <a:prstGeom prst="rect">
-            <a:avLst/>
-          </a:prstGeom>
-          <a:noFill/>
-        </p:spPr>
-        <p:txBody>
-          <a:bodyPr wrap="none" lIns="0" rIns="0" tIns="0" bIns="0" anchor="t"/>
-          <a:lstStyle/>
-          <a:p>
-            <a:pPr algn="r">
-              <a:lnSpc>
-                <a:spcPts val="890"/>
-              </a:lnSpc>
-            </a:pPr>
-            <a:r>
-              <a:rPr sz="809" b="0" i="0">
-                <a:solidFill>
                   <a:srgbClr val="222222"/>
                 </a:solidFill>
                 <a:latin typeface="Versos"/>
@@ -5546,8 +5546,8 @@
         </p:nvSpPr>
         <p:spPr>
           <a:xfrm>
-            <a:off x="5892075" y="6107298"/>
-            <a:ext cx="422849" cy="143640"/>
+            <a:off x="5892075" y="8815550"/>
+            <a:ext cx="475675" cy="166320"/>
           </a:xfrm>
           <a:prstGeom prst="rect">
             <a:avLst/>
@@ -5560,13 +5560,13 @@
           <a:p>
             <a:pPr algn="l">
               <a:lnSpc>
-                <a:spcPts val="1142"/>
-              </a:lnSpc>
-            </a:pPr>
-            <a:r>
-              <a:rPr sz="952" b="0" i="0">
-                <a:solidFill>
-                  <a:srgbClr val="111111"/>
+                <a:spcPts val="1285"/>
+              </a:lnSpc>
+            </a:pPr>
+            <a:r>
+              <a:rPr sz="1071" b="0" i="0">
+                <a:solidFill>
+                  <a:srgbClr val="5A82A0"/>
                 </a:solidFill>
                 <a:latin typeface="Versos"/>
               </a:rPr>

--- a/AutomaTivio/saida/2026-08/pptx/Tivio Banks - Relatório de Gestão - Agosto 2026.pptx
+++ b/AutomaTivio/saida/2026-08/pptx/Tivio Banks - Relatório de Gestão - Agosto 2026.pptx
@@ -13373,7 +13373,7 @@
                 </a:solidFill>
                 <a:latin typeface="Versos"/>
               </a:rPr>
-              <a:t>Patrimônio líquido</a:t>
+              <a:t>Taxa de performance</a:t>
             </a:r>
           </a:p>
         </p:txBody>
@@ -13410,7 +13410,7 @@
                 </a:solidFill>
                 <a:latin typeface="Versos"/>
               </a:rPr>
-              <a:t>R$ 1.793.381.077,96</a:t>
+              <a:t>Não há</a:t>
             </a:r>
           </a:p>
         </p:txBody>
@@ -13447,7 +13447,7 @@
                 </a:solidFill>
                 <a:latin typeface="Versos"/>
               </a:rPr>
-              <a:t>Taxa de performance</a:t>
+              <a:t>Informações Operacionais</a:t>
             </a:r>
           </a:p>
         </p:txBody>
@@ -13461,6 +13461,155 @@
         <p:spPr>
           <a:xfrm>
             <a:off x="3878280" y="1883857"/>
+            <a:ext cx="3281040" cy="1366351"/>
+          </a:xfrm>
+          <a:prstGeom prst="rect">
+            <a:avLst/>
+          </a:prstGeom>
+          <a:noFill/>
+        </p:spPr>
+        <p:txBody>
+          <a:bodyPr wrap="square" lIns="0" rIns="0" tIns="0" bIns="0" anchor="t"/>
+          <a:lstStyle/>
+          <a:p>
+            <a:pPr algn="l">
+              <a:lnSpc>
+                <a:spcPts val="1333"/>
+              </a:lnSpc>
+            </a:pPr>
+            <a:r>
+              <a:rPr sz="1190" b="0" i="0">
+                <a:solidFill>
+                  <a:srgbClr val="222222"/>
+                </a:solidFill>
+                <a:latin typeface="Versos"/>
+              </a:rPr>
+              <a:t>Aplicação:</a:t>
+            </a:r>
+          </a:p>
+          <a:p>
+            <a:pPr algn="l">
+              <a:lnSpc>
+                <a:spcPts val="1333"/>
+              </a:lnSpc>
+            </a:pPr>
+            <a:r>
+              <a:rPr sz="1190" b="1" i="0">
+                <a:solidFill>
+                  <a:srgbClr val="222222"/>
+                </a:solidFill>
+                <a:latin typeface="Versos"/>
+              </a:rPr>
+              <a:t>D+0</a:t>
+            </a:r>
+          </a:p>
+          <a:p>
+            <a:pPr algn="l">
+              <a:lnSpc>
+                <a:spcPts val="1333"/>
+              </a:lnSpc>
+            </a:pPr>
+            <a:r>
+              <a:rPr sz="1190" b="0" i="0">
+                <a:solidFill>
+                  <a:srgbClr val="222222"/>
+                </a:solidFill>
+                <a:latin typeface="Versos"/>
+              </a:rPr>
+              <a:t>Resgate:</a:t>
+            </a:r>
+          </a:p>
+          <a:p>
+            <a:pPr algn="l">
+              <a:lnSpc>
+                <a:spcPts val="1333"/>
+              </a:lnSpc>
+            </a:pPr>
+            <a:r>
+              <a:rPr sz="1190" b="1" i="0">
+                <a:solidFill>
+                  <a:srgbClr val="222222"/>
+                </a:solidFill>
+                <a:latin typeface="Versos"/>
+              </a:rPr>
+              <a:t>D+0</a:t>
+            </a:r>
+          </a:p>
+          <a:p>
+            <a:pPr algn="l">
+              <a:lnSpc>
+                <a:spcPts val="1333"/>
+              </a:lnSpc>
+            </a:pPr>
+            <a:r>
+              <a:rPr sz="1190" b="0" i="0">
+                <a:solidFill>
+                  <a:srgbClr val="222222"/>
+                </a:solidFill>
+                <a:latin typeface="Versos"/>
+              </a:rPr>
+              <a:t>Aplicação mínima inicial:</a:t>
+            </a:r>
+          </a:p>
+          <a:p>
+            <a:pPr algn="l">
+              <a:lnSpc>
+                <a:spcPts val="1333"/>
+              </a:lnSpc>
+            </a:pPr>
+            <a:r>
+              <a:rPr sz="1190" b="1" i="0">
+                <a:solidFill>
+                  <a:srgbClr val="222222"/>
+                </a:solidFill>
+                <a:latin typeface="Versos"/>
+              </a:rPr>
+              <a:t>R$ 1.000,00</a:t>
+            </a:r>
+          </a:p>
+          <a:p>
+            <a:pPr algn="l">
+              <a:lnSpc>
+                <a:spcPts val="1333"/>
+              </a:lnSpc>
+            </a:pPr>
+            <a:r>
+              <a:rPr sz="1190" b="0" i="0">
+                <a:solidFill>
+                  <a:srgbClr val="222222"/>
+                </a:solidFill>
+                <a:latin typeface="Versos"/>
+              </a:rPr>
+              <a:t>Movimentação mínima:</a:t>
+            </a:r>
+          </a:p>
+          <a:p>
+            <a:pPr algn="l">
+              <a:lnSpc>
+                <a:spcPts val="1333"/>
+              </a:lnSpc>
+            </a:pPr>
+            <a:r>
+              <a:rPr sz="1190" b="1" i="0">
+                <a:solidFill>
+                  <a:srgbClr val="222222"/>
+                </a:solidFill>
+                <a:latin typeface="Versos"/>
+              </a:rPr>
+              <a:t>R$ 1.000,00</a:t>
+            </a:r>
+          </a:p>
+        </p:txBody>
+      </p:sp>
+      <p:sp>
+        <p:nvSpPr>
+          <p:cNvPr id="17" name="TextBox 16"/>
+          <p:cNvSpPr txBox="1"/>
+          <p:nvPr/>
+        </p:nvSpPr>
+        <p:spPr>
+          <a:xfrm>
+            <a:off x="3878280" y="3767596"/>
             <a:ext cx="3412281" cy="181440"/>
           </a:xfrm>
           <a:prstGeom prst="rect">
@@ -13474,6 +13623,43 @@
           <a:p>
             <a:pPr algn="l">
               <a:lnSpc>
+                <a:spcPts val="1369"/>
+              </a:lnSpc>
+            </a:pPr>
+            <a:r>
+              <a:rPr sz="1190" b="1" i="0">
+                <a:solidFill>
+                  <a:srgbClr val="111111"/>
+                </a:solidFill>
+                <a:latin typeface="Versos"/>
+              </a:rPr>
+              <a:t>Patrimônio líquido</a:t>
+            </a:r>
+          </a:p>
+        </p:txBody>
+      </p:sp>
+      <p:sp>
+        <p:nvSpPr>
+          <p:cNvPr id="18" name="TextBox 17"/>
+          <p:cNvSpPr txBox="1"/>
+          <p:nvPr/>
+        </p:nvSpPr>
+        <p:spPr>
+          <a:xfrm>
+            <a:off x="3878280" y="3956596"/>
+            <a:ext cx="3412281" cy="181440"/>
+          </a:xfrm>
+          <a:prstGeom prst="rect">
+            <a:avLst/>
+          </a:prstGeom>
+          <a:noFill/>
+        </p:spPr>
+        <p:txBody>
+          <a:bodyPr wrap="none" lIns="0" rIns="0" tIns="0" bIns="0" anchor="t"/>
+          <a:lstStyle/>
+          <a:p>
+            <a:pPr algn="l">
+              <a:lnSpc>
                 <a:spcPts val="1333"/>
               </a:lnSpc>
             </a:pPr>
@@ -13484,193 +13670,7 @@
                 </a:solidFill>
                 <a:latin typeface="Versos"/>
               </a:rPr>
-              <a:t>Não há</a:t>
-            </a:r>
-          </a:p>
-        </p:txBody>
-      </p:sp>
-      <p:sp>
-        <p:nvSpPr>
-          <p:cNvPr id="17" name="TextBox 16"/>
-          <p:cNvSpPr txBox="1"/>
-          <p:nvPr/>
-        </p:nvSpPr>
-        <p:spPr>
-          <a:xfrm>
-            <a:off x="3878280" y="2385770"/>
-            <a:ext cx="3412281" cy="181440"/>
-          </a:xfrm>
-          <a:prstGeom prst="rect">
-            <a:avLst/>
-          </a:prstGeom>
-          <a:noFill/>
-        </p:spPr>
-        <p:txBody>
-          <a:bodyPr wrap="none" lIns="0" rIns="0" tIns="0" bIns="0" anchor="t"/>
-          <a:lstStyle/>
-          <a:p>
-            <a:pPr algn="l">
-              <a:lnSpc>
-                <a:spcPts val="1369"/>
-              </a:lnSpc>
-            </a:pPr>
-            <a:r>
-              <a:rPr sz="1190" b="1" i="0">
-                <a:solidFill>
-                  <a:srgbClr val="111111"/>
-                </a:solidFill>
-                <a:latin typeface="Versos"/>
-              </a:rPr>
-              <a:t>Informações Operacionais</a:t>
-            </a:r>
-          </a:p>
-        </p:txBody>
-      </p:sp>
-      <p:sp>
-        <p:nvSpPr>
-          <p:cNvPr id="18" name="TextBox 17"/>
-          <p:cNvSpPr txBox="1"/>
-          <p:nvPr/>
-        </p:nvSpPr>
-        <p:spPr>
-          <a:xfrm>
-            <a:off x="3878280" y="2574770"/>
-            <a:ext cx="3281040" cy="1366351"/>
-          </a:xfrm>
-          <a:prstGeom prst="rect">
-            <a:avLst/>
-          </a:prstGeom>
-          <a:noFill/>
-        </p:spPr>
-        <p:txBody>
-          <a:bodyPr wrap="square" lIns="0" rIns="0" tIns="0" bIns="0" anchor="t"/>
-          <a:lstStyle/>
-          <a:p>
-            <a:pPr algn="l">
-              <a:lnSpc>
-                <a:spcPts val="1333"/>
-              </a:lnSpc>
-            </a:pPr>
-            <a:r>
-              <a:rPr sz="1190" b="0" i="0">
-                <a:solidFill>
-                  <a:srgbClr val="222222"/>
-                </a:solidFill>
-                <a:latin typeface="Versos"/>
-              </a:rPr>
-              <a:t>Aplicação:</a:t>
-            </a:r>
-          </a:p>
-          <a:p>
-            <a:pPr algn="l">
-              <a:lnSpc>
-                <a:spcPts val="1333"/>
-              </a:lnSpc>
-            </a:pPr>
-            <a:r>
-              <a:rPr sz="1190" b="1" i="0">
-                <a:solidFill>
-                  <a:srgbClr val="222222"/>
-                </a:solidFill>
-                <a:latin typeface="Versos"/>
-              </a:rPr>
-              <a:t>D+0</a:t>
-            </a:r>
-          </a:p>
-          <a:p>
-            <a:pPr algn="l">
-              <a:lnSpc>
-                <a:spcPts val="1333"/>
-              </a:lnSpc>
-            </a:pPr>
-            <a:r>
-              <a:rPr sz="1190" b="0" i="0">
-                <a:solidFill>
-                  <a:srgbClr val="222222"/>
-                </a:solidFill>
-                <a:latin typeface="Versos"/>
-              </a:rPr>
-              <a:t>Resgate:</a:t>
-            </a:r>
-          </a:p>
-          <a:p>
-            <a:pPr algn="l">
-              <a:lnSpc>
-                <a:spcPts val="1333"/>
-              </a:lnSpc>
-            </a:pPr>
-            <a:r>
-              <a:rPr sz="1190" b="1" i="0">
-                <a:solidFill>
-                  <a:srgbClr val="222222"/>
-                </a:solidFill>
-                <a:latin typeface="Versos"/>
-              </a:rPr>
-              <a:t>D+0</a:t>
-            </a:r>
-          </a:p>
-          <a:p>
-            <a:pPr algn="l">
-              <a:lnSpc>
-                <a:spcPts val="1333"/>
-              </a:lnSpc>
-            </a:pPr>
-            <a:r>
-              <a:rPr sz="1190" b="0" i="0">
-                <a:solidFill>
-                  <a:srgbClr val="222222"/>
-                </a:solidFill>
-                <a:latin typeface="Versos"/>
-              </a:rPr>
-              <a:t>Aplicação mínima inicial:</a:t>
-            </a:r>
-          </a:p>
-          <a:p>
-            <a:pPr algn="l">
-              <a:lnSpc>
-                <a:spcPts val="1333"/>
-              </a:lnSpc>
-            </a:pPr>
-            <a:r>
-              <a:rPr sz="1190" b="1" i="0">
-                <a:solidFill>
-                  <a:srgbClr val="222222"/>
-                </a:solidFill>
-                <a:latin typeface="Versos"/>
-              </a:rPr>
-              <a:t>R$ 1.000,00</a:t>
-            </a:r>
-          </a:p>
-          <a:p>
-            <a:pPr algn="l">
-              <a:lnSpc>
-                <a:spcPts val="1333"/>
-              </a:lnSpc>
-            </a:pPr>
-            <a:r>
-              <a:rPr sz="1190" b="0" i="0">
-                <a:solidFill>
-                  <a:srgbClr val="222222"/>
-                </a:solidFill>
-                <a:latin typeface="Versos"/>
-              </a:rPr>
-              <a:t>Movimentação mínima:</a:t>
-            </a:r>
-          </a:p>
-          <a:p>
-            <a:pPr algn="l">
-              <a:lnSpc>
-                <a:spcPts val="1333"/>
-              </a:lnSpc>
-            </a:pPr>
-            <a:r>
-              <a:rPr sz="1190" b="1" i="0">
-                <a:solidFill>
-                  <a:srgbClr val="222222"/>
-                </a:solidFill>
-                <a:latin typeface="Versos"/>
-              </a:rPr>
-              <a:t>R$ 1.000,00</a:t>
+              <a:t>R$ 1.793.381.077,96</a:t>
             </a:r>
           </a:p>
         </p:txBody>

--- a/AutomaTivio/saida/2026-08/pptx/Tivio Banks - Relatório de Gestão - Agosto 2026.pptx
+++ b/AutomaTivio/saida/2026-08/pptx/Tivio Banks - Relatório de Gestão - Agosto 2026.pptx
@@ -14160,7 +14160,7 @@
         <p:spPr>
           <a:xfrm>
             <a:off x="4528440" y="10020071"/>
-            <a:ext cx="500613" cy="98280"/>
+            <a:ext cx="527886" cy="98280"/>
           </a:xfrm>
           <a:prstGeom prst="rect">
             <a:avLst/>
@@ -14183,7 +14183,7 @@
                 </a:solidFill>
                 <a:latin typeface="Versos"/>
               </a:rPr>
-              <a:t>RATING S&amp;P:</a:t>
+              <a:t>Rating S&amp;P</a:t>
             </a:r>
           </a:p>
         </p:txBody>
@@ -14197,7 +14197,7 @@
         <p:spPr>
           <a:xfrm>
             <a:off x="4528440" y="10110791"/>
-            <a:ext cx="500613" cy="166320"/>
+            <a:ext cx="527886" cy="166320"/>
           </a:xfrm>
           <a:prstGeom prst="rect">
             <a:avLst/>
@@ -14220,7 +14220,7 @@
                 </a:solidFill>
                 <a:latin typeface="Versos"/>
               </a:rPr>
-              <a:t>AMP-1</a:t>
+              <a:t>brAMP1</a:t>
             </a:r>
           </a:p>
         </p:txBody>

--- a/AutomaTivio/saida/2026-08/pptx/Tivio Banks - Relatório de Gestão - Agosto 2026.pptx
+++ b/AutomaTivio/saida/2026-08/pptx/Tivio Banks - Relatório de Gestão - Agosto 2026.pptx
@@ -13781,7 +13781,7 @@
                 </a:solidFill>
                 <a:latin typeface="Versos"/>
               </a:rPr>
-              <a:t>Disclaimer</a:t>
+              <a:t>MATERIAL TÉCNICO</a:t>
             </a:r>
           </a:p>
         </p:txBody>
@@ -13795,7 +13795,7 @@
         <p:spPr>
           <a:xfrm>
             <a:off x="400680" y="6463800"/>
-            <a:ext cx="6758640" cy="282555"/>
+            <a:ext cx="6758640" cy="398790"/>
           </a:xfrm>
           <a:prstGeom prst="rect">
             <a:avLst/>
@@ -13808,11 +13808,11 @@
           <a:p>
             <a:pPr algn="just">
               <a:lnSpc>
-                <a:spcPts val="726"/>
-              </a:lnSpc>
-            </a:pPr>
-            <a:r>
-              <a:rPr sz="595" b="0" i="0">
+                <a:spcPts val="1034"/>
+              </a:lnSpc>
+            </a:pPr>
+            <a:r>
+              <a:rPr sz="848" b="0" i="0">
                 <a:solidFill>
                   <a:srgbClr val="E9E9E9"/>
                 </a:solidFill>
@@ -13831,8 +13831,8 @@
         </p:nvSpPr>
         <p:spPr>
           <a:xfrm>
-            <a:off x="400680" y="6766672"/>
-            <a:ext cx="6758640" cy="466830"/>
+            <a:off x="400680" y="6895546"/>
+            <a:ext cx="6758640" cy="267435"/>
           </a:xfrm>
           <a:prstGeom prst="rect">
             <a:avLst/>
@@ -13845,17 +13845,17 @@
           <a:p>
             <a:pPr algn="just">
               <a:lnSpc>
-                <a:spcPts val="726"/>
-              </a:lnSpc>
-            </a:pPr>
-            <a:r>
-              <a:rPr sz="595" b="0" i="0">
+                <a:spcPts val="1034"/>
+              </a:lnSpc>
+            </a:pPr>
+            <a:r>
+              <a:rPr sz="848" b="0" i="0">
                 <a:solidFill>
                   <a:srgbClr val="E9E9E9"/>
                 </a:solidFill>
                 <a:latin typeface="Versos"/>
               </a:rPr>
-              <a:t>Este material foi elaborado pela Tivio Capital Distribuidora de Títulos e Valores Mobiliários S.A. (“TIVIO CAPITAL”). Este material é destinado aos seus receptores, fornecido unicamente para fins comerciais, não constituindo compromisso, indicação ou recomendação para iniciar ou encerrar qualquer transação. Este conteúdo não deve ser reproduzido no todo ou em parte, redistribuído ou transmitido para qualquer outra pessoa sem o consentimento prévio da TIVIO CAPITAL. Este documento não é, e não deve ser interpretado como, uma oferta de venda ou solicitação de uma oferta de compra de qualquer título ou valor mobiliário. A TIVIO CAPITAL, seus acionistas e demais empresas coligadas se eximem de qualquer responsabilidade por quaisquer prejuízos, diretos ou indiretos, que venham a decorrer da utilização deste material, de seu conteúdo e da realização de operações com base neste material.</a:t>
+              <a:t>Este material foi elaborado pela Tivio Capital Distribuidora de Títulos e Valores Mobiliários S.A. e possui caráter meramente informativo. Não constitui oferta, recomendação ou aconselhamento de investimento.</a:t>
             </a:r>
           </a:p>
         </p:txBody>
@@ -13868,8 +13868,8 @@
         </p:nvSpPr>
         <p:spPr>
           <a:xfrm>
-            <a:off x="400680" y="7253820"/>
-            <a:ext cx="6758640" cy="835380"/>
+            <a:off x="400680" y="7195938"/>
+            <a:ext cx="6758640" cy="398790"/>
           </a:xfrm>
           <a:prstGeom prst="rect">
             <a:avLst/>
@@ -13882,17 +13882,17 @@
           <a:p>
             <a:pPr algn="just">
               <a:lnSpc>
-                <a:spcPts val="726"/>
-              </a:lnSpc>
-            </a:pPr>
-            <a:r>
-              <a:rPr sz="595" b="0" i="0">
+                <a:spcPts val="1034"/>
+              </a:lnSpc>
+            </a:pPr>
+            <a:r>
+              <a:rPr sz="848" b="0" i="0">
                 <a:solidFill>
                   <a:srgbClr val="E9E9E9"/>
                 </a:solidFill>
                 <a:latin typeface="Versos"/>
               </a:rPr>
-              <a:t>Consulte o documento de tributação para Fundos de Investimento para mais informações sobre a tributação aplicável, inclusive a regra aplicável em eventual desenquadramento, este documento está disponível em https://tivio.com/documentos/. A descrição acima não pode ser considerada como objetivo do fundo. Todas as informações legais podem ser observadas no regulamento do fundo, disponíveis no site https://tivio.com/fundos/. Os indicadores aqui apresentados devem ser utilizados como referência econômica e não parâmetro objetivo do fundo. Principais Fatores de Risco: (i) Crédito: risco de os emissores dos ativos financeiros e/ou das contrapartes não cumprirem suas obrigações de pagamento e/ou de liquidação das operações contratadas; (ii) Liquidez: risco de redução ou inexistência de demanda pelos ativos financeiros nos respectivos mercados em que são negociados; (iii) Mercado: Risco de oscilações decorrentes das flutuações de preços e cotações de mercado; (iv) Derivativos: pode não resultar nos efeitos desejados, devido a fatores como: descolamento entre o preço do derivativo e seu ativo objeto; alterações nas condições de negociação ou liquidação devido à interferência de órgãos reguladores ou dos mercados organizados onde são negociados; (v) Tratamento Tributário de Longo Prazo: O tratamento aplicável ao investidor depende da manutenção da carteira de ativos com prazo médio superior a 365 dias. Não há garantia de que o fundo terá o tratamento tributário de longo prazo.</a:t>
+              <a:t>Antes de investir, leia a lâmina de informações básicas, se aplicável, o regulamento, o formulário de informações complementares, seus anexos e apêndices. Esses documentos e informações sobre tributação estão disponíveis em tivio.com/fundos/ e tivio.com/documentos/.</a:t>
             </a:r>
           </a:p>
         </p:txBody>
@@ -13905,8 +13905,8 @@
         </p:nvSpPr>
         <p:spPr>
           <a:xfrm>
-            <a:off x="400680" y="8109517"/>
-            <a:ext cx="6758640" cy="374692"/>
+            <a:off x="400680" y="7627685"/>
+            <a:ext cx="6758640" cy="267435"/>
           </a:xfrm>
           <a:prstGeom prst="rect">
             <a:avLst/>
@@ -13919,17 +13919,17 @@
           <a:p>
             <a:pPr algn="just">
               <a:lnSpc>
-                <a:spcPts val="726"/>
-              </a:lnSpc>
-            </a:pPr>
-            <a:r>
-              <a:rPr sz="595" b="0" i="0">
+                <a:spcPts val="1034"/>
+              </a:lnSpc>
+            </a:pPr>
+            <a:r>
+              <a:rPr sz="848" b="0" i="0">
                 <a:solidFill>
                   <a:srgbClr val="E9E9E9"/>
                 </a:solidFill>
                 <a:latin typeface="Versos"/>
               </a:rPr>
-              <a:t>Leia a lâmina de informações essenciais, se houver, e o regulamento antes de investir. Estes documentos podem ser encontrados no site https://tivio.com/fundos/. Leia previamente as condições de cada produto antes de investir. Os investimentos apresentados podem não ser adequados aos seus objetivos, situação financeira ou necessidades individuais. A rentabilidade obtida no passado não representa garantia de resultados futuros. A rentabilidade divulgada não é líquida de impostos. “Os ativos financeiros integrantes nesta carteira podem não possuir liquidez imediata, podendo seus prazos e/ou rentabilidade variar de acordo com o vencimento ou prazo de resgate de cada ativo, caso seja negociado antecipadamente.</a:t>
+              <a:t>Os investimentos envolvem riscos. Consulte os documentos do fundo para conhecer sua estratégia, público-alvo, condições e principais fatores de risco.</a:t>
             </a:r>
           </a:p>
         </p:txBody>
@@ -13942,8 +13942,45 @@
         </p:nvSpPr>
         <p:spPr>
           <a:xfrm>
-            <a:off x="400680" y="8504527"/>
-            <a:ext cx="6758640" cy="374692"/>
+            <a:off x="400680" y="7928077"/>
+            <a:ext cx="7028985" cy="136080"/>
+          </a:xfrm>
+          <a:prstGeom prst="rect">
+            <a:avLst/>
+          </a:prstGeom>
+          <a:noFill/>
+        </p:spPr>
+        <p:txBody>
+          <a:bodyPr wrap="none" lIns="0" rIns="0" tIns="0" bIns="0" anchor="t"/>
+          <a:lstStyle/>
+          <a:p>
+            <a:pPr algn="just">
+              <a:lnSpc>
+                <a:spcPts val="1034"/>
+              </a:lnSpc>
+            </a:pPr>
+            <a:r>
+              <a:rPr sz="848" b="0" i="0">
+                <a:solidFill>
+                  <a:srgbClr val="E9E9E9"/>
+                </a:solidFill>
+                <a:latin typeface="Versos"/>
+              </a:rPr>
+              <a:t>Rentabilidade obtida no passado não representa garantia de resultados futuros. A rentabilidade divulgada não é líquida de impostos.</a:t>
+            </a:r>
+          </a:p>
+        </p:txBody>
+      </p:sp>
+      <p:sp>
+        <p:nvSpPr>
+          <p:cNvPr id="27" name="TextBox 26"/>
+          <p:cNvSpPr txBox="1"/>
+          <p:nvPr/>
+        </p:nvSpPr>
+        <p:spPr>
+          <a:xfrm>
+            <a:off x="400680" y="8097114"/>
+            <a:ext cx="6758640" cy="267435"/>
           </a:xfrm>
           <a:prstGeom prst="rect">
             <a:avLst/>
@@ -13956,24 +13993,61 @@
           <a:p>
             <a:pPr algn="just">
               <a:lnSpc>
-                <a:spcPts val="726"/>
-              </a:lnSpc>
-            </a:pPr>
-            <a:r>
-              <a:rPr sz="595" b="0" i="0">
+                <a:spcPts val="1034"/>
+              </a:lnSpc>
+            </a:pPr>
+            <a:r>
+              <a:rPr sz="848" b="0" i="0">
                 <a:solidFill>
                   <a:srgbClr val="E9E9E9"/>
                 </a:solidFill>
                 <a:latin typeface="Versos"/>
               </a:rPr>
-              <a:t>Para avaliação da performance de fundo(s) de investimento(s), é recomendável uma análise de, no mínimo, 12 (doze) meses. Fundos de investimento não contam com garantia do administrador, do gestor, de qualquer mecanismo de seguro ou do Fundo Garantidor de Crédito (FGC). O preenchimento do formulário API – Análise de Perfil do Investidor ou Suitability é essencial para garantir a adequação do perfil do cliente ao produto de investimento escolhido. Os indicadores aqui apresentados devem ser utilizados como referência econômica e não parâmetro objetivo do fundo. Material de Divulgação.</a:t>
-            </a:r>
-          </a:p>
-        </p:txBody>
-      </p:sp>
-      <p:sp>
-        <p:nvSpPr>
-          <p:cNvPr id="27" name="TextBox 26"/>
+              <a:t>Os investimentos em fundos não são garantidos pelo administrador, pelo gestor, por qualquer mecanismo de seguro ou pelo Fundo Garantidor de Crédito – FGC.</a:t>
+            </a:r>
+          </a:p>
+        </p:txBody>
+      </p:sp>
+      <p:sp>
+        <p:nvSpPr>
+          <p:cNvPr id="28" name="TextBox 27"/>
+          <p:cNvSpPr txBox="1"/>
+          <p:nvPr/>
+        </p:nvSpPr>
+        <p:spPr>
+          <a:xfrm>
+            <a:off x="400680" y="8397506"/>
+            <a:ext cx="6758640" cy="267435"/>
+          </a:xfrm>
+          <a:prstGeom prst="rect">
+            <a:avLst/>
+          </a:prstGeom>
+          <a:noFill/>
+        </p:spPr>
+        <p:txBody>
+          <a:bodyPr wrap="square" lIns="0" rIns="0" tIns="0" bIns="0" anchor="t"/>
+          <a:lstStyle/>
+          <a:p>
+            <a:pPr algn="just">
+              <a:lnSpc>
+                <a:spcPts val="1034"/>
+              </a:lnSpc>
+            </a:pPr>
+            <a:r>
+              <a:rPr sz="848" b="0" i="0">
+                <a:solidFill>
+                  <a:srgbClr val="E9E9E9"/>
+                </a:solidFill>
+                <a:latin typeface="Versos"/>
+              </a:rPr>
+              <a:t>A Tivio Capital Distribuidora de Títulos e Valores Mobiliários S.A. integra o conglomerado prudencial liderado pelo Banco Bradesco S.A.</a:t>
+            </a:r>
+          </a:p>
+        </p:txBody>
+      </p:sp>
+      <p:sp>
+        <p:nvSpPr>
+          <p:cNvPr id="29" name="TextBox 28"/>
           <p:cNvSpPr txBox="1"/>
           <p:nvPr/>
         </p:nvSpPr>
@@ -14026,7 +14100,7 @@
       </p:sp>
       <p:sp>
         <p:nvSpPr>
-          <p:cNvPr id="28" name="TextBox 27"/>
+          <p:cNvPr id="30" name="TextBox 29"/>
           <p:cNvSpPr txBox="1"/>
           <p:nvPr/>
         </p:nvSpPr>
@@ -14079,7 +14153,7 @@
       </p:sp>
       <p:sp>
         <p:nvSpPr>
-          <p:cNvPr id="29" name="TextBox 28"/>
+          <p:cNvPr id="31" name="TextBox 30"/>
           <p:cNvSpPr txBox="1"/>
           <p:nvPr/>
         </p:nvSpPr>
@@ -14116,7 +14190,7 @@
       </p:sp>
       <p:sp>
         <p:nvSpPr>
-          <p:cNvPr id="30" name="TextBox 29"/>
+          <p:cNvPr id="32" name="TextBox 31"/>
           <p:cNvSpPr txBox="1"/>
           <p:nvPr/>
         </p:nvSpPr>
@@ -14153,7 +14227,7 @@
       </p:sp>
       <p:sp>
         <p:nvSpPr>
-          <p:cNvPr id="31" name="TextBox 30"/>
+          <p:cNvPr id="33" name="TextBox 32"/>
           <p:cNvSpPr txBox="1"/>
           <p:nvPr/>
         </p:nvSpPr>
@@ -14190,7 +14264,7 @@
       </p:sp>
       <p:sp>
         <p:nvSpPr>
-          <p:cNvPr id="32" name="TextBox 31"/>
+          <p:cNvPr id="34" name="TextBox 33"/>
           <p:cNvSpPr txBox="1"/>
           <p:nvPr/>
         </p:nvSpPr>

--- a/AutomaTivio/saida/2026-08/pptx/Tivio Banks - Relatório de Gestão - Agosto 2026.pptx
+++ b/AutomaTivio/saida/2026-08/pptx/Tivio Banks - Relatório de Gestão - Agosto 2026.pptx
@@ -14053,8 +14053,8 @@
         </p:nvSpPr>
         <p:spPr>
           <a:xfrm>
-            <a:off x="400680" y="9086056"/>
-            <a:ext cx="859477" cy="200221"/>
+            <a:off x="400680" y="9013055"/>
+            <a:ext cx="1134000" cy="270742"/>
           </a:xfrm>
           <a:prstGeom prst="rect">
             <a:avLst/>
@@ -14067,11 +14067,11 @@
           <a:p>
             <a:pPr algn="l">
               <a:lnSpc>
-                <a:spcPts val="803"/>
-              </a:lnSpc>
-            </a:pPr>
-            <a:r>
-              <a:rPr sz="642" b="0" i="0">
+                <a:spcPts val="1060"/>
+              </a:lnSpc>
+            </a:pPr>
+            <a:r>
+              <a:rPr sz="848" b="0" i="0">
                 <a:solidFill>
                   <a:srgbClr val="E9E9E9"/>
                 </a:solidFill>
@@ -14083,11 +14083,11 @@
           <a:p>
             <a:pPr algn="l">
               <a:lnSpc>
-                <a:spcPts val="803"/>
-              </a:lnSpc>
-            </a:pPr>
-            <a:r>
-              <a:rPr sz="642" b="0" i="0">
+                <a:spcPts val="1060"/>
+              </a:lnSpc>
+            </a:pPr>
+            <a:r>
+              <a:rPr sz="848" b="0" i="0">
                 <a:solidFill>
                   <a:srgbClr val="E9E9E9"/>
                 </a:solidFill>
@@ -14106,8 +14106,8 @@
         </p:nvSpPr>
         <p:spPr>
           <a:xfrm>
-            <a:off x="1381117" y="9086056"/>
-            <a:ext cx="3049987" cy="200221"/>
+            <a:off x="1655640" y="9013055"/>
+            <a:ext cx="4024164" cy="270742"/>
           </a:xfrm>
           <a:prstGeom prst="rect">
             <a:avLst/>
@@ -14120,11 +14120,11 @@
           <a:p>
             <a:pPr algn="l">
               <a:lnSpc>
-                <a:spcPts val="803"/>
-              </a:lnSpc>
-            </a:pPr>
-            <a:r>
-              <a:rPr sz="642" b="0" i="0">
+                <a:spcPts val="1060"/>
+              </a:lnSpc>
+            </a:pPr>
+            <a:r>
+              <a:rPr sz="848" b="0" i="0">
                 <a:solidFill>
                   <a:srgbClr val="E9E9E9"/>
                 </a:solidFill>
@@ -14136,11 +14136,11 @@
           <a:p>
             <a:pPr algn="l">
               <a:lnSpc>
-                <a:spcPts val="803"/>
-              </a:lnSpc>
-            </a:pPr>
-            <a:r>
-              <a:rPr sz="642" b="0" i="0">
+                <a:spcPts val="1060"/>
+              </a:lnSpc>
+            </a:pPr>
+            <a:r>
+              <a:rPr sz="848" b="0" i="0">
                 <a:solidFill>
                   <a:srgbClr val="E9E9E9"/>
                 </a:solidFill>

--- a/AutomaTivio/saida/2026-08/pptx/Tivio Banks - Relatório de Gestão - Agosto 2026.pptx
+++ b/AutomaTivio/saida/2026-08/pptx/Tivio Banks - Relatório de Gestão - Agosto 2026.pptx
@@ -5797,7 +5797,7 @@
                 </a:solidFill>
                 <a:latin typeface="Versos"/>
               </a:rPr>
-              <a:t>O Fundo Tivio Banks obteve retorno de 1,10% (101% do CDI) no mês e acumula 9,36% (100% do CDI) em 2026. A alocação em crédito era de 75%, integralmente concentrada em emissores do setor bancário. O carrego da carteira encontra-se em CDI +0,25%, com duration média de 1,05 ano.</a:t>
+              <a:t>O Fundo Tivio Banks obteve retorno de 1,10% (100,59% do CDI) no mês e acumula 9,36% (100,31% do CDI) em 2026. A alocação em crédito era de 76%, integralmente concentrada em emissores do setor bancário. O carrego da carteira encontra-se em CDI +0,25%, com duration média de 1,05 ano.</a:t>
             </a:r>
           </a:p>
         </p:txBody>
